--- a/media/exports/reports/2025-10/growth.pptx
+++ b/media/exports/reports/2025-10/growth.pptx
@@ -352,7 +352,9 @@
     <a:lstStyle/>
     <a:p>
       <a:pPr>
-        <a:defRPr sz="1800"/>
+        <a:defRPr sz="1800">
+          <a:latin typeface="Roboto"/>
+        </a:defRPr>
       </a:pPr>
       <a:endParaRPr/>
     </a:p>
@@ -582,7 +584,9 @@
     <a:lstStyle/>
     <a:p>
       <a:pPr>
-        <a:defRPr sz="1800"/>
+        <a:defRPr sz="1800">
+          <a:latin typeface="Roboto"/>
+        </a:defRPr>
       </a:pPr>
       <a:endParaRPr/>
     </a:p>
@@ -812,7 +816,9 @@
     <a:lstStyle/>
     <a:p>
       <a:pPr>
-        <a:defRPr sz="1800"/>
+        <a:defRPr sz="1800">
+          <a:latin typeface="Roboto"/>
+        </a:defRPr>
       </a:pPr>
       <a:endParaRPr/>
     </a:p>
@@ -1042,7 +1048,9 @@
     <a:lstStyle/>
     <a:p>
       <a:pPr>
-        <a:defRPr sz="1800"/>
+        <a:defRPr sz="1800">
+          <a:latin typeface="Roboto"/>
+        </a:defRPr>
       </a:pPr>
       <a:endParaRPr/>
     </a:p>
@@ -4073,11 +4081,17 @@
           <a:bodyPr rtlCol="0" anchor="ctr"/>
           <a:lstStyle/>
           <a:p>
+            <a:pPr>
+              <a:defRPr>
+                <a:latin typeface="Roboto"/>
+              </a:defRPr>
+            </a:pPr>
             <a:r>
               <a:rPr sz="1600" b="1">
                 <a:solidFill>
                   <a:srgbClr val="FFFFFF"/>
                 </a:solidFill>
+                <a:latin typeface="Roboto"/>
               </a:rPr>
               <a:t>4th</a:t>
             </a:r>
@@ -4106,14 +4120,19 @@
           </a:bodyPr>
           <a:lstStyle/>
           <a:p>
+            <a:pPr>
+              <a:defRPr>
+                <a:latin typeface="Roboto"/>
+              </a:defRPr>
+            </a:pPr>
             <a:r>
               <a:rPr sz="1800" b="1">
                 <a:solidFill>
                   <a:srgbClr val="25342A"/>
                 </a:solidFill>
-                <a:latin typeface="Arial"/>
-              </a:rPr>
-              <a:t>The 4th Sheet</a:t>
+                <a:latin typeface="Roboto"/>
+              </a:rPr>
+              <a:t>The Fourth Sheet</a:t>
             </a:r>
           </a:p>
         </p:txBody>
@@ -4140,12 +4159,17 @@
           </a:bodyPr>
           <a:lstStyle/>
           <a:p>
+            <a:pPr>
+              <a:defRPr>
+                <a:latin typeface="Roboto"/>
+              </a:defRPr>
+            </a:pPr>
             <a:r>
               <a:rPr sz="1100" b="1">
                 <a:solidFill>
                   <a:srgbClr val="8A7A52"/>
                 </a:solidFill>
-                <a:latin typeface="Arial"/>
+                <a:latin typeface="Roboto"/>
               </a:rPr>
               <a:t>SAMPLE DATA · invented figures for demonstration</a:t>
             </a:r>
@@ -4174,12 +4198,17 @@
           </a:bodyPr>
           <a:lstStyle/>
           <a:p>
+            <a:pPr>
+              <a:defRPr>
+                <a:latin typeface="Roboto"/>
+              </a:defRPr>
+            </a:pPr>
             <a:r>
               <a:rPr sz="3400" b="1">
                 <a:solidFill>
                   <a:srgbClr val="25342A"/>
                 </a:solidFill>
-                <a:latin typeface="Arial"/>
+                <a:latin typeface="Roboto"/>
               </a:rPr>
               <a:t>Which products and services are growing?</a:t>
             </a:r>
@@ -4208,12 +4237,17 @@
           </a:bodyPr>
           <a:lstStyle/>
           <a:p>
+            <a:pPr>
+              <a:defRPr>
+                <a:latin typeface="Roboto"/>
+              </a:defRPr>
+            </a:pPr>
             <a:r>
               <a:rPr sz="1600" b="0">
                 <a:solidFill>
                   <a:srgbClr val="5F6F63"/>
                 </a:solidFill>
-                <a:latin typeface="Arial"/>
+                <a:latin typeface="Roboto"/>
               </a:rPr>
               <a:t>SME sample businesses</a:t>
             </a:r>
@@ -4242,12 +4276,17 @@
           </a:bodyPr>
           <a:lstStyle/>
           <a:p>
+            <a:pPr>
+              <a:defRPr>
+                <a:latin typeface="Roboto"/>
+              </a:defRPr>
+            </a:pPr>
             <a:r>
               <a:rPr sz="1400" b="0">
                 <a:solidFill>
                   <a:srgbClr val="25342A"/>
                 </a:solidFill>
-                <a:latin typeface="Arial"/>
+                <a:latin typeface="Roboto"/>
               </a:rPr>
               <a:t>Period: October 2025. Revenue, gross margin and growth (year on year) by product or service line over 24 months. Pick a line and every number, chart and note follows it.</a:t>
             </a:r>
@@ -4276,45 +4315,65 @@
           </a:bodyPr>
           <a:lstStyle/>
           <a:p>
+            <a:pPr>
+              <a:defRPr>
+                <a:latin typeface="Roboto"/>
+              </a:defRPr>
+            </a:pPr>
             <a:r>
               <a:rPr sz="1100" b="0">
                 <a:solidFill>
                   <a:srgbClr val="5F6F63"/>
                 </a:solidFill>
-                <a:latin typeface="Arial"/>
+                <a:latin typeface="Roboto"/>
               </a:rPr>
               <a:t>How final is this data?</a:t>
             </a:r>
           </a:p>
           <a:p>
+            <a:pPr>
+              <a:defRPr>
+                <a:latin typeface="Roboto"/>
+              </a:defRPr>
+            </a:pPr>
             <a:r>
               <a:rPr sz="1100" b="0">
                 <a:solidFill>
                   <a:srgbClr val="5F6F63"/>
                 </a:solidFill>
-                <a:latin typeface="Arial"/>
+                <a:latin typeface="Roboto"/>
               </a:rPr>
               <a:t>September 2025: Locked. September 2025 is locked (closed 2 Oct 2025). These numbers won't change.</a:t>
             </a:r>
           </a:p>
           <a:p>
+            <a:pPr>
+              <a:defRPr>
+                <a:latin typeface="Roboto"/>
+              </a:defRPr>
+            </a:pPr>
             <a:r>
               <a:rPr sz="1100" b="0">
                 <a:solidFill>
                   <a:srgbClr val="5F6F63"/>
                 </a:solidFill>
-                <a:latin typeface="Arial"/>
+                <a:latin typeface="Roboto"/>
               </a:rPr>
               <a:t>October 2025: Locked. October 2025 is locked (closed 4 Nov 2025). These numbers won't change.</a:t>
             </a:r>
           </a:p>
           <a:p>
+            <a:pPr>
+              <a:defRPr>
+                <a:latin typeface="Roboto"/>
+              </a:defRPr>
+            </a:pPr>
             <a:r>
               <a:rPr sz="1100" b="0">
                 <a:solidFill>
                   <a:srgbClr val="5F6F63"/>
                 </a:solidFill>
-                <a:latin typeface="Arial"/>
+                <a:latin typeface="Roboto"/>
               </a:rPr>
               <a:t>October 2026: Incomplete. October 2026 is still in progress: figures to 6 Oct only.</a:t>
             </a:r>
@@ -4343,12 +4402,17 @@
           </a:bodyPr>
           <a:lstStyle/>
           <a:p>
+            <a:pPr>
+              <a:defRPr>
+                <a:latin typeface="Roboto"/>
+              </a:defRPr>
+            </a:pPr>
             <a:r>
               <a:rPr sz="900" b="0">
                 <a:solidFill>
                   <a:srgbClr val="5F6F63"/>
                 </a:solidFill>
-                <a:latin typeface="Arial"/>
+                <a:latin typeface="Roboto"/>
               </a:rPr>
               <a:t>growth.pptx</a:t>
             </a:r>
@@ -4377,13 +4441,17 @@
           </a:bodyPr>
           <a:lstStyle/>
           <a:p>
-            <a:pPr algn="ctr"/>
+            <a:pPr algn="ctr">
+              <a:defRPr>
+                <a:latin typeface="Roboto"/>
+              </a:defRPr>
+            </a:pPr>
             <a:r>
               <a:rPr sz="900" b="0">
                 <a:solidFill>
                   <a:srgbClr val="5F6F63"/>
                 </a:solidFill>
-                <a:latin typeface="Arial"/>
+                <a:latin typeface="Roboto"/>
               </a:rPr>
               <a:t>Data retrieved 2pm, Tue 6 Oct 2026 · Sample data</a:t>
             </a:r>
@@ -4412,13 +4480,17 @@
           </a:bodyPr>
           <a:lstStyle/>
           <a:p>
-            <a:pPr algn="r"/>
+            <a:pPr algn="r">
+              <a:defRPr>
+                <a:latin typeface="Roboto"/>
+              </a:defRPr>
+            </a:pPr>
             <a:r>
               <a:rPr sz="900" b="0">
                 <a:solidFill>
                   <a:srgbClr val="5F6F63"/>
                 </a:solidFill>
-                <a:latin typeface="Arial"/>
+                <a:latin typeface="Roboto"/>
               </a:rPr>
               <a:t>Slide 1 of 27</a:t>
             </a:r>
@@ -4482,7 +4554,11 @@
           <a:bodyPr rtlCol="0" anchor="ctr"/>
           <a:lstStyle/>
           <a:p>
-            <a:pPr algn="ctr"/>
+            <a:pPr algn="ctr">
+              <a:defRPr>
+                <a:latin typeface="Roboto"/>
+              </a:defRPr>
+            </a:pPr>
           </a:p>
         </p:txBody>
       </p:sp>
@@ -4508,12 +4584,17 @@
           </a:bodyPr>
           <a:lstStyle/>
           <a:p>
+            <a:pPr>
+              <a:defRPr>
+                <a:latin typeface="Roboto"/>
+              </a:defRPr>
+            </a:pPr>
             <a:r>
               <a:rPr sz="1000" b="0">
                 <a:solidFill>
                   <a:srgbClr val="5F6F63"/>
                 </a:solidFill>
-                <a:latin typeface="Arial"/>
+                <a:latin typeface="Roboto"/>
               </a:rPr>
               <a:t>SME sample businesses · Which products and services are growing?</a:t>
             </a:r>
@@ -4542,12 +4623,17 @@
           </a:bodyPr>
           <a:lstStyle/>
           <a:p>
+            <a:pPr>
+              <a:defRPr>
+                <a:latin typeface="Roboto"/>
+              </a:defRPr>
+            </a:pPr>
             <a:r>
               <a:rPr sz="2400" b="1">
                 <a:solidFill>
                   <a:srgbClr val="25342A"/>
                 </a:solidFill>
-                <a:latin typeface="Arial"/>
+                <a:latin typeface="Roboto"/>
               </a:rPr>
               <a:t>Headline numbers · Trades · Line: Call-outs and repairs</a:t>
             </a:r>
@@ -4595,7 +4681,11 @@
           <a:bodyPr rtlCol="0" anchor="ctr"/>
           <a:lstStyle/>
           <a:p>
-            <a:pPr algn="ctr"/>
+            <a:pPr algn="ctr">
+              <a:defRPr>
+                <a:latin typeface="Roboto"/>
+              </a:defRPr>
+            </a:pPr>
           </a:p>
         </p:txBody>
       </p:sp>
@@ -4621,12 +4711,17 @@
           </a:bodyPr>
           <a:lstStyle/>
           <a:p>
+            <a:pPr>
+              <a:defRPr>
+                <a:latin typeface="Roboto"/>
+              </a:defRPr>
+            </a:pPr>
             <a:r>
               <a:rPr sz="1200" b="0">
                 <a:solidFill>
                   <a:srgbClr val="5F6F63"/>
                 </a:solidFill>
-                <a:latin typeface="Arial"/>
+                <a:latin typeface="Roboto"/>
               </a:rPr>
               <a:t>October against October last year</a:t>
             </a:r>
@@ -4655,12 +4750,17 @@
           </a:bodyPr>
           <a:lstStyle/>
           <a:p>
+            <a:pPr>
+              <a:defRPr>
+                <a:latin typeface="Roboto"/>
+              </a:defRPr>
+            </a:pPr>
             <a:r>
               <a:rPr sz="3000" b="1">
                 <a:solidFill>
                   <a:srgbClr val="2F7A5D"/>
                 </a:solidFill>
-                <a:latin typeface="Arial"/>
+                <a:latin typeface="Roboto"/>
               </a:rPr>
               <a:t>11.3%</a:t>
             </a:r>
@@ -4689,12 +4789,17 @@
           </a:bodyPr>
           <a:lstStyle/>
           <a:p>
+            <a:pPr>
+              <a:defRPr>
+                <a:latin typeface="Roboto"/>
+              </a:defRPr>
+            </a:pPr>
             <a:r>
               <a:rPr sz="1100" b="0">
                 <a:solidFill>
                   <a:srgbClr val="5F6F63"/>
                 </a:solidFill>
-                <a:latin typeface="Arial"/>
+                <a:latin typeface="Roboto"/>
               </a:rPr>
               <a:t>$22,298 against $20,039</a:t>
             </a:r>
@@ -4742,7 +4847,11 @@
           <a:bodyPr rtlCol="0" anchor="ctr"/>
           <a:lstStyle/>
           <a:p>
-            <a:pPr algn="ctr"/>
+            <a:pPr algn="ctr">
+              <a:defRPr>
+                <a:latin typeface="Roboto"/>
+              </a:defRPr>
+            </a:pPr>
           </a:p>
         </p:txBody>
       </p:sp>
@@ -4768,12 +4877,17 @@
           </a:bodyPr>
           <a:lstStyle/>
           <a:p>
+            <a:pPr>
+              <a:defRPr>
+                <a:latin typeface="Roboto"/>
+              </a:defRPr>
+            </a:pPr>
             <a:r>
               <a:rPr sz="1200" b="0">
                 <a:solidFill>
                   <a:srgbClr val="5F6F63"/>
                 </a:solidFill>
-                <a:latin typeface="Arial"/>
+                <a:latin typeface="Roboto"/>
               </a:rPr>
               <a:t>Year to date (Jul to Oct 2025)</a:t>
             </a:r>
@@ -4802,12 +4916,17 @@
           </a:bodyPr>
           <a:lstStyle/>
           <a:p>
+            <a:pPr>
+              <a:defRPr>
+                <a:latin typeface="Roboto"/>
+              </a:defRPr>
+            </a:pPr>
             <a:r>
               <a:rPr sz="3000" b="1">
                 <a:solidFill>
                   <a:srgbClr val="2F7A5D"/>
                 </a:solidFill>
-                <a:latin typeface="Arial"/>
+                <a:latin typeface="Roboto"/>
               </a:rPr>
               <a:t>$79,777</a:t>
             </a:r>
@@ -4836,12 +4955,17 @@
           </a:bodyPr>
           <a:lstStyle/>
           <a:p>
+            <a:pPr>
+              <a:defRPr>
+                <a:latin typeface="Roboto"/>
+              </a:defRPr>
+            </a:pPr>
             <a:r>
               <a:rPr sz="1100" b="0">
                 <a:solidFill>
                   <a:srgbClr val="5F6F63"/>
                 </a:solidFill>
-                <a:latin typeface="Arial"/>
+                <a:latin typeface="Roboto"/>
               </a:rPr>
               <a:t>same period last year: not in the data</a:t>
             </a:r>
@@ -4889,7 +5013,11 @@
           <a:bodyPr rtlCol="0" anchor="ctr"/>
           <a:lstStyle/>
           <a:p>
-            <a:pPr algn="ctr"/>
+            <a:pPr algn="ctr">
+              <a:defRPr>
+                <a:latin typeface="Roboto"/>
+              </a:defRPr>
+            </a:pPr>
           </a:p>
         </p:txBody>
       </p:sp>
@@ -4915,12 +5043,17 @@
           </a:bodyPr>
           <a:lstStyle/>
           <a:p>
+            <a:pPr>
+              <a:defRPr>
+                <a:latin typeface="Roboto"/>
+              </a:defRPr>
+            </a:pPr>
             <a:r>
               <a:rPr sz="1200" b="0">
                 <a:solidFill>
                   <a:srgbClr val="5F6F63"/>
                 </a:solidFill>
-                <a:latin typeface="Arial"/>
+                <a:latin typeface="Roboto"/>
               </a:rPr>
               <a:t>Gross margin, year to date</a:t>
             </a:r>
@@ -4949,12 +5082,17 @@
           </a:bodyPr>
           <a:lstStyle/>
           <a:p>
+            <a:pPr>
+              <a:defRPr>
+                <a:latin typeface="Roboto"/>
+              </a:defRPr>
+            </a:pPr>
             <a:r>
               <a:rPr sz="3000" b="1">
                 <a:solidFill>
                   <a:srgbClr val="2F7A5D"/>
                 </a:solidFill>
-                <a:latin typeface="Arial"/>
+                <a:latin typeface="Roboto"/>
               </a:rPr>
               <a:t>43.6%</a:t>
             </a:r>
@@ -4983,12 +5121,17 @@
           </a:bodyPr>
           <a:lstStyle/>
           <a:p>
+            <a:pPr>
+              <a:defRPr>
+                <a:latin typeface="Roboto"/>
+              </a:defRPr>
+            </a:pPr>
             <a:r>
               <a:rPr sz="1100" b="0">
                 <a:solidFill>
                   <a:srgbClr val="5F6F63"/>
                 </a:solidFill>
-                <a:latin typeface="Arial"/>
+                <a:latin typeface="Roboto"/>
               </a:rPr>
               <a:t>$34,779 before overheads</a:t>
             </a:r>
@@ -5017,12 +5160,17 @@
           </a:bodyPr>
           <a:lstStyle/>
           <a:p>
+            <a:pPr>
+              <a:defRPr>
+                <a:latin typeface="Roboto"/>
+              </a:defRPr>
+            </a:pPr>
             <a:r>
               <a:rPr sz="900" b="0">
                 <a:solidFill>
                   <a:srgbClr val="5F6F63"/>
                 </a:solidFill>
-                <a:latin typeface="Arial"/>
+                <a:latin typeface="Roboto"/>
               </a:rPr>
               <a:t>growth.pptx</a:t>
             </a:r>
@@ -5051,13 +5199,17 @@
           </a:bodyPr>
           <a:lstStyle/>
           <a:p>
-            <a:pPr algn="ctr"/>
+            <a:pPr algn="ctr">
+              <a:defRPr>
+                <a:latin typeface="Roboto"/>
+              </a:defRPr>
+            </a:pPr>
             <a:r>
               <a:rPr sz="900" b="0">
                 <a:solidFill>
                   <a:srgbClr val="5F6F63"/>
                 </a:solidFill>
-                <a:latin typeface="Arial"/>
+                <a:latin typeface="Roboto"/>
               </a:rPr>
               <a:t>Data retrieved 2pm, Tue 6 Oct 2026 · Sample data</a:t>
             </a:r>
@@ -5086,13 +5238,17 @@
           </a:bodyPr>
           <a:lstStyle/>
           <a:p>
-            <a:pPr algn="r"/>
+            <a:pPr algn="r">
+              <a:defRPr>
+                <a:latin typeface="Roboto"/>
+              </a:defRPr>
+            </a:pPr>
             <a:r>
               <a:rPr sz="900" b="0">
                 <a:solidFill>
                   <a:srgbClr val="5F6F63"/>
                 </a:solidFill>
-                <a:latin typeface="Arial"/>
+                <a:latin typeface="Roboto"/>
               </a:rPr>
               <a:t>Slide 10 of 27</a:t>
             </a:r>
@@ -5156,7 +5312,11 @@
           <a:bodyPr rtlCol="0" anchor="ctr"/>
           <a:lstStyle/>
           <a:p>
-            <a:pPr algn="ctr"/>
+            <a:pPr algn="ctr">
+              <a:defRPr>
+                <a:latin typeface="Roboto"/>
+              </a:defRPr>
+            </a:pPr>
           </a:p>
         </p:txBody>
       </p:sp>
@@ -5182,12 +5342,17 @@
           </a:bodyPr>
           <a:lstStyle/>
           <a:p>
+            <a:pPr>
+              <a:defRPr>
+                <a:latin typeface="Roboto"/>
+              </a:defRPr>
+            </a:pPr>
             <a:r>
               <a:rPr sz="1000" b="0">
                 <a:solidFill>
                   <a:srgbClr val="5F6F63"/>
                 </a:solidFill>
-                <a:latin typeface="Arial"/>
+                <a:latin typeface="Roboto"/>
               </a:rPr>
               <a:t>SME sample businesses · Which products and services are growing?</a:t>
             </a:r>
@@ -5216,12 +5381,17 @@
           </a:bodyPr>
           <a:lstStyle/>
           <a:p>
+            <a:pPr>
+              <a:defRPr>
+                <a:latin typeface="Roboto"/>
+              </a:defRPr>
+            </a:pPr>
             <a:r>
               <a:rPr sz="2400" b="1">
                 <a:solidFill>
                   <a:srgbClr val="25342A"/>
                 </a:solidFill>
-                <a:latin typeface="Arial"/>
+                <a:latin typeface="Roboto"/>
               </a:rPr>
               <a:t>What it shows · Trades · Line: Call-outs and repairs</a:t>
             </a:r>
@@ -5269,7 +5439,11 @@
           <a:bodyPr rtlCol="0" anchor="ctr"/>
           <a:lstStyle/>
           <a:p>
-            <a:pPr algn="ctr"/>
+            <a:pPr algn="ctr">
+              <a:defRPr>
+                <a:latin typeface="Roboto"/>
+              </a:defRPr>
+            </a:pPr>
           </a:p>
         </p:txBody>
       </p:sp>
@@ -5295,12 +5469,17 @@
           </a:bodyPr>
           <a:lstStyle/>
           <a:p>
+            <a:pPr>
+              <a:defRPr>
+                <a:latin typeface="Roboto"/>
+              </a:defRPr>
+            </a:pPr>
             <a:r>
               <a:rPr sz="1100" b="1">
                 <a:solidFill>
                   <a:srgbClr val="5F6F63"/>
                 </a:solidFill>
-                <a:latin typeface="Arial"/>
+                <a:latin typeface="Roboto"/>
               </a:rPr>
               <a:t>WHAT IT SHOWS</a:t>
             </a:r>
@@ -5329,12 +5508,17 @@
           </a:bodyPr>
           <a:lstStyle/>
           <a:p>
+            <a:pPr>
+              <a:defRPr>
+                <a:latin typeface="Roboto"/>
+              </a:defRPr>
+            </a:pPr>
             <a:r>
               <a:rPr sz="1600" b="0">
                 <a:solidFill>
                   <a:srgbClr val="25342A"/>
                 </a:solidFill>
-                <a:latin typeface="Arial"/>
+                <a:latin typeface="Roboto"/>
               </a:rPr>
               <a:t>Call-outs and repairs brought in $79,777 this financial year to date, at a 43.6% gross margin (above the 38.6% overall).</a:t>
             </a:r>
@@ -5382,7 +5566,11 @@
           <a:bodyPr rtlCol="0" anchor="ctr"/>
           <a:lstStyle/>
           <a:p>
-            <a:pPr algn="ctr"/>
+            <a:pPr algn="ctr">
+              <a:defRPr>
+                <a:latin typeface="Roboto"/>
+              </a:defRPr>
+            </a:pPr>
           </a:p>
         </p:txBody>
       </p:sp>
@@ -5408,12 +5596,17 @@
           </a:bodyPr>
           <a:lstStyle/>
           <a:p>
+            <a:pPr>
+              <a:defRPr>
+                <a:latin typeface="Roboto"/>
+              </a:defRPr>
+            </a:pPr>
             <a:r>
               <a:rPr sz="1100" b="1">
                 <a:solidFill>
                   <a:srgbClr val="5F6F63"/>
                 </a:solidFill>
-                <a:latin typeface="Arial"/>
+                <a:latin typeface="Roboto"/>
               </a:rPr>
               <a:t>WHAT YOU'D DO ABOUT IT</a:t>
             </a:r>
@@ -5442,12 +5635,17 @@
           </a:bodyPr>
           <a:lstStyle/>
           <a:p>
+            <a:pPr>
+              <a:defRPr>
+                <a:latin typeface="Roboto"/>
+              </a:defRPr>
+            </a:pPr>
             <a:r>
               <a:rPr sz="1600" b="0">
                 <a:solidFill>
                   <a:srgbClr val="25342A"/>
                 </a:solidFill>
-                <a:latin typeface="Arial"/>
+                <a:latin typeface="Roboto"/>
               </a:rPr>
               <a:t>Call-outs and repairs: 43.6% gross margin, below the 52.5% needed to cover overheads.</a:t>
             </a:r>
@@ -5476,12 +5674,17 @@
           </a:bodyPr>
           <a:lstStyle/>
           <a:p>
+            <a:pPr>
+              <a:defRPr>
+                <a:latin typeface="Roboto"/>
+              </a:defRPr>
+            </a:pPr>
             <a:r>
               <a:rPr sz="900" b="0">
                 <a:solidFill>
                   <a:srgbClr val="5F6F63"/>
                 </a:solidFill>
-                <a:latin typeface="Arial"/>
+                <a:latin typeface="Roboto"/>
               </a:rPr>
               <a:t>growth.pptx</a:t>
             </a:r>
@@ -5510,13 +5713,17 @@
           </a:bodyPr>
           <a:lstStyle/>
           <a:p>
-            <a:pPr algn="ctr"/>
+            <a:pPr algn="ctr">
+              <a:defRPr>
+                <a:latin typeface="Roboto"/>
+              </a:defRPr>
+            </a:pPr>
             <a:r>
               <a:rPr sz="900" b="0">
                 <a:solidFill>
                   <a:srgbClr val="5F6F63"/>
                 </a:solidFill>
-                <a:latin typeface="Arial"/>
+                <a:latin typeface="Roboto"/>
               </a:rPr>
               <a:t>Data retrieved 2pm, Tue 6 Oct 2026 · Sample data</a:t>
             </a:r>
@@ -5545,13 +5752,17 @@
           </a:bodyPr>
           <a:lstStyle/>
           <a:p>
-            <a:pPr algn="r"/>
+            <a:pPr algn="r">
+              <a:defRPr>
+                <a:latin typeface="Roboto"/>
+              </a:defRPr>
+            </a:pPr>
             <a:r>
               <a:rPr sz="900" b="0">
                 <a:solidFill>
                   <a:srgbClr val="5F6F63"/>
                 </a:solidFill>
-                <a:latin typeface="Arial"/>
+                <a:latin typeface="Roboto"/>
               </a:rPr>
               <a:t>Slide 11 of 27</a:t>
             </a:r>
@@ -5615,7 +5826,11 @@
           <a:bodyPr rtlCol="0" anchor="ctr"/>
           <a:lstStyle/>
           <a:p>
-            <a:pPr algn="ctr"/>
+            <a:pPr algn="ctr">
+              <a:defRPr>
+                <a:latin typeface="Roboto"/>
+              </a:defRPr>
+            </a:pPr>
           </a:p>
         </p:txBody>
       </p:sp>
@@ -5641,12 +5856,17 @@
           </a:bodyPr>
           <a:lstStyle/>
           <a:p>
+            <a:pPr>
+              <a:defRPr>
+                <a:latin typeface="Roboto"/>
+              </a:defRPr>
+            </a:pPr>
             <a:r>
               <a:rPr sz="1000" b="0">
                 <a:solidFill>
                   <a:srgbClr val="5F6F63"/>
                 </a:solidFill>
-                <a:latin typeface="Arial"/>
+                <a:latin typeface="Roboto"/>
               </a:rPr>
               <a:t>SME sample businesses · Which products and services are growing?</a:t>
             </a:r>
@@ -5675,12 +5895,17 @@
           </a:bodyPr>
           <a:lstStyle/>
           <a:p>
+            <a:pPr>
+              <a:defRPr>
+                <a:latin typeface="Roboto"/>
+              </a:defRPr>
+            </a:pPr>
             <a:r>
               <a:rPr sz="2400" b="1">
                 <a:solidFill>
                   <a:srgbClr val="25342A"/>
                 </a:solidFill>
-                <a:latin typeface="Arial"/>
+                <a:latin typeface="Roboto"/>
               </a:rPr>
               <a:t>Revenue, gross margin and growth by line, by month · Revenue $ · Trades · Every line at once</a:t>
             </a:r>
@@ -5709,12 +5934,17 @@
           </a:bodyPr>
           <a:lstStyle/>
           <a:p>
+            <a:pPr>
+              <a:defRPr>
+                <a:latin typeface="Roboto"/>
+              </a:defRPr>
+            </a:pPr>
             <a:r>
               <a:rPr sz="1200" b="0">
                 <a:solidFill>
                   <a:srgbClr val="5F6F63"/>
                 </a:solidFill>
-                <a:latin typeface="Arial"/>
+                <a:latin typeface="Roboto"/>
               </a:rPr>
               <a:t>Gross margin = revenue less direct cost (materials, subcontractors and time at cost for trades; contractors and consultant time for services), before overheads. Growth is year on year: each month against the same month a year earlier.</a:t>
             </a:r>
@@ -5761,12 +5991,17 @@
           </a:bodyPr>
           <a:lstStyle/>
           <a:p>
+            <a:pPr>
+              <a:defRPr>
+                <a:latin typeface="Roboto"/>
+              </a:defRPr>
+            </a:pPr>
             <a:r>
               <a:rPr sz="900" b="0">
                 <a:solidFill>
                   <a:srgbClr val="5F6F63"/>
                 </a:solidFill>
-                <a:latin typeface="Arial"/>
+                <a:latin typeface="Roboto"/>
               </a:rPr>
               <a:t>growth.pptx</a:t>
             </a:r>
@@ -5795,13 +6030,17 @@
           </a:bodyPr>
           <a:lstStyle/>
           <a:p>
-            <a:pPr algn="ctr"/>
+            <a:pPr algn="ctr">
+              <a:defRPr>
+                <a:latin typeface="Roboto"/>
+              </a:defRPr>
+            </a:pPr>
             <a:r>
               <a:rPr sz="900" b="0">
                 <a:solidFill>
                   <a:srgbClr val="5F6F63"/>
                 </a:solidFill>
-                <a:latin typeface="Arial"/>
+                <a:latin typeface="Roboto"/>
               </a:rPr>
               <a:t>Data retrieved 2pm, Tue 6 Oct 2026 · Sample data</a:t>
             </a:r>
@@ -5830,13 +6069,17 @@
           </a:bodyPr>
           <a:lstStyle/>
           <a:p>
-            <a:pPr algn="r"/>
+            <a:pPr algn="r">
+              <a:defRPr>
+                <a:latin typeface="Roboto"/>
+              </a:defRPr>
+            </a:pPr>
             <a:r>
               <a:rPr sz="900" b="0">
                 <a:solidFill>
                   <a:srgbClr val="5F6F63"/>
                 </a:solidFill>
-                <a:latin typeface="Arial"/>
+                <a:latin typeface="Roboto"/>
               </a:rPr>
               <a:t>Slide 12 of 27</a:t>
             </a:r>
@@ -5900,7 +6143,11 @@
           <a:bodyPr rtlCol="0" anchor="ctr"/>
           <a:lstStyle/>
           <a:p>
-            <a:pPr algn="ctr"/>
+            <a:pPr algn="ctr">
+              <a:defRPr>
+                <a:latin typeface="Roboto"/>
+              </a:defRPr>
+            </a:pPr>
           </a:p>
         </p:txBody>
       </p:sp>
@@ -5926,12 +6173,17 @@
           </a:bodyPr>
           <a:lstStyle/>
           <a:p>
+            <a:pPr>
+              <a:defRPr>
+                <a:latin typeface="Roboto"/>
+              </a:defRPr>
+            </a:pPr>
             <a:r>
               <a:rPr sz="1000" b="0">
                 <a:solidFill>
                   <a:srgbClr val="5F6F63"/>
                 </a:solidFill>
-                <a:latin typeface="Arial"/>
+                <a:latin typeface="Roboto"/>
               </a:rPr>
               <a:t>SME sample businesses · Which products and services are growing?</a:t>
             </a:r>
@@ -5960,12 +6212,17 @@
           </a:bodyPr>
           <a:lstStyle/>
           <a:p>
+            <a:pPr>
+              <a:defRPr>
+                <a:latin typeface="Roboto"/>
+              </a:defRPr>
+            </a:pPr>
             <a:r>
               <a:rPr sz="2400" b="1">
                 <a:solidFill>
                   <a:srgbClr val="25342A"/>
                 </a:solidFill>
-                <a:latin typeface="Arial"/>
+                <a:latin typeface="Roboto"/>
               </a:rPr>
               <a:t>Revenue, gross margin and growth by line, by month · Gross margin % · Trades · Every line at once</a:t>
             </a:r>
@@ -5994,12 +6251,17 @@
           </a:bodyPr>
           <a:lstStyle/>
           <a:p>
+            <a:pPr>
+              <a:defRPr>
+                <a:latin typeface="Roboto"/>
+              </a:defRPr>
+            </a:pPr>
             <a:r>
               <a:rPr sz="1200" b="0">
                 <a:solidFill>
                   <a:srgbClr val="5F6F63"/>
                 </a:solidFill>
-                <a:latin typeface="Arial"/>
+                <a:latin typeface="Roboto"/>
               </a:rPr>
               <a:t>Gross margin = revenue less direct cost (materials, subcontractors and time at cost for trades; contractors and consultant time for services), before overheads. Growth is year on year: each month against the same month a year earlier.</a:t>
             </a:r>
@@ -6046,12 +6308,17 @@
           </a:bodyPr>
           <a:lstStyle/>
           <a:p>
+            <a:pPr>
+              <a:defRPr>
+                <a:latin typeface="Roboto"/>
+              </a:defRPr>
+            </a:pPr>
             <a:r>
               <a:rPr sz="900" b="0">
                 <a:solidFill>
                   <a:srgbClr val="5F6F63"/>
                 </a:solidFill>
-                <a:latin typeface="Arial"/>
+                <a:latin typeface="Roboto"/>
               </a:rPr>
               <a:t>growth.pptx</a:t>
             </a:r>
@@ -6080,13 +6347,17 @@
           </a:bodyPr>
           <a:lstStyle/>
           <a:p>
-            <a:pPr algn="ctr"/>
+            <a:pPr algn="ctr">
+              <a:defRPr>
+                <a:latin typeface="Roboto"/>
+              </a:defRPr>
+            </a:pPr>
             <a:r>
               <a:rPr sz="900" b="0">
                 <a:solidFill>
                   <a:srgbClr val="5F6F63"/>
                 </a:solidFill>
-                <a:latin typeface="Arial"/>
+                <a:latin typeface="Roboto"/>
               </a:rPr>
               <a:t>Data retrieved 2pm, Tue 6 Oct 2026 · Sample data</a:t>
             </a:r>
@@ -6115,13 +6386,17 @@
           </a:bodyPr>
           <a:lstStyle/>
           <a:p>
-            <a:pPr algn="r"/>
+            <a:pPr algn="r">
+              <a:defRPr>
+                <a:latin typeface="Roboto"/>
+              </a:defRPr>
+            </a:pPr>
             <a:r>
               <a:rPr sz="900" b="0">
                 <a:solidFill>
                   <a:srgbClr val="5F6F63"/>
                 </a:solidFill>
-                <a:latin typeface="Arial"/>
+                <a:latin typeface="Roboto"/>
               </a:rPr>
               <a:t>Slide 13 of 27</a:t>
             </a:r>
@@ -6185,7 +6460,11 @@
           <a:bodyPr rtlCol="0" anchor="ctr"/>
           <a:lstStyle/>
           <a:p>
-            <a:pPr algn="ctr"/>
+            <a:pPr algn="ctr">
+              <a:defRPr>
+                <a:latin typeface="Roboto"/>
+              </a:defRPr>
+            </a:pPr>
           </a:p>
         </p:txBody>
       </p:sp>
@@ -6211,12 +6490,17 @@
           </a:bodyPr>
           <a:lstStyle/>
           <a:p>
+            <a:pPr>
+              <a:defRPr>
+                <a:latin typeface="Roboto"/>
+              </a:defRPr>
+            </a:pPr>
             <a:r>
               <a:rPr sz="1000" b="0">
                 <a:solidFill>
                   <a:srgbClr val="5F6F63"/>
                 </a:solidFill>
-                <a:latin typeface="Arial"/>
+                <a:latin typeface="Roboto"/>
               </a:rPr>
               <a:t>SME sample businesses · Which products and services are growing?</a:t>
             </a:r>
@@ -6245,12 +6529,17 @@
           </a:bodyPr>
           <a:lstStyle/>
           <a:p>
+            <a:pPr>
+              <a:defRPr>
+                <a:latin typeface="Roboto"/>
+              </a:defRPr>
+            </a:pPr>
             <a:r>
               <a:rPr sz="2400" b="1">
                 <a:solidFill>
                   <a:srgbClr val="25342A"/>
                 </a:solidFill>
-                <a:latin typeface="Arial"/>
+                <a:latin typeface="Roboto"/>
               </a:rPr>
               <a:t>By line: financial year to date (Jul to Oct 2025) against the same period last year · Trades · Every line at once</a:t>
             </a:r>
@@ -6288,7 +6577,13 @@
                   <a:txBody>
                     <a:bodyPr/>
                     <a:lstStyle/>
-                    <a:p/>
+                    <a:p>
+                      <a:pPr>
+                        <a:defRPr>
+                          <a:latin typeface="Roboto"/>
+                        </a:defRPr>
+                      </a:pPr>
+                    </a:p>
                   </a:txBody>
                   <a:tcPr>
                     <a:solidFill>
@@ -6301,12 +6596,17 @@
                     <a:bodyPr/>
                     <a:lstStyle/>
                     <a:p>
-                      <a:pPr algn="r"/>
+                      <a:pPr algn="r">
+                        <a:defRPr>
+                          <a:latin typeface="Roboto"/>
+                        </a:defRPr>
+                      </a:pPr>
                       <a:r>
                         <a:rPr sz="1100" b="1">
                           <a:solidFill>
                             <a:srgbClr val="FFFFFF"/>
                           </a:solidFill>
+                          <a:latin typeface="Roboto"/>
                         </a:rPr>
                         <a:t>Year to date</a:t>
                       </a:r>
@@ -6323,12 +6623,17 @@
                     <a:bodyPr/>
                     <a:lstStyle/>
                     <a:p>
-                      <a:pPr algn="r"/>
+                      <a:pPr algn="r">
+                        <a:defRPr>
+                          <a:latin typeface="Roboto"/>
+                        </a:defRPr>
+                      </a:pPr>
                       <a:r>
                         <a:rPr sz="1100" b="1">
                           <a:solidFill>
                             <a:srgbClr val="FFFFFF"/>
                           </a:solidFill>
+                          <a:latin typeface="Roboto"/>
                         </a:rPr>
                         <a:t>Same period last year</a:t>
                       </a:r>
@@ -6345,12 +6650,17 @@
                     <a:bodyPr/>
                     <a:lstStyle/>
                     <a:p>
-                      <a:pPr algn="r"/>
+                      <a:pPr algn="r">
+                        <a:defRPr>
+                          <a:latin typeface="Roboto"/>
+                        </a:defRPr>
+                      </a:pPr>
                       <a:r>
                         <a:rPr sz="1100" b="1">
                           <a:solidFill>
                             <a:srgbClr val="FFFFFF"/>
                           </a:solidFill>
+                          <a:latin typeface="Roboto"/>
                         </a:rPr>
                         <a:t>Growth</a:t>
                       </a:r>
@@ -6367,12 +6677,17 @@
                     <a:bodyPr/>
                     <a:lstStyle/>
                     <a:p>
-                      <a:pPr algn="r"/>
+                      <a:pPr algn="r">
+                        <a:defRPr>
+                          <a:latin typeface="Roboto"/>
+                        </a:defRPr>
+                      </a:pPr>
                       <a:r>
                         <a:rPr sz="1100" b="1">
                           <a:solidFill>
                             <a:srgbClr val="FFFFFF"/>
                           </a:solidFill>
+                          <a:latin typeface="Roboto"/>
                         </a:rPr>
                         <a:t>Gross margin $</a:t>
                       </a:r>
@@ -6389,12 +6704,17 @@
                     <a:bodyPr/>
                     <a:lstStyle/>
                     <a:p>
-                      <a:pPr algn="r"/>
+                      <a:pPr algn="r">
+                        <a:defRPr>
+                          <a:latin typeface="Roboto"/>
+                        </a:defRPr>
+                      </a:pPr>
                       <a:r>
                         <a:rPr sz="1100" b="1">
                           <a:solidFill>
                             <a:srgbClr val="FFFFFF"/>
                           </a:solidFill>
+                          <a:latin typeface="Roboto"/>
                         </a:rPr>
                         <a:t>Gross margin %</a:t>
                       </a:r>
@@ -6413,11 +6733,17 @@
                     <a:bodyPr/>
                     <a:lstStyle/>
                     <a:p>
+                      <a:pPr>
+                        <a:defRPr>
+                          <a:latin typeface="Roboto"/>
+                        </a:defRPr>
+                      </a:pPr>
                       <a:r>
                         <a:rPr sz="1050">
                           <a:solidFill>
                             <a:srgbClr val="25342A"/>
                           </a:solidFill>
+                          <a:latin typeface="Roboto"/>
                         </a:rPr>
                         <a:t>Maintenance contracts</a:t>
                       </a:r>
@@ -6434,12 +6760,17 @@
                     <a:bodyPr/>
                     <a:lstStyle/>
                     <a:p>
-                      <a:pPr algn="r"/>
+                      <a:pPr algn="r">
+                        <a:defRPr>
+                          <a:latin typeface="Roboto"/>
+                        </a:defRPr>
+                      </a:pPr>
                       <a:r>
                         <a:rPr sz="1050">
                           <a:solidFill>
                             <a:srgbClr val="25342A"/>
                           </a:solidFill>
+                          <a:latin typeface="Roboto"/>
                         </a:rPr>
                         <a:t>$135,400</a:t>
                       </a:r>
@@ -6456,12 +6787,17 @@
                     <a:bodyPr/>
                     <a:lstStyle/>
                     <a:p>
-                      <a:pPr algn="r"/>
+                      <a:pPr algn="r">
+                        <a:defRPr>
+                          <a:latin typeface="Roboto"/>
+                        </a:defRPr>
+                      </a:pPr>
                       <a:r>
                         <a:rPr sz="1050">
                           <a:solidFill>
                             <a:srgbClr val="25342A"/>
                           </a:solidFill>
+                          <a:latin typeface="Roboto"/>
                         </a:rPr>
                         <a:t>–</a:t>
                       </a:r>
@@ -6478,12 +6814,17 @@
                     <a:bodyPr/>
                     <a:lstStyle/>
                     <a:p>
-                      <a:pPr algn="r"/>
+                      <a:pPr algn="r">
+                        <a:defRPr>
+                          <a:latin typeface="Roboto"/>
+                        </a:defRPr>
+                      </a:pPr>
                       <a:r>
                         <a:rPr sz="1050">
                           <a:solidFill>
                             <a:srgbClr val="25342A"/>
                           </a:solidFill>
+                          <a:latin typeface="Roboto"/>
                         </a:rPr>
                         <a:t>–</a:t>
                       </a:r>
@@ -6500,12 +6841,17 @@
                     <a:bodyPr/>
                     <a:lstStyle/>
                     <a:p>
-                      <a:pPr algn="r"/>
+                      <a:pPr algn="r">
+                        <a:defRPr>
+                          <a:latin typeface="Roboto"/>
+                        </a:defRPr>
+                      </a:pPr>
                       <a:r>
                         <a:rPr sz="1050">
                           <a:solidFill>
                             <a:srgbClr val="25342A"/>
                           </a:solidFill>
+                          <a:latin typeface="Roboto"/>
                         </a:rPr>
                         <a:t>$80,546</a:t>
                       </a:r>
@@ -6522,12 +6868,17 @@
                     <a:bodyPr/>
                     <a:lstStyle/>
                     <a:p>
-                      <a:pPr algn="r"/>
+                      <a:pPr algn="r">
+                        <a:defRPr>
+                          <a:latin typeface="Roboto"/>
+                        </a:defRPr>
+                      </a:pPr>
                       <a:r>
                         <a:rPr sz="1050">
                           <a:solidFill>
                             <a:srgbClr val="25342A"/>
                           </a:solidFill>
+                          <a:latin typeface="Roboto"/>
                         </a:rPr>
                         <a:t>59.5%</a:t>
                       </a:r>
@@ -6546,11 +6897,17 @@
                     <a:bodyPr/>
                     <a:lstStyle/>
                     <a:p>
+                      <a:pPr>
+                        <a:defRPr>
+                          <a:latin typeface="Roboto"/>
+                        </a:defRPr>
+                      </a:pPr>
                       <a:r>
                         <a:rPr sz="1050">
                           <a:solidFill>
                             <a:srgbClr val="25342A"/>
                           </a:solidFill>
+                          <a:latin typeface="Roboto"/>
                         </a:rPr>
                         <a:t>Installations</a:t>
                       </a:r>
@@ -6567,12 +6924,17 @@
                     <a:bodyPr/>
                     <a:lstStyle/>
                     <a:p>
-                      <a:pPr algn="r"/>
+                      <a:pPr algn="r">
+                        <a:defRPr>
+                          <a:latin typeface="Roboto"/>
+                        </a:defRPr>
+                      </a:pPr>
                       <a:r>
                         <a:rPr sz="1050">
                           <a:solidFill>
                             <a:srgbClr val="25342A"/>
                           </a:solidFill>
+                          <a:latin typeface="Roboto"/>
                         </a:rPr>
                         <a:t>$367,900</a:t>
                       </a:r>
@@ -6589,12 +6951,17 @@
                     <a:bodyPr/>
                     <a:lstStyle/>
                     <a:p>
-                      <a:pPr algn="r"/>
+                      <a:pPr algn="r">
+                        <a:defRPr>
+                          <a:latin typeface="Roboto"/>
+                        </a:defRPr>
+                      </a:pPr>
                       <a:r>
                         <a:rPr sz="1050">
                           <a:solidFill>
                             <a:srgbClr val="25342A"/>
                           </a:solidFill>
+                          <a:latin typeface="Roboto"/>
                         </a:rPr>
                         <a:t>–</a:t>
                       </a:r>
@@ -6611,12 +6978,17 @@
                     <a:bodyPr/>
                     <a:lstStyle/>
                     <a:p>
-                      <a:pPr algn="r"/>
+                      <a:pPr algn="r">
+                        <a:defRPr>
+                          <a:latin typeface="Roboto"/>
+                        </a:defRPr>
+                      </a:pPr>
                       <a:r>
                         <a:rPr sz="1050">
                           <a:solidFill>
                             <a:srgbClr val="25342A"/>
                           </a:solidFill>
+                          <a:latin typeface="Roboto"/>
                         </a:rPr>
                         <a:t>–</a:t>
                       </a:r>
@@ -6633,12 +7005,17 @@
                     <a:bodyPr/>
                     <a:lstStyle/>
                     <a:p>
-                      <a:pPr algn="r"/>
+                      <a:pPr algn="r">
+                        <a:defRPr>
+                          <a:latin typeface="Roboto"/>
+                        </a:defRPr>
+                      </a:pPr>
                       <a:r>
                         <a:rPr sz="1050">
                           <a:solidFill>
                             <a:srgbClr val="25342A"/>
                           </a:solidFill>
+                          <a:latin typeface="Roboto"/>
                         </a:rPr>
                         <a:t>$109,662</a:t>
                       </a:r>
@@ -6655,12 +7032,17 @@
                     <a:bodyPr/>
                     <a:lstStyle/>
                     <a:p>
-                      <a:pPr algn="r"/>
+                      <a:pPr algn="r">
+                        <a:defRPr>
+                          <a:latin typeface="Roboto"/>
+                        </a:defRPr>
+                      </a:pPr>
                       <a:r>
                         <a:rPr sz="1050">
                           <a:solidFill>
                             <a:srgbClr val="25342A"/>
                           </a:solidFill>
+                          <a:latin typeface="Roboto"/>
                         </a:rPr>
                         <a:t>29.8%</a:t>
                       </a:r>
@@ -6679,11 +7061,17 @@
                     <a:bodyPr/>
                     <a:lstStyle/>
                     <a:p>
+                      <a:pPr>
+                        <a:defRPr>
+                          <a:latin typeface="Roboto"/>
+                        </a:defRPr>
+                      </a:pPr>
                       <a:r>
                         <a:rPr sz="1050">
                           <a:solidFill>
                             <a:srgbClr val="25342A"/>
                           </a:solidFill>
+                          <a:latin typeface="Roboto"/>
                         </a:rPr>
                         <a:t>Call-outs and repairs</a:t>
                       </a:r>
@@ -6700,12 +7088,17 @@
                     <a:bodyPr/>
                     <a:lstStyle/>
                     <a:p>
-                      <a:pPr algn="r"/>
+                      <a:pPr algn="r">
+                        <a:defRPr>
+                          <a:latin typeface="Roboto"/>
+                        </a:defRPr>
+                      </a:pPr>
                       <a:r>
                         <a:rPr sz="1050">
                           <a:solidFill>
                             <a:srgbClr val="25342A"/>
                           </a:solidFill>
+                          <a:latin typeface="Roboto"/>
                         </a:rPr>
                         <a:t>$79,777</a:t>
                       </a:r>
@@ -6722,12 +7115,17 @@
                     <a:bodyPr/>
                     <a:lstStyle/>
                     <a:p>
-                      <a:pPr algn="r"/>
+                      <a:pPr algn="r">
+                        <a:defRPr>
+                          <a:latin typeface="Roboto"/>
+                        </a:defRPr>
+                      </a:pPr>
                       <a:r>
                         <a:rPr sz="1050">
                           <a:solidFill>
                             <a:srgbClr val="25342A"/>
                           </a:solidFill>
+                          <a:latin typeface="Roboto"/>
                         </a:rPr>
                         <a:t>–</a:t>
                       </a:r>
@@ -6744,12 +7142,17 @@
                     <a:bodyPr/>
                     <a:lstStyle/>
                     <a:p>
-                      <a:pPr algn="r"/>
+                      <a:pPr algn="r">
+                        <a:defRPr>
+                          <a:latin typeface="Roboto"/>
+                        </a:defRPr>
+                      </a:pPr>
                       <a:r>
                         <a:rPr sz="1050">
                           <a:solidFill>
                             <a:srgbClr val="25342A"/>
                           </a:solidFill>
+                          <a:latin typeface="Roboto"/>
                         </a:rPr>
                         <a:t>–</a:t>
                       </a:r>
@@ -6766,12 +7169,17 @@
                     <a:bodyPr/>
                     <a:lstStyle/>
                     <a:p>
-                      <a:pPr algn="r"/>
+                      <a:pPr algn="r">
+                        <a:defRPr>
+                          <a:latin typeface="Roboto"/>
+                        </a:defRPr>
+                      </a:pPr>
                       <a:r>
                         <a:rPr sz="1050">
                           <a:solidFill>
                             <a:srgbClr val="25342A"/>
                           </a:solidFill>
+                          <a:latin typeface="Roboto"/>
                         </a:rPr>
                         <a:t>$34,779</a:t>
                       </a:r>
@@ -6788,12 +7196,17 @@
                     <a:bodyPr/>
                     <a:lstStyle/>
                     <a:p>
-                      <a:pPr algn="r"/>
+                      <a:pPr algn="r">
+                        <a:defRPr>
+                          <a:latin typeface="Roboto"/>
+                        </a:defRPr>
+                      </a:pPr>
                       <a:r>
                         <a:rPr sz="1050">
                           <a:solidFill>
                             <a:srgbClr val="25342A"/>
                           </a:solidFill>
+                          <a:latin typeface="Roboto"/>
                         </a:rPr>
                         <a:t>43.6%</a:t>
                       </a:r>
@@ -6812,11 +7225,17 @@
                     <a:bodyPr/>
                     <a:lstStyle/>
                     <a:p>
+                      <a:pPr>
+                        <a:defRPr>
+                          <a:latin typeface="Roboto"/>
+                        </a:defRPr>
+                      </a:pPr>
                       <a:r>
                         <a:rPr sz="1050" b="1">
                           <a:solidFill>
                             <a:srgbClr val="25342A"/>
                           </a:solidFill>
+                          <a:latin typeface="Roboto"/>
                         </a:rPr>
                         <a:t>Total</a:t>
                       </a:r>
@@ -6833,12 +7252,17 @@
                     <a:bodyPr/>
                     <a:lstStyle/>
                     <a:p>
-                      <a:pPr algn="r"/>
+                      <a:pPr algn="r">
+                        <a:defRPr>
+                          <a:latin typeface="Roboto"/>
+                        </a:defRPr>
+                      </a:pPr>
                       <a:r>
                         <a:rPr sz="1050" b="1">
                           <a:solidFill>
                             <a:srgbClr val="25342A"/>
                           </a:solidFill>
+                          <a:latin typeface="Roboto"/>
                         </a:rPr>
                         <a:t>$583,077</a:t>
                       </a:r>
@@ -6855,12 +7279,17 @@
                     <a:bodyPr/>
                     <a:lstStyle/>
                     <a:p>
-                      <a:pPr algn="r"/>
+                      <a:pPr algn="r">
+                        <a:defRPr>
+                          <a:latin typeface="Roboto"/>
+                        </a:defRPr>
+                      </a:pPr>
                       <a:r>
                         <a:rPr sz="1050" b="1">
                           <a:solidFill>
                             <a:srgbClr val="25342A"/>
                           </a:solidFill>
+                          <a:latin typeface="Roboto"/>
                         </a:rPr>
                         <a:t>–</a:t>
                       </a:r>
@@ -6877,12 +7306,17 @@
                     <a:bodyPr/>
                     <a:lstStyle/>
                     <a:p>
-                      <a:pPr algn="r"/>
+                      <a:pPr algn="r">
+                        <a:defRPr>
+                          <a:latin typeface="Roboto"/>
+                        </a:defRPr>
+                      </a:pPr>
                       <a:r>
                         <a:rPr sz="1050" b="1">
                           <a:solidFill>
                             <a:srgbClr val="25342A"/>
                           </a:solidFill>
+                          <a:latin typeface="Roboto"/>
                         </a:rPr>
                         <a:t>–</a:t>
                       </a:r>
@@ -6899,12 +7333,17 @@
                     <a:bodyPr/>
                     <a:lstStyle/>
                     <a:p>
-                      <a:pPr algn="r"/>
+                      <a:pPr algn="r">
+                        <a:defRPr>
+                          <a:latin typeface="Roboto"/>
+                        </a:defRPr>
+                      </a:pPr>
                       <a:r>
                         <a:rPr sz="1050" b="1">
                           <a:solidFill>
                             <a:srgbClr val="25342A"/>
                           </a:solidFill>
+                          <a:latin typeface="Roboto"/>
                         </a:rPr>
                         <a:t>$224,987</a:t>
                       </a:r>
@@ -6921,12 +7360,17 @@
                     <a:bodyPr/>
                     <a:lstStyle/>
                     <a:p>
-                      <a:pPr algn="r"/>
+                      <a:pPr algn="r">
+                        <a:defRPr>
+                          <a:latin typeface="Roboto"/>
+                        </a:defRPr>
+                      </a:pPr>
                       <a:r>
                         <a:rPr sz="1050" b="1">
                           <a:solidFill>
                             <a:srgbClr val="25342A"/>
                           </a:solidFill>
+                          <a:latin typeface="Roboto"/>
                         </a:rPr>
                         <a:t>38.6%</a:t>
                       </a:r>
@@ -6965,12 +7409,17 @@
           </a:bodyPr>
           <a:lstStyle/>
           <a:p>
+            <a:pPr>
+              <a:defRPr>
+                <a:latin typeface="Roboto"/>
+              </a:defRPr>
+            </a:pPr>
             <a:r>
               <a:rPr sz="900" b="0">
                 <a:solidFill>
                   <a:srgbClr val="5F6F63"/>
                 </a:solidFill>
-                <a:latin typeface="Arial"/>
+                <a:latin typeface="Roboto"/>
               </a:rPr>
               <a:t>growth.pptx</a:t>
             </a:r>
@@ -6999,13 +7448,17 @@
           </a:bodyPr>
           <a:lstStyle/>
           <a:p>
-            <a:pPr algn="ctr"/>
+            <a:pPr algn="ctr">
+              <a:defRPr>
+                <a:latin typeface="Roboto"/>
+              </a:defRPr>
+            </a:pPr>
             <a:r>
               <a:rPr sz="900" b="0">
                 <a:solidFill>
                   <a:srgbClr val="5F6F63"/>
                 </a:solidFill>
-                <a:latin typeface="Arial"/>
+                <a:latin typeface="Roboto"/>
               </a:rPr>
               <a:t>Data retrieved 2pm, Tue 6 Oct 2026 · Sample data</a:t>
             </a:r>
@@ -7034,13 +7487,17 @@
           </a:bodyPr>
           <a:lstStyle/>
           <a:p>
-            <a:pPr algn="r"/>
+            <a:pPr algn="r">
+              <a:defRPr>
+                <a:latin typeface="Roboto"/>
+              </a:defRPr>
+            </a:pPr>
             <a:r>
               <a:rPr sz="900" b="0">
                 <a:solidFill>
                   <a:srgbClr val="5F6F63"/>
                 </a:solidFill>
-                <a:latin typeface="Arial"/>
+                <a:latin typeface="Roboto"/>
               </a:rPr>
               <a:t>Slide 14 of 27</a:t>
             </a:r>
@@ -7104,7 +7561,11 @@
           <a:bodyPr rtlCol="0" anchor="ctr"/>
           <a:lstStyle/>
           <a:p>
-            <a:pPr algn="ctr"/>
+            <a:pPr algn="ctr">
+              <a:defRPr>
+                <a:latin typeface="Roboto"/>
+              </a:defRPr>
+            </a:pPr>
           </a:p>
         </p:txBody>
       </p:sp>
@@ -7130,12 +7591,17 @@
           </a:bodyPr>
           <a:lstStyle/>
           <a:p>
+            <a:pPr>
+              <a:defRPr>
+                <a:latin typeface="Roboto"/>
+              </a:defRPr>
+            </a:pPr>
             <a:r>
               <a:rPr sz="1000" b="0">
                 <a:solidFill>
                   <a:srgbClr val="5F6F63"/>
                 </a:solidFill>
-                <a:latin typeface="Arial"/>
+                <a:latin typeface="Roboto"/>
               </a:rPr>
               <a:t>SME sample businesses · Which products and services are growing?</a:t>
             </a:r>
@@ -7164,12 +7630,17 @@
           </a:bodyPr>
           <a:lstStyle/>
           <a:p>
+            <a:pPr>
+              <a:defRPr>
+                <a:latin typeface="Roboto"/>
+              </a:defRPr>
+            </a:pPr>
             <a:r>
               <a:rPr sz="2400" b="1">
                 <a:solidFill>
                   <a:srgbClr val="25342A"/>
                 </a:solidFill>
-                <a:latin typeface="Arial"/>
+                <a:latin typeface="Roboto"/>
               </a:rPr>
               <a:t>Gross margin, not profit</a:t>
             </a:r>
@@ -7217,7 +7688,11 @@
           <a:bodyPr rtlCol="0" anchor="ctr"/>
           <a:lstStyle/>
           <a:p>
-            <a:pPr algn="ctr"/>
+            <a:pPr algn="ctr">
+              <a:defRPr>
+                <a:latin typeface="Roboto"/>
+              </a:defRPr>
+            </a:pPr>
           </a:p>
         </p:txBody>
       </p:sp>
@@ -7243,12 +7718,17 @@
           </a:bodyPr>
           <a:lstStyle/>
           <a:p>
+            <a:pPr>
+              <a:defRPr>
+                <a:latin typeface="Roboto"/>
+              </a:defRPr>
+            </a:pPr>
             <a:r>
               <a:rPr sz="1100" b="1">
                 <a:solidFill>
                   <a:srgbClr val="5F6F63"/>
                 </a:solidFill>
-                <a:latin typeface="Arial"/>
+                <a:latin typeface="Roboto"/>
               </a:rPr>
               <a:t>GROSS MARGIN, NOT PROFIT</a:t>
             </a:r>
@@ -7277,12 +7757,17 @@
           </a:bodyPr>
           <a:lstStyle/>
           <a:p>
+            <a:pPr>
+              <a:defRPr>
+                <a:latin typeface="Roboto"/>
+              </a:defRPr>
+            </a:pPr>
             <a:r>
               <a:rPr sz="1600" b="0">
                 <a:solidFill>
                   <a:srgbClr val="25342A"/>
                 </a:solidFill>
-                <a:latin typeface="Arial"/>
+                <a:latin typeface="Roboto"/>
               </a:rPr>
               <a:t>Gross margin is not profit. Gross margin = revenue less contractors and consultant time charged to the work at $60 an hour (wages and all on-costs). Not included: consultant time not charged to clients, and overheads (management and admin wages, marketing, rent, IT, insurance, travel, depreciation, interest). Profit is what's left after those. Wages always include all on-costs: super, payroll tax, workers' compensation insurance and leave.</a:t>
             </a:r>
@@ -7311,12 +7796,17 @@
           </a:bodyPr>
           <a:lstStyle/>
           <a:p>
+            <a:pPr>
+              <a:defRPr>
+                <a:latin typeface="Roboto"/>
+              </a:defRPr>
+            </a:pPr>
             <a:r>
               <a:rPr sz="900" b="0">
                 <a:solidFill>
                   <a:srgbClr val="5F6F63"/>
                 </a:solidFill>
-                <a:latin typeface="Arial"/>
+                <a:latin typeface="Roboto"/>
               </a:rPr>
               <a:t>growth.pptx</a:t>
             </a:r>
@@ -7345,13 +7835,17 @@
           </a:bodyPr>
           <a:lstStyle/>
           <a:p>
-            <a:pPr algn="ctr"/>
+            <a:pPr algn="ctr">
+              <a:defRPr>
+                <a:latin typeface="Roboto"/>
+              </a:defRPr>
+            </a:pPr>
             <a:r>
               <a:rPr sz="900" b="0">
                 <a:solidFill>
                   <a:srgbClr val="5F6F63"/>
                 </a:solidFill>
-                <a:latin typeface="Arial"/>
+                <a:latin typeface="Roboto"/>
               </a:rPr>
               <a:t>Data retrieved 2pm, Tue 6 Oct 2026 · Sample data</a:t>
             </a:r>
@@ -7380,13 +7874,17 @@
           </a:bodyPr>
           <a:lstStyle/>
           <a:p>
-            <a:pPr algn="r"/>
+            <a:pPr algn="r">
+              <a:defRPr>
+                <a:latin typeface="Roboto"/>
+              </a:defRPr>
+            </a:pPr>
             <a:r>
               <a:rPr sz="900" b="0">
                 <a:solidFill>
                   <a:srgbClr val="5F6F63"/>
                 </a:solidFill>
-                <a:latin typeface="Arial"/>
+                <a:latin typeface="Roboto"/>
               </a:rPr>
               <a:t>Slide 15 of 27</a:t>
             </a:r>
@@ -7450,7 +7948,11 @@
           <a:bodyPr rtlCol="0" anchor="ctr"/>
           <a:lstStyle/>
           <a:p>
-            <a:pPr algn="ctr"/>
+            <a:pPr algn="ctr">
+              <a:defRPr>
+                <a:latin typeface="Roboto"/>
+              </a:defRPr>
+            </a:pPr>
           </a:p>
         </p:txBody>
       </p:sp>
@@ -7476,12 +7978,17 @@
           </a:bodyPr>
           <a:lstStyle/>
           <a:p>
+            <a:pPr>
+              <a:defRPr>
+                <a:latin typeface="Roboto"/>
+              </a:defRPr>
+            </a:pPr>
             <a:r>
               <a:rPr sz="1000" b="0">
                 <a:solidFill>
                   <a:srgbClr val="5F6F63"/>
                 </a:solidFill>
-                <a:latin typeface="Arial"/>
+                <a:latin typeface="Roboto"/>
               </a:rPr>
               <a:t>SME sample businesses · Which products and services are growing?</a:t>
             </a:r>
@@ -7510,12 +8017,17 @@
           </a:bodyPr>
           <a:lstStyle/>
           <a:p>
+            <a:pPr>
+              <a:defRPr>
+                <a:latin typeface="Roboto"/>
+              </a:defRPr>
+            </a:pPr>
             <a:r>
               <a:rPr sz="2400" b="1">
                 <a:solidFill>
                   <a:srgbClr val="25342A"/>
                 </a:solidFill>
-                <a:latin typeface="Arial"/>
+                <a:latin typeface="Roboto"/>
               </a:rPr>
               <a:t>From gross margin to profit · Services</a:t>
             </a:r>
@@ -7544,12 +8056,17 @@
           </a:bodyPr>
           <a:lstStyle/>
           <a:p>
+            <a:pPr>
+              <a:defRPr>
+                <a:latin typeface="Roboto"/>
+              </a:defRPr>
+            </a:pPr>
             <a:r>
               <a:rPr sz="1200" b="0">
                 <a:solidFill>
                   <a:srgbClr val="5F6F63"/>
                 </a:solidFill>
-                <a:latin typeface="Arial"/>
+                <a:latin typeface="Roboto"/>
               </a:rPr>
               <a:t>October's client work made $45,720 gross margin (64.2%). Consultant time not charged to client work took $15,410 and overheads $51,070, leaving ($20,760) profit before tax ((29.1%) of revenue). To cover overheads, client work needs a 93.3% gross margin on average.</a:t>
             </a:r>
@@ -7583,7 +8100,13 @@
                   <a:txBody>
                     <a:bodyPr/>
                     <a:lstStyle/>
-                    <a:p/>
+                    <a:p>
+                      <a:pPr>
+                        <a:defRPr>
+                          <a:latin typeface="Roboto"/>
+                        </a:defRPr>
+                      </a:pPr>
+                    </a:p>
                   </a:txBody>
                   <a:tcPr>
                     <a:solidFill>
@@ -7596,12 +8119,17 @@
                     <a:bodyPr/>
                     <a:lstStyle/>
                     <a:p>
-                      <a:pPr algn="r"/>
+                      <a:pPr algn="r">
+                        <a:defRPr>
+                          <a:latin typeface="Roboto"/>
+                        </a:defRPr>
+                      </a:pPr>
                       <a:r>
                         <a:rPr sz="1100" b="1">
                           <a:solidFill>
                             <a:srgbClr val="FFFFFF"/>
                           </a:solidFill>
+                          <a:latin typeface="Roboto"/>
                         </a:rPr>
                         <a:t>October 2025</a:t>
                       </a:r>
@@ -7620,11 +8148,17 @@
                     <a:bodyPr/>
                     <a:lstStyle/>
                     <a:p>
+                      <a:pPr>
+                        <a:defRPr>
+                          <a:latin typeface="Roboto"/>
+                        </a:defRPr>
+                      </a:pPr>
                       <a:r>
                         <a:rPr sz="1050">
                           <a:solidFill>
                             <a:srgbClr val="25342A"/>
                           </a:solidFill>
+                          <a:latin typeface="Roboto"/>
                         </a:rPr>
                         <a:t>Gross margin on client work</a:t>
                       </a:r>
@@ -7641,12 +8175,17 @@
                     <a:bodyPr/>
                     <a:lstStyle/>
                     <a:p>
-                      <a:pPr algn="r"/>
+                      <a:pPr algn="r">
+                        <a:defRPr>
+                          <a:latin typeface="Roboto"/>
+                        </a:defRPr>
+                      </a:pPr>
                       <a:r>
                         <a:rPr sz="1050">
                           <a:solidFill>
                             <a:srgbClr val="25342A"/>
                           </a:solidFill>
+                          <a:latin typeface="Roboto"/>
                         </a:rPr>
                         <a:t>$45,720</a:t>
                       </a:r>
@@ -7665,11 +8204,17 @@
                     <a:bodyPr/>
                     <a:lstStyle/>
                     <a:p>
+                      <a:pPr>
+                        <a:defRPr>
+                          <a:latin typeface="Roboto"/>
+                        </a:defRPr>
+                      </a:pPr>
                       <a:r>
                         <a:rPr sz="1050">
                           <a:solidFill>
                             <a:srgbClr val="25342A"/>
                           </a:solidFill>
+                          <a:latin typeface="Roboto"/>
                         </a:rPr>
                         <a:t>Consultant wages and on-costs</a:t>
                       </a:r>
@@ -7686,12 +8231,17 @@
                     <a:bodyPr/>
                     <a:lstStyle/>
                     <a:p>
-                      <a:pPr algn="r"/>
+                      <a:pPr algn="r">
+                        <a:defRPr>
+                          <a:latin typeface="Roboto"/>
+                        </a:defRPr>
+                      </a:pPr>
                       <a:r>
                         <a:rPr sz="1050">
                           <a:solidFill>
                             <a:srgbClr val="25342A"/>
                           </a:solidFill>
+                          <a:latin typeface="Roboto"/>
                         </a:rPr>
                         <a:t>$38,750</a:t>
                       </a:r>
@@ -7710,11 +8260,17 @@
                     <a:bodyPr/>
                     <a:lstStyle/>
                     <a:p>
+                      <a:pPr>
+                        <a:defRPr>
+                          <a:latin typeface="Roboto"/>
+                        </a:defRPr>
+                      </a:pPr>
                       <a:r>
                         <a:rPr sz="1050">
                           <a:solidFill>
                             <a:srgbClr val="25342A"/>
                           </a:solidFill>
+                          <a:latin typeface="Roboto"/>
                         </a:rPr>
                         <a:t>Consultant time charged to client work (at cost)</a:t>
                       </a:r>
@@ -7731,12 +8287,17 @@
                     <a:bodyPr/>
                     <a:lstStyle/>
                     <a:p>
-                      <a:pPr algn="r"/>
+                      <a:pPr algn="r">
+                        <a:defRPr>
+                          <a:latin typeface="Roboto"/>
+                        </a:defRPr>
+                      </a:pPr>
                       <a:r>
                         <a:rPr sz="1050">
                           <a:solidFill>
                             <a:srgbClr val="25342A"/>
                           </a:solidFill>
+                          <a:latin typeface="Roboto"/>
                         </a:rPr>
                         <a:t>$23,340</a:t>
                       </a:r>
@@ -7755,11 +8316,17 @@
                     <a:bodyPr/>
                     <a:lstStyle/>
                     <a:p>
+                      <a:pPr>
+                        <a:defRPr>
+                          <a:latin typeface="Roboto"/>
+                        </a:defRPr>
+                      </a:pPr>
                       <a:r>
                         <a:rPr sz="1050">
                           <a:solidFill>
                             <a:srgbClr val="25342A"/>
                           </a:solidFill>
+                          <a:latin typeface="Roboto"/>
                         </a:rPr>
                         <a:t>Consultant time not charged to client work</a:t>
                       </a:r>
@@ -7776,12 +8343,17 @@
                     <a:bodyPr/>
                     <a:lstStyle/>
                     <a:p>
-                      <a:pPr algn="r"/>
+                      <a:pPr algn="r">
+                        <a:defRPr>
+                          <a:latin typeface="Roboto"/>
+                        </a:defRPr>
+                      </a:pPr>
                       <a:r>
                         <a:rPr sz="1050">
                           <a:solidFill>
                             <a:srgbClr val="25342A"/>
                           </a:solidFill>
+                          <a:latin typeface="Roboto"/>
                         </a:rPr>
                         <a:t>$15,410</a:t>
                       </a:r>
@@ -7800,11 +8372,17 @@
                     <a:bodyPr/>
                     <a:lstStyle/>
                     <a:p>
+                      <a:pPr>
+                        <a:defRPr>
+                          <a:latin typeface="Roboto"/>
+                        </a:defRPr>
+                      </a:pPr>
                       <a:r>
                         <a:rPr sz="1050">
                           <a:solidFill>
                             <a:srgbClr val="25342A"/>
                           </a:solidFill>
+                          <a:latin typeface="Roboto"/>
                         </a:rPr>
                         <a:t>Gross profit (the P&amp;L)</a:t>
                       </a:r>
@@ -7821,12 +8399,17 @@
                     <a:bodyPr/>
                     <a:lstStyle/>
                     <a:p>
-                      <a:pPr algn="r"/>
+                      <a:pPr algn="r">
+                        <a:defRPr>
+                          <a:latin typeface="Roboto"/>
+                        </a:defRPr>
+                      </a:pPr>
                       <a:r>
                         <a:rPr sz="1050">
                           <a:solidFill>
                             <a:srgbClr val="25342A"/>
                           </a:solidFill>
+                          <a:latin typeface="Roboto"/>
                         </a:rPr>
                         <a:t>$30,310</a:t>
                       </a:r>
@@ -7845,11 +8428,17 @@
                     <a:bodyPr/>
                     <a:lstStyle/>
                     <a:p>
+                      <a:pPr>
+                        <a:defRPr>
+                          <a:latin typeface="Roboto"/>
+                        </a:defRPr>
+                      </a:pPr>
                       <a:r>
                         <a:rPr sz="1050">
                           <a:solidFill>
                             <a:srgbClr val="25342A"/>
                           </a:solidFill>
+                          <a:latin typeface="Roboto"/>
                         </a:rPr>
                         <a:t>Overheads (operating expenses, depreciation, interest)</a:t>
                       </a:r>
@@ -7866,12 +8455,17 @@
                     <a:bodyPr/>
                     <a:lstStyle/>
                     <a:p>
-                      <a:pPr algn="r"/>
+                      <a:pPr algn="r">
+                        <a:defRPr>
+                          <a:latin typeface="Roboto"/>
+                        </a:defRPr>
+                      </a:pPr>
                       <a:r>
                         <a:rPr sz="1050">
                           <a:solidFill>
                             <a:srgbClr val="25342A"/>
                           </a:solidFill>
+                          <a:latin typeface="Roboto"/>
                         </a:rPr>
                         <a:t>$51,070</a:t>
                       </a:r>
@@ -7890,11 +8484,17 @@
                     <a:bodyPr/>
                     <a:lstStyle/>
                     <a:p>
+                      <a:pPr>
+                        <a:defRPr>
+                          <a:latin typeface="Roboto"/>
+                        </a:defRPr>
+                      </a:pPr>
                       <a:r>
                         <a:rPr sz="1050">
                           <a:solidFill>
                             <a:srgbClr val="25342A"/>
                           </a:solidFill>
+                          <a:latin typeface="Roboto"/>
                         </a:rPr>
                         <a:t>Profit before tax (the P&amp;L)</a:t>
                       </a:r>
@@ -7911,12 +8511,17 @@
                     <a:bodyPr/>
                     <a:lstStyle/>
                     <a:p>
-                      <a:pPr algn="r"/>
+                      <a:pPr algn="r">
+                        <a:defRPr>
+                          <a:latin typeface="Roboto"/>
+                        </a:defRPr>
+                      </a:pPr>
                       <a:r>
                         <a:rPr sz="1050">
                           <a:solidFill>
                             <a:srgbClr val="B42318"/>
                           </a:solidFill>
+                          <a:latin typeface="Roboto"/>
                         </a:rPr>
                         <a:t>($20,760)</a:t>
                       </a:r>
@@ -7935,11 +8540,17 @@
                     <a:bodyPr/>
                     <a:lstStyle/>
                     <a:p>
+                      <a:pPr>
+                        <a:defRPr>
+                          <a:latin typeface="Roboto"/>
+                        </a:defRPr>
+                      </a:pPr>
                       <a:r>
                         <a:rPr sz="1050">
                           <a:solidFill>
                             <a:srgbClr val="25342A"/>
                           </a:solidFill>
+                          <a:latin typeface="Roboto"/>
                         </a:rPr>
                         <a:t>Revenue</a:t>
                       </a:r>
@@ -7956,12 +8567,17 @@
                     <a:bodyPr/>
                     <a:lstStyle/>
                     <a:p>
-                      <a:pPr algn="r"/>
+                      <a:pPr algn="r">
+                        <a:defRPr>
+                          <a:latin typeface="Roboto"/>
+                        </a:defRPr>
+                      </a:pPr>
                       <a:r>
                         <a:rPr sz="1050">
                           <a:solidFill>
                             <a:srgbClr val="25342A"/>
                           </a:solidFill>
+                          <a:latin typeface="Roboto"/>
                         </a:rPr>
                         <a:t>$71,260</a:t>
                       </a:r>
@@ -7980,11 +8596,17 @@
                     <a:bodyPr/>
                     <a:lstStyle/>
                     <a:p>
+                      <a:pPr>
+                        <a:defRPr>
+                          <a:latin typeface="Roboto"/>
+                        </a:defRPr>
+                      </a:pPr>
                       <a:r>
                         <a:rPr sz="1050">
                           <a:solidFill>
                             <a:srgbClr val="25342A"/>
                           </a:solidFill>
+                          <a:latin typeface="Roboto"/>
                         </a:rPr>
                         <a:t>Gross margin on client work, %</a:t>
                       </a:r>
@@ -8001,12 +8623,17 @@
                     <a:bodyPr/>
                     <a:lstStyle/>
                     <a:p>
-                      <a:pPr algn="r"/>
+                      <a:pPr algn="r">
+                        <a:defRPr>
+                          <a:latin typeface="Roboto"/>
+                        </a:defRPr>
+                      </a:pPr>
                       <a:r>
                         <a:rPr sz="1050">
                           <a:solidFill>
                             <a:srgbClr val="25342A"/>
                           </a:solidFill>
+                          <a:latin typeface="Roboto"/>
                         </a:rPr>
                         <a:t>64.2%</a:t>
                       </a:r>
@@ -8025,11 +8652,17 @@
                     <a:bodyPr/>
                     <a:lstStyle/>
                     <a:p>
+                      <a:pPr>
+                        <a:defRPr>
+                          <a:latin typeface="Roboto"/>
+                        </a:defRPr>
+                      </a:pPr>
                       <a:r>
                         <a:rPr sz="1050">
                           <a:solidFill>
                             <a:srgbClr val="25342A"/>
                           </a:solidFill>
+                          <a:latin typeface="Roboto"/>
                         </a:rPr>
                         <a:t>Profit before tax, % of revenue</a:t>
                       </a:r>
@@ -8046,12 +8679,17 @@
                     <a:bodyPr/>
                     <a:lstStyle/>
                     <a:p>
-                      <a:pPr algn="r"/>
+                      <a:pPr algn="r">
+                        <a:defRPr>
+                          <a:latin typeface="Roboto"/>
+                        </a:defRPr>
+                      </a:pPr>
                       <a:r>
                         <a:rPr sz="1050">
                           <a:solidFill>
                             <a:srgbClr val="B42318"/>
                           </a:solidFill>
+                          <a:latin typeface="Roboto"/>
                         </a:rPr>
                         <a:t>(29.1%)</a:t>
                       </a:r>
@@ -8070,11 +8708,17 @@
                     <a:bodyPr/>
                     <a:lstStyle/>
                     <a:p>
+                      <a:pPr>
+                        <a:defRPr>
+                          <a:latin typeface="Roboto"/>
+                        </a:defRPr>
+                      </a:pPr>
                       <a:r>
                         <a:rPr sz="1050">
                           <a:solidFill>
                             <a:srgbClr val="25342A"/>
                           </a:solidFill>
+                          <a:latin typeface="Roboto"/>
                         </a:rPr>
                         <a:t>Gross margin client work need just to cover overheads and time not charged</a:t>
                       </a:r>
@@ -8091,12 +8735,17 @@
                     <a:bodyPr/>
                     <a:lstStyle/>
                     <a:p>
-                      <a:pPr algn="r"/>
+                      <a:pPr algn="r">
+                        <a:defRPr>
+                          <a:latin typeface="Roboto"/>
+                        </a:defRPr>
+                      </a:pPr>
                       <a:r>
                         <a:rPr sz="1050">
                           <a:solidFill>
                             <a:srgbClr val="25342A"/>
                           </a:solidFill>
+                          <a:latin typeface="Roboto"/>
                         </a:rPr>
                         <a:t>93.3%</a:t>
                       </a:r>
@@ -8135,12 +8784,17 @@
           </a:bodyPr>
           <a:lstStyle/>
           <a:p>
+            <a:pPr>
+              <a:defRPr>
+                <a:latin typeface="Roboto"/>
+              </a:defRPr>
+            </a:pPr>
             <a:r>
               <a:rPr sz="900" b="0">
                 <a:solidFill>
                   <a:srgbClr val="5F6F63"/>
                 </a:solidFill>
-                <a:latin typeface="Arial"/>
+                <a:latin typeface="Roboto"/>
               </a:rPr>
               <a:t>growth.pptx</a:t>
             </a:r>
@@ -8169,13 +8823,17 @@
           </a:bodyPr>
           <a:lstStyle/>
           <a:p>
-            <a:pPr algn="ctr"/>
+            <a:pPr algn="ctr">
+              <a:defRPr>
+                <a:latin typeface="Roboto"/>
+              </a:defRPr>
+            </a:pPr>
             <a:r>
               <a:rPr sz="900" b="0">
                 <a:solidFill>
                   <a:srgbClr val="5F6F63"/>
                 </a:solidFill>
-                <a:latin typeface="Arial"/>
+                <a:latin typeface="Roboto"/>
               </a:rPr>
               <a:t>Data retrieved 2pm, Tue 6 Oct 2026 · Sample data</a:t>
             </a:r>
@@ -8204,13 +8862,17 @@
           </a:bodyPr>
           <a:lstStyle/>
           <a:p>
-            <a:pPr algn="r"/>
+            <a:pPr algn="r">
+              <a:defRPr>
+                <a:latin typeface="Roboto"/>
+              </a:defRPr>
+            </a:pPr>
             <a:r>
               <a:rPr sz="900" b="0">
                 <a:solidFill>
                   <a:srgbClr val="5F6F63"/>
                 </a:solidFill>
-                <a:latin typeface="Arial"/>
+                <a:latin typeface="Roboto"/>
               </a:rPr>
               <a:t>Slide 16 of 27</a:t>
             </a:r>
@@ -8274,7 +8936,11 @@
           <a:bodyPr rtlCol="0" anchor="ctr"/>
           <a:lstStyle/>
           <a:p>
-            <a:pPr algn="ctr"/>
+            <a:pPr algn="ctr">
+              <a:defRPr>
+                <a:latin typeface="Roboto"/>
+              </a:defRPr>
+            </a:pPr>
           </a:p>
         </p:txBody>
       </p:sp>
@@ -8300,12 +8966,17 @@
           </a:bodyPr>
           <a:lstStyle/>
           <a:p>
+            <a:pPr>
+              <a:defRPr>
+                <a:latin typeface="Roboto"/>
+              </a:defRPr>
+            </a:pPr>
             <a:r>
               <a:rPr sz="1000" b="0">
                 <a:solidFill>
                   <a:srgbClr val="5F6F63"/>
                 </a:solidFill>
-                <a:latin typeface="Arial"/>
+                <a:latin typeface="Roboto"/>
               </a:rPr>
               <a:t>SME sample businesses · Which products and services are growing?</a:t>
             </a:r>
@@ -8334,12 +9005,17 @@
           </a:bodyPr>
           <a:lstStyle/>
           <a:p>
+            <a:pPr>
+              <a:defRPr>
+                <a:latin typeface="Roboto"/>
+              </a:defRPr>
+            </a:pPr>
             <a:r>
               <a:rPr sz="2400" b="1">
                 <a:solidFill>
                   <a:srgbClr val="25342A"/>
                 </a:solidFill>
-                <a:latin typeface="Arial"/>
+                <a:latin typeface="Roboto"/>
               </a:rPr>
               <a:t>Headline numbers · Services · Type of work: All</a:t>
             </a:r>
@@ -8387,7 +9063,11 @@
           <a:bodyPr rtlCol="0" anchor="ctr"/>
           <a:lstStyle/>
           <a:p>
-            <a:pPr algn="ctr"/>
+            <a:pPr algn="ctr">
+              <a:defRPr>
+                <a:latin typeface="Roboto"/>
+              </a:defRPr>
+            </a:pPr>
           </a:p>
         </p:txBody>
       </p:sp>
@@ -8413,12 +9093,17 @@
           </a:bodyPr>
           <a:lstStyle/>
           <a:p>
+            <a:pPr>
+              <a:defRPr>
+                <a:latin typeface="Roboto"/>
+              </a:defRPr>
+            </a:pPr>
             <a:r>
               <a:rPr sz="1200" b="0">
                 <a:solidFill>
                   <a:srgbClr val="5F6F63"/>
                 </a:solidFill>
-                <a:latin typeface="Arial"/>
+                <a:latin typeface="Roboto"/>
               </a:rPr>
               <a:t>October against October last year</a:t>
             </a:r>
@@ -8447,12 +9132,17 @@
           </a:bodyPr>
           <a:lstStyle/>
           <a:p>
+            <a:pPr>
+              <a:defRPr>
+                <a:latin typeface="Roboto"/>
+              </a:defRPr>
+            </a:pPr>
             <a:r>
               <a:rPr sz="3000" b="1">
                 <a:solidFill>
                   <a:srgbClr val="B42318"/>
                 </a:solidFill>
-                <a:latin typeface="Arial"/>
+                <a:latin typeface="Roboto"/>
               </a:rPr>
               <a:t>(24.6%)</a:t>
             </a:r>
@@ -8481,12 +9171,17 @@
           </a:bodyPr>
           <a:lstStyle/>
           <a:p>
+            <a:pPr>
+              <a:defRPr>
+                <a:latin typeface="Roboto"/>
+              </a:defRPr>
+            </a:pPr>
             <a:r>
               <a:rPr sz="1100" b="0">
                 <a:solidFill>
                   <a:srgbClr val="5F6F63"/>
                 </a:solidFill>
-                <a:latin typeface="Arial"/>
+                <a:latin typeface="Roboto"/>
               </a:rPr>
               <a:t>$71,260 against $94,520</a:t>
             </a:r>
@@ -8534,7 +9229,11 @@
           <a:bodyPr rtlCol="0" anchor="ctr"/>
           <a:lstStyle/>
           <a:p>
-            <a:pPr algn="ctr"/>
+            <a:pPr algn="ctr">
+              <a:defRPr>
+                <a:latin typeface="Roboto"/>
+              </a:defRPr>
+            </a:pPr>
           </a:p>
         </p:txBody>
       </p:sp>
@@ -8560,12 +9259,17 @@
           </a:bodyPr>
           <a:lstStyle/>
           <a:p>
+            <a:pPr>
+              <a:defRPr>
+                <a:latin typeface="Roboto"/>
+              </a:defRPr>
+            </a:pPr>
             <a:r>
               <a:rPr sz="1200" b="0">
                 <a:solidFill>
                   <a:srgbClr val="5F6F63"/>
                 </a:solidFill>
-                <a:latin typeface="Arial"/>
+                <a:latin typeface="Roboto"/>
               </a:rPr>
               <a:t>Year to date (Jul to Oct 2025)</a:t>
             </a:r>
@@ -8594,12 +9298,17 @@
           </a:bodyPr>
           <a:lstStyle/>
           <a:p>
+            <a:pPr>
+              <a:defRPr>
+                <a:latin typeface="Roboto"/>
+              </a:defRPr>
+            </a:pPr>
             <a:r>
               <a:rPr sz="3000" b="1">
                 <a:solidFill>
                   <a:srgbClr val="2F7A5D"/>
                 </a:solidFill>
-                <a:latin typeface="Arial"/>
+                <a:latin typeface="Roboto"/>
               </a:rPr>
               <a:t>$278,590</a:t>
             </a:r>
@@ -8628,12 +9337,17 @@
           </a:bodyPr>
           <a:lstStyle/>
           <a:p>
+            <a:pPr>
+              <a:defRPr>
+                <a:latin typeface="Roboto"/>
+              </a:defRPr>
+            </a:pPr>
             <a:r>
               <a:rPr sz="1100" b="0">
                 <a:solidFill>
                   <a:srgbClr val="5F6F63"/>
                 </a:solidFill>
-                <a:latin typeface="Arial"/>
+                <a:latin typeface="Roboto"/>
               </a:rPr>
               <a:t>same period last year: not in the data</a:t>
             </a:r>
@@ -8681,7 +9395,11 @@
           <a:bodyPr rtlCol="0" anchor="ctr"/>
           <a:lstStyle/>
           <a:p>
-            <a:pPr algn="ctr"/>
+            <a:pPr algn="ctr">
+              <a:defRPr>
+                <a:latin typeface="Roboto"/>
+              </a:defRPr>
+            </a:pPr>
           </a:p>
         </p:txBody>
       </p:sp>
@@ -8707,12 +9425,17 @@
           </a:bodyPr>
           <a:lstStyle/>
           <a:p>
+            <a:pPr>
+              <a:defRPr>
+                <a:latin typeface="Roboto"/>
+              </a:defRPr>
+            </a:pPr>
             <a:r>
               <a:rPr sz="1200" b="0">
                 <a:solidFill>
                   <a:srgbClr val="5F6F63"/>
                 </a:solidFill>
-                <a:latin typeface="Arial"/>
+                <a:latin typeface="Roboto"/>
               </a:rPr>
               <a:t>Gross margin, year to date</a:t>
             </a:r>
@@ -8741,12 +9464,17 @@
           </a:bodyPr>
           <a:lstStyle/>
           <a:p>
+            <a:pPr>
+              <a:defRPr>
+                <a:latin typeface="Roboto"/>
+              </a:defRPr>
+            </a:pPr>
             <a:r>
               <a:rPr sz="3000" b="1">
                 <a:solidFill>
                   <a:srgbClr val="2F7A5D"/>
                 </a:solidFill>
-                <a:latin typeface="Arial"/>
+                <a:latin typeface="Roboto"/>
               </a:rPr>
               <a:t>64.1%</a:t>
             </a:r>
@@ -8775,12 +9503,17 @@
           </a:bodyPr>
           <a:lstStyle/>
           <a:p>
+            <a:pPr>
+              <a:defRPr>
+                <a:latin typeface="Roboto"/>
+              </a:defRPr>
+            </a:pPr>
             <a:r>
               <a:rPr sz="1100" b="0">
                 <a:solidFill>
                   <a:srgbClr val="5F6F63"/>
                 </a:solidFill>
-                <a:latin typeface="Arial"/>
+                <a:latin typeface="Roboto"/>
               </a:rPr>
               <a:t>$178,590 before overheads</a:t>
             </a:r>
@@ -8809,12 +9542,17 @@
           </a:bodyPr>
           <a:lstStyle/>
           <a:p>
+            <a:pPr>
+              <a:defRPr>
+                <a:latin typeface="Roboto"/>
+              </a:defRPr>
+            </a:pPr>
             <a:r>
               <a:rPr sz="900" b="0">
                 <a:solidFill>
                   <a:srgbClr val="5F6F63"/>
                 </a:solidFill>
-                <a:latin typeface="Arial"/>
+                <a:latin typeface="Roboto"/>
               </a:rPr>
               <a:t>growth.pptx</a:t>
             </a:r>
@@ -8843,13 +9581,17 @@
           </a:bodyPr>
           <a:lstStyle/>
           <a:p>
-            <a:pPr algn="ctr"/>
+            <a:pPr algn="ctr">
+              <a:defRPr>
+                <a:latin typeface="Roboto"/>
+              </a:defRPr>
+            </a:pPr>
             <a:r>
               <a:rPr sz="900" b="0">
                 <a:solidFill>
                   <a:srgbClr val="5F6F63"/>
                 </a:solidFill>
-                <a:latin typeface="Arial"/>
+                <a:latin typeface="Roboto"/>
               </a:rPr>
               <a:t>Data retrieved 2pm, Tue 6 Oct 2026 · Sample data</a:t>
             </a:r>
@@ -8878,13 +9620,17 @@
           </a:bodyPr>
           <a:lstStyle/>
           <a:p>
-            <a:pPr algn="r"/>
+            <a:pPr algn="r">
+              <a:defRPr>
+                <a:latin typeface="Roboto"/>
+              </a:defRPr>
+            </a:pPr>
             <a:r>
               <a:rPr sz="900" b="0">
                 <a:solidFill>
                   <a:srgbClr val="5F6F63"/>
                 </a:solidFill>
-                <a:latin typeface="Arial"/>
+                <a:latin typeface="Roboto"/>
               </a:rPr>
               <a:t>Slide 17 of 27</a:t>
             </a:r>
@@ -8948,7 +9694,11 @@
           <a:bodyPr rtlCol="0" anchor="ctr"/>
           <a:lstStyle/>
           <a:p>
-            <a:pPr algn="ctr"/>
+            <a:pPr algn="ctr">
+              <a:defRPr>
+                <a:latin typeface="Roboto"/>
+              </a:defRPr>
+            </a:pPr>
           </a:p>
         </p:txBody>
       </p:sp>
@@ -8974,12 +9724,17 @@
           </a:bodyPr>
           <a:lstStyle/>
           <a:p>
+            <a:pPr>
+              <a:defRPr>
+                <a:latin typeface="Roboto"/>
+              </a:defRPr>
+            </a:pPr>
             <a:r>
               <a:rPr sz="1000" b="0">
                 <a:solidFill>
                   <a:srgbClr val="5F6F63"/>
                 </a:solidFill>
-                <a:latin typeface="Arial"/>
+                <a:latin typeface="Roboto"/>
               </a:rPr>
               <a:t>SME sample businesses · Which products and services are growing?</a:t>
             </a:r>
@@ -9008,12 +9763,17 @@
           </a:bodyPr>
           <a:lstStyle/>
           <a:p>
+            <a:pPr>
+              <a:defRPr>
+                <a:latin typeface="Roboto"/>
+              </a:defRPr>
+            </a:pPr>
             <a:r>
               <a:rPr sz="2400" b="1">
                 <a:solidFill>
                   <a:srgbClr val="25342A"/>
                 </a:solidFill>
-                <a:latin typeface="Arial"/>
+                <a:latin typeface="Roboto"/>
               </a:rPr>
               <a:t>What it shows · Services · Type of work: All</a:t>
             </a:r>
@@ -9061,7 +9821,11 @@
           <a:bodyPr rtlCol="0" anchor="ctr"/>
           <a:lstStyle/>
           <a:p>
-            <a:pPr algn="ctr"/>
+            <a:pPr algn="ctr">
+              <a:defRPr>
+                <a:latin typeface="Roboto"/>
+              </a:defRPr>
+            </a:pPr>
           </a:p>
         </p:txBody>
       </p:sp>
@@ -9087,12 +9851,17 @@
           </a:bodyPr>
           <a:lstStyle/>
           <a:p>
+            <a:pPr>
+              <a:defRPr>
+                <a:latin typeface="Roboto"/>
+              </a:defRPr>
+            </a:pPr>
             <a:r>
               <a:rPr sz="1100" b="1">
                 <a:solidFill>
                   <a:srgbClr val="5F6F63"/>
                 </a:solidFill>
-                <a:latin typeface="Arial"/>
+                <a:latin typeface="Roboto"/>
               </a:rPr>
               <a:t>WHAT IT SHOWS</a:t>
             </a:r>
@@ -9121,12 +9890,17 @@
           </a:bodyPr>
           <a:lstStyle/>
           <a:p>
+            <a:pPr>
+              <a:defRPr>
+                <a:latin typeface="Roboto"/>
+              </a:defRPr>
+            </a:pPr>
             <a:r>
               <a:rPr sz="1600" b="0">
                 <a:solidFill>
                   <a:srgbClr val="25342A"/>
                 </a:solidFill>
-                <a:latin typeface="Arial"/>
+                <a:latin typeface="Roboto"/>
               </a:rPr>
               <a:t>Revenue is $278,590 this financial year to date (Jul to Oct 2025). Training makes the highest gross margin (78.0%); Projects the lowest (61.8%). The business needs 93.3% gross margin just to cover overheads.</a:t>
             </a:r>
@@ -9174,7 +9948,11 @@
           <a:bodyPr rtlCol="0" anchor="ctr"/>
           <a:lstStyle/>
           <a:p>
-            <a:pPr algn="ctr"/>
+            <a:pPr algn="ctr">
+              <a:defRPr>
+                <a:latin typeface="Roboto"/>
+              </a:defRPr>
+            </a:pPr>
           </a:p>
         </p:txBody>
       </p:sp>
@@ -9200,12 +9978,17 @@
           </a:bodyPr>
           <a:lstStyle/>
           <a:p>
+            <a:pPr>
+              <a:defRPr>
+                <a:latin typeface="Roboto"/>
+              </a:defRPr>
+            </a:pPr>
             <a:r>
               <a:rPr sz="1100" b="1">
                 <a:solidFill>
                   <a:srgbClr val="5F6F63"/>
                 </a:solidFill>
-                <a:latin typeface="Arial"/>
+                <a:latin typeface="Roboto"/>
               </a:rPr>
               <a:t>WHAT YOU'D DO ABOUT IT</a:t>
             </a:r>
@@ -9234,12 +10017,17 @@
           </a:bodyPr>
           <a:lstStyle/>
           <a:p>
+            <a:pPr>
+              <a:defRPr>
+                <a:latin typeface="Roboto"/>
+              </a:defRPr>
+            </a:pPr>
             <a:r>
               <a:rPr sz="1600" b="0">
                 <a:solidFill>
                   <a:srgbClr val="25342A"/>
                 </a:solidFill>
-                <a:latin typeface="Arial"/>
+                <a:latin typeface="Roboto"/>
               </a:rPr>
               <a:t>Training: 78.0% gross margin, the most profitable work you do. Projects: 61.8% gross margin, below the 93.3% needed to cover overheads.</a:t>
             </a:r>
@@ -9268,12 +10056,17 @@
           </a:bodyPr>
           <a:lstStyle/>
           <a:p>
+            <a:pPr>
+              <a:defRPr>
+                <a:latin typeface="Roboto"/>
+              </a:defRPr>
+            </a:pPr>
             <a:r>
               <a:rPr sz="900" b="0">
                 <a:solidFill>
                   <a:srgbClr val="5F6F63"/>
                 </a:solidFill>
-                <a:latin typeface="Arial"/>
+                <a:latin typeface="Roboto"/>
               </a:rPr>
               <a:t>growth.pptx</a:t>
             </a:r>
@@ -9302,13 +10095,17 @@
           </a:bodyPr>
           <a:lstStyle/>
           <a:p>
-            <a:pPr algn="ctr"/>
+            <a:pPr algn="ctr">
+              <a:defRPr>
+                <a:latin typeface="Roboto"/>
+              </a:defRPr>
+            </a:pPr>
             <a:r>
               <a:rPr sz="900" b="0">
                 <a:solidFill>
                   <a:srgbClr val="5F6F63"/>
                 </a:solidFill>
-                <a:latin typeface="Arial"/>
+                <a:latin typeface="Roboto"/>
               </a:rPr>
               <a:t>Data retrieved 2pm, Tue 6 Oct 2026 · Sample data</a:t>
             </a:r>
@@ -9337,13 +10134,17 @@
           </a:bodyPr>
           <a:lstStyle/>
           <a:p>
-            <a:pPr algn="r"/>
+            <a:pPr algn="r">
+              <a:defRPr>
+                <a:latin typeface="Roboto"/>
+              </a:defRPr>
+            </a:pPr>
             <a:r>
               <a:rPr sz="900" b="0">
                 <a:solidFill>
                   <a:srgbClr val="5F6F63"/>
                 </a:solidFill>
-                <a:latin typeface="Arial"/>
+                <a:latin typeface="Roboto"/>
               </a:rPr>
               <a:t>Slide 18 of 27</a:t>
             </a:r>
@@ -9407,7 +10208,11 @@
           <a:bodyPr rtlCol="0" anchor="ctr"/>
           <a:lstStyle/>
           <a:p>
-            <a:pPr algn="ctr"/>
+            <a:pPr algn="ctr">
+              <a:defRPr>
+                <a:latin typeface="Roboto"/>
+              </a:defRPr>
+            </a:pPr>
           </a:p>
         </p:txBody>
       </p:sp>
@@ -9433,12 +10238,17 @@
           </a:bodyPr>
           <a:lstStyle/>
           <a:p>
+            <a:pPr>
+              <a:defRPr>
+                <a:latin typeface="Roboto"/>
+              </a:defRPr>
+            </a:pPr>
             <a:r>
               <a:rPr sz="1000" b="0">
                 <a:solidFill>
                   <a:srgbClr val="5F6F63"/>
                 </a:solidFill>
-                <a:latin typeface="Arial"/>
+                <a:latin typeface="Roboto"/>
               </a:rPr>
               <a:t>SME sample businesses · Which products and services are growing?</a:t>
             </a:r>
@@ -9467,12 +10277,17 @@
           </a:bodyPr>
           <a:lstStyle/>
           <a:p>
+            <a:pPr>
+              <a:defRPr>
+                <a:latin typeface="Roboto"/>
+              </a:defRPr>
+            </a:pPr>
             <a:r>
               <a:rPr sz="2400" b="1">
                 <a:solidFill>
                   <a:srgbClr val="25342A"/>
                 </a:solidFill>
-                <a:latin typeface="Arial"/>
+                <a:latin typeface="Roboto"/>
               </a:rPr>
               <a:t>Headline numbers · Services · Type of work: Projects</a:t>
             </a:r>
@@ -9520,7 +10335,11 @@
           <a:bodyPr rtlCol="0" anchor="ctr"/>
           <a:lstStyle/>
           <a:p>
-            <a:pPr algn="ctr"/>
+            <a:pPr algn="ctr">
+              <a:defRPr>
+                <a:latin typeface="Roboto"/>
+              </a:defRPr>
+            </a:pPr>
           </a:p>
         </p:txBody>
       </p:sp>
@@ -9546,12 +10365,17 @@
           </a:bodyPr>
           <a:lstStyle/>
           <a:p>
+            <a:pPr>
+              <a:defRPr>
+                <a:latin typeface="Roboto"/>
+              </a:defRPr>
+            </a:pPr>
             <a:r>
               <a:rPr sz="1200" b="0">
                 <a:solidFill>
                   <a:srgbClr val="5F6F63"/>
                 </a:solidFill>
-                <a:latin typeface="Arial"/>
+                <a:latin typeface="Roboto"/>
               </a:rPr>
               <a:t>October against October last year</a:t>
             </a:r>
@@ -9580,12 +10404,17 @@
           </a:bodyPr>
           <a:lstStyle/>
           <a:p>
+            <a:pPr>
+              <a:defRPr>
+                <a:latin typeface="Roboto"/>
+              </a:defRPr>
+            </a:pPr>
             <a:r>
               <a:rPr sz="3000" b="1">
                 <a:solidFill>
                   <a:srgbClr val="B42318"/>
                 </a:solidFill>
-                <a:latin typeface="Arial"/>
+                <a:latin typeface="Roboto"/>
               </a:rPr>
               <a:t>(35.2%)</a:t>
             </a:r>
@@ -9614,12 +10443,17 @@
           </a:bodyPr>
           <a:lstStyle/>
           <a:p>
+            <a:pPr>
+              <a:defRPr>
+                <a:latin typeface="Roboto"/>
+              </a:defRPr>
+            </a:pPr>
             <a:r>
               <a:rPr sz="1100" b="0">
                 <a:solidFill>
                   <a:srgbClr val="5F6F63"/>
                 </a:solidFill>
-                <a:latin typeface="Arial"/>
+                <a:latin typeface="Roboto"/>
               </a:rPr>
               <a:t>$45,860 against $70,720</a:t>
             </a:r>
@@ -9667,7 +10501,11 @@
           <a:bodyPr rtlCol="0" anchor="ctr"/>
           <a:lstStyle/>
           <a:p>
-            <a:pPr algn="ctr"/>
+            <a:pPr algn="ctr">
+              <a:defRPr>
+                <a:latin typeface="Roboto"/>
+              </a:defRPr>
+            </a:pPr>
           </a:p>
         </p:txBody>
       </p:sp>
@@ -9693,12 +10531,17 @@
           </a:bodyPr>
           <a:lstStyle/>
           <a:p>
+            <a:pPr>
+              <a:defRPr>
+                <a:latin typeface="Roboto"/>
+              </a:defRPr>
+            </a:pPr>
             <a:r>
               <a:rPr sz="1200" b="0">
                 <a:solidFill>
                   <a:srgbClr val="5F6F63"/>
                 </a:solidFill>
-                <a:latin typeface="Arial"/>
+                <a:latin typeface="Roboto"/>
               </a:rPr>
               <a:t>Year to date (Jul to Oct 2025)</a:t>
             </a:r>
@@ -9727,12 +10570,17 @@
           </a:bodyPr>
           <a:lstStyle/>
           <a:p>
+            <a:pPr>
+              <a:defRPr>
+                <a:latin typeface="Roboto"/>
+              </a:defRPr>
+            </a:pPr>
             <a:r>
               <a:rPr sz="3000" b="1">
                 <a:solidFill>
                   <a:srgbClr val="2F7A5D"/>
                 </a:solidFill>
-                <a:latin typeface="Arial"/>
+                <a:latin typeface="Roboto"/>
               </a:rPr>
               <a:t>$187,490</a:t>
             </a:r>
@@ -9761,12 +10609,17 @@
           </a:bodyPr>
           <a:lstStyle/>
           <a:p>
+            <a:pPr>
+              <a:defRPr>
+                <a:latin typeface="Roboto"/>
+              </a:defRPr>
+            </a:pPr>
             <a:r>
               <a:rPr sz="1100" b="0">
                 <a:solidFill>
                   <a:srgbClr val="5F6F63"/>
                 </a:solidFill>
-                <a:latin typeface="Arial"/>
+                <a:latin typeface="Roboto"/>
               </a:rPr>
               <a:t>same period last year: not in the data</a:t>
             </a:r>
@@ -9814,7 +10667,11 @@
           <a:bodyPr rtlCol="0" anchor="ctr"/>
           <a:lstStyle/>
           <a:p>
-            <a:pPr algn="ctr"/>
+            <a:pPr algn="ctr">
+              <a:defRPr>
+                <a:latin typeface="Roboto"/>
+              </a:defRPr>
+            </a:pPr>
           </a:p>
         </p:txBody>
       </p:sp>
@@ -9840,12 +10697,17 @@
           </a:bodyPr>
           <a:lstStyle/>
           <a:p>
+            <a:pPr>
+              <a:defRPr>
+                <a:latin typeface="Roboto"/>
+              </a:defRPr>
+            </a:pPr>
             <a:r>
               <a:rPr sz="1200" b="0">
                 <a:solidFill>
                   <a:srgbClr val="5F6F63"/>
                 </a:solidFill>
-                <a:latin typeface="Arial"/>
+                <a:latin typeface="Roboto"/>
               </a:rPr>
               <a:t>Gross margin, year to date</a:t>
             </a:r>
@@ -9874,12 +10736,17 @@
           </a:bodyPr>
           <a:lstStyle/>
           <a:p>
+            <a:pPr>
+              <a:defRPr>
+                <a:latin typeface="Roboto"/>
+              </a:defRPr>
+            </a:pPr>
             <a:r>
               <a:rPr sz="3000" b="1">
                 <a:solidFill>
                   <a:srgbClr val="2F7A5D"/>
                 </a:solidFill>
-                <a:latin typeface="Arial"/>
+                <a:latin typeface="Roboto"/>
               </a:rPr>
               <a:t>61.8%</a:t>
             </a:r>
@@ -9908,12 +10775,17 @@
           </a:bodyPr>
           <a:lstStyle/>
           <a:p>
+            <a:pPr>
+              <a:defRPr>
+                <a:latin typeface="Roboto"/>
+              </a:defRPr>
+            </a:pPr>
             <a:r>
               <a:rPr sz="1100" b="0">
                 <a:solidFill>
                   <a:srgbClr val="5F6F63"/>
                 </a:solidFill>
-                <a:latin typeface="Arial"/>
+                <a:latin typeface="Roboto"/>
               </a:rPr>
               <a:t>$115,930 before overheads</a:t>
             </a:r>
@@ -9942,12 +10814,17 @@
           </a:bodyPr>
           <a:lstStyle/>
           <a:p>
+            <a:pPr>
+              <a:defRPr>
+                <a:latin typeface="Roboto"/>
+              </a:defRPr>
+            </a:pPr>
             <a:r>
               <a:rPr sz="900" b="0">
                 <a:solidFill>
                   <a:srgbClr val="5F6F63"/>
                 </a:solidFill>
-                <a:latin typeface="Arial"/>
+                <a:latin typeface="Roboto"/>
               </a:rPr>
               <a:t>growth.pptx</a:t>
             </a:r>
@@ -9976,13 +10853,17 @@
           </a:bodyPr>
           <a:lstStyle/>
           <a:p>
-            <a:pPr algn="ctr"/>
+            <a:pPr algn="ctr">
+              <a:defRPr>
+                <a:latin typeface="Roboto"/>
+              </a:defRPr>
+            </a:pPr>
             <a:r>
               <a:rPr sz="900" b="0">
                 <a:solidFill>
                   <a:srgbClr val="5F6F63"/>
                 </a:solidFill>
-                <a:latin typeface="Arial"/>
+                <a:latin typeface="Roboto"/>
               </a:rPr>
               <a:t>Data retrieved 2pm, Tue 6 Oct 2026 · Sample data</a:t>
             </a:r>
@@ -10011,13 +10892,17 @@
           </a:bodyPr>
           <a:lstStyle/>
           <a:p>
-            <a:pPr algn="r"/>
+            <a:pPr algn="r">
+              <a:defRPr>
+                <a:latin typeface="Roboto"/>
+              </a:defRPr>
+            </a:pPr>
             <a:r>
               <a:rPr sz="900" b="0">
                 <a:solidFill>
                   <a:srgbClr val="5F6F63"/>
                 </a:solidFill>
-                <a:latin typeface="Arial"/>
+                <a:latin typeface="Roboto"/>
               </a:rPr>
               <a:t>Slide 19 of 27</a:t>
             </a:r>
@@ -10081,7 +10966,11 @@
           <a:bodyPr rtlCol="0" anchor="ctr"/>
           <a:lstStyle/>
           <a:p>
-            <a:pPr algn="ctr"/>
+            <a:pPr algn="ctr">
+              <a:defRPr>
+                <a:latin typeface="Roboto"/>
+              </a:defRPr>
+            </a:pPr>
           </a:p>
         </p:txBody>
       </p:sp>
@@ -10107,12 +10996,17 @@
           </a:bodyPr>
           <a:lstStyle/>
           <a:p>
+            <a:pPr>
+              <a:defRPr>
+                <a:latin typeface="Roboto"/>
+              </a:defRPr>
+            </a:pPr>
             <a:r>
               <a:rPr sz="1000" b="0">
                 <a:solidFill>
                   <a:srgbClr val="5F6F63"/>
                 </a:solidFill>
-                <a:latin typeface="Arial"/>
+                <a:latin typeface="Roboto"/>
               </a:rPr>
               <a:t>SME sample businesses · Which products and services are growing?</a:t>
             </a:r>
@@ -10141,12 +11035,17 @@
           </a:bodyPr>
           <a:lstStyle/>
           <a:p>
+            <a:pPr>
+              <a:defRPr>
+                <a:latin typeface="Roboto"/>
+              </a:defRPr>
+            </a:pPr>
             <a:r>
               <a:rPr sz="2400" b="1">
                 <a:solidFill>
                   <a:srgbClr val="25342A"/>
                 </a:solidFill>
-                <a:latin typeface="Arial"/>
+                <a:latin typeface="Roboto"/>
               </a:rPr>
               <a:t>Gross margin, not profit</a:t>
             </a:r>
@@ -10194,7 +11093,11 @@
           <a:bodyPr rtlCol="0" anchor="ctr"/>
           <a:lstStyle/>
           <a:p>
-            <a:pPr algn="ctr"/>
+            <a:pPr algn="ctr">
+              <a:defRPr>
+                <a:latin typeface="Roboto"/>
+              </a:defRPr>
+            </a:pPr>
           </a:p>
         </p:txBody>
       </p:sp>
@@ -10220,12 +11123,17 @@
           </a:bodyPr>
           <a:lstStyle/>
           <a:p>
+            <a:pPr>
+              <a:defRPr>
+                <a:latin typeface="Roboto"/>
+              </a:defRPr>
+            </a:pPr>
             <a:r>
               <a:rPr sz="1100" b="1">
                 <a:solidFill>
                   <a:srgbClr val="5F6F63"/>
                 </a:solidFill>
-                <a:latin typeface="Arial"/>
+                <a:latin typeface="Roboto"/>
               </a:rPr>
               <a:t>GROSS MARGIN, NOT PROFIT</a:t>
             </a:r>
@@ -10254,12 +11162,17 @@
           </a:bodyPr>
           <a:lstStyle/>
           <a:p>
+            <a:pPr>
+              <a:defRPr>
+                <a:latin typeface="Roboto"/>
+              </a:defRPr>
+            </a:pPr>
             <a:r>
               <a:rPr sz="1600" b="0">
                 <a:solidFill>
                   <a:srgbClr val="25342A"/>
                 </a:solidFill>
-                <a:latin typeface="Arial"/>
+                <a:latin typeface="Roboto"/>
               </a:rPr>
               <a:t>Gross margin is not profit. Job gross margin = revenue less materials, subcontractors and technician time charged to the job at $68 an hour (wages and all on-costs). Not included: technician time not charged to any job (travel, training, waiting), and overheads (office wages, marketing, vehicles, rent, insurance, IT, depreciation, interest). Profit is what's left after those. Wages always include all on-costs: super, payroll tax, workers' compensation insurance and leave.</a:t>
             </a:r>
@@ -10288,12 +11201,17 @@
           </a:bodyPr>
           <a:lstStyle/>
           <a:p>
+            <a:pPr>
+              <a:defRPr>
+                <a:latin typeface="Roboto"/>
+              </a:defRPr>
+            </a:pPr>
             <a:r>
               <a:rPr sz="900" b="0">
                 <a:solidFill>
                   <a:srgbClr val="5F6F63"/>
                 </a:solidFill>
-                <a:latin typeface="Arial"/>
+                <a:latin typeface="Roboto"/>
               </a:rPr>
               <a:t>growth.pptx</a:t>
             </a:r>
@@ -10322,13 +11240,17 @@
           </a:bodyPr>
           <a:lstStyle/>
           <a:p>
-            <a:pPr algn="ctr"/>
+            <a:pPr algn="ctr">
+              <a:defRPr>
+                <a:latin typeface="Roboto"/>
+              </a:defRPr>
+            </a:pPr>
             <a:r>
               <a:rPr sz="900" b="0">
                 <a:solidFill>
                   <a:srgbClr val="5F6F63"/>
                 </a:solidFill>
-                <a:latin typeface="Arial"/>
+                <a:latin typeface="Roboto"/>
               </a:rPr>
               <a:t>Data retrieved 2pm, Tue 6 Oct 2026 · Sample data</a:t>
             </a:r>
@@ -10357,13 +11279,17 @@
           </a:bodyPr>
           <a:lstStyle/>
           <a:p>
-            <a:pPr algn="r"/>
+            <a:pPr algn="r">
+              <a:defRPr>
+                <a:latin typeface="Roboto"/>
+              </a:defRPr>
+            </a:pPr>
             <a:r>
               <a:rPr sz="900" b="0">
                 <a:solidFill>
                   <a:srgbClr val="5F6F63"/>
                 </a:solidFill>
-                <a:latin typeface="Arial"/>
+                <a:latin typeface="Roboto"/>
               </a:rPr>
               <a:t>Slide 2 of 27</a:t>
             </a:r>
@@ -10427,7 +11353,11 @@
           <a:bodyPr rtlCol="0" anchor="ctr"/>
           <a:lstStyle/>
           <a:p>
-            <a:pPr algn="ctr"/>
+            <a:pPr algn="ctr">
+              <a:defRPr>
+                <a:latin typeface="Roboto"/>
+              </a:defRPr>
+            </a:pPr>
           </a:p>
         </p:txBody>
       </p:sp>
@@ -10453,12 +11383,17 @@
           </a:bodyPr>
           <a:lstStyle/>
           <a:p>
+            <a:pPr>
+              <a:defRPr>
+                <a:latin typeface="Roboto"/>
+              </a:defRPr>
+            </a:pPr>
             <a:r>
               <a:rPr sz="1000" b="0">
                 <a:solidFill>
                   <a:srgbClr val="5F6F63"/>
                 </a:solidFill>
-                <a:latin typeface="Arial"/>
+                <a:latin typeface="Roboto"/>
               </a:rPr>
               <a:t>SME sample businesses · Which products and services are growing?</a:t>
             </a:r>
@@ -10487,12 +11422,17 @@
           </a:bodyPr>
           <a:lstStyle/>
           <a:p>
+            <a:pPr>
+              <a:defRPr>
+                <a:latin typeface="Roboto"/>
+              </a:defRPr>
+            </a:pPr>
             <a:r>
               <a:rPr sz="2400" b="1">
                 <a:solidFill>
                   <a:srgbClr val="25342A"/>
                 </a:solidFill>
-                <a:latin typeface="Arial"/>
+                <a:latin typeface="Roboto"/>
               </a:rPr>
               <a:t>What it shows · Services · Type of work: Projects</a:t>
             </a:r>
@@ -10540,7 +11480,11 @@
           <a:bodyPr rtlCol="0" anchor="ctr"/>
           <a:lstStyle/>
           <a:p>
-            <a:pPr algn="ctr"/>
+            <a:pPr algn="ctr">
+              <a:defRPr>
+                <a:latin typeface="Roboto"/>
+              </a:defRPr>
+            </a:pPr>
           </a:p>
         </p:txBody>
       </p:sp>
@@ -10566,12 +11510,17 @@
           </a:bodyPr>
           <a:lstStyle/>
           <a:p>
+            <a:pPr>
+              <a:defRPr>
+                <a:latin typeface="Roboto"/>
+              </a:defRPr>
+            </a:pPr>
             <a:r>
               <a:rPr sz="1100" b="1">
                 <a:solidFill>
                   <a:srgbClr val="5F6F63"/>
                 </a:solidFill>
-                <a:latin typeface="Arial"/>
+                <a:latin typeface="Roboto"/>
               </a:rPr>
               <a:t>WHAT IT SHOWS</a:t>
             </a:r>
@@ -10600,12 +11549,17 @@
           </a:bodyPr>
           <a:lstStyle/>
           <a:p>
+            <a:pPr>
+              <a:defRPr>
+                <a:latin typeface="Roboto"/>
+              </a:defRPr>
+            </a:pPr>
             <a:r>
               <a:rPr sz="1600" b="0">
                 <a:solidFill>
                   <a:srgbClr val="25342A"/>
                 </a:solidFill>
-                <a:latin typeface="Arial"/>
+                <a:latin typeface="Roboto"/>
               </a:rPr>
               <a:t>Projects brought in $187,490 this financial year to date, at a 61.8% gross margin (below the 64.1% overall).</a:t>
             </a:r>
@@ -10653,7 +11607,11 @@
           <a:bodyPr rtlCol="0" anchor="ctr"/>
           <a:lstStyle/>
           <a:p>
-            <a:pPr algn="ctr"/>
+            <a:pPr algn="ctr">
+              <a:defRPr>
+                <a:latin typeface="Roboto"/>
+              </a:defRPr>
+            </a:pPr>
           </a:p>
         </p:txBody>
       </p:sp>
@@ -10679,12 +11637,17 @@
           </a:bodyPr>
           <a:lstStyle/>
           <a:p>
+            <a:pPr>
+              <a:defRPr>
+                <a:latin typeface="Roboto"/>
+              </a:defRPr>
+            </a:pPr>
             <a:r>
               <a:rPr sz="1100" b="1">
                 <a:solidFill>
                   <a:srgbClr val="5F6F63"/>
                 </a:solidFill>
-                <a:latin typeface="Arial"/>
+                <a:latin typeface="Roboto"/>
               </a:rPr>
               <a:t>WHAT YOU'D DO ABOUT IT</a:t>
             </a:r>
@@ -10713,12 +11676,17 @@
           </a:bodyPr>
           <a:lstStyle/>
           <a:p>
+            <a:pPr>
+              <a:defRPr>
+                <a:latin typeface="Roboto"/>
+              </a:defRPr>
+            </a:pPr>
             <a:r>
               <a:rPr sz="1600" b="0">
                 <a:solidFill>
                   <a:srgbClr val="25342A"/>
                 </a:solidFill>
-                <a:latin typeface="Arial"/>
+                <a:latin typeface="Roboto"/>
               </a:rPr>
               <a:t>Projects: 61.8% gross margin, below the 93.3% needed to cover overheads.</a:t>
             </a:r>
@@ -10747,12 +11715,17 @@
           </a:bodyPr>
           <a:lstStyle/>
           <a:p>
+            <a:pPr>
+              <a:defRPr>
+                <a:latin typeface="Roboto"/>
+              </a:defRPr>
+            </a:pPr>
             <a:r>
               <a:rPr sz="900" b="0">
                 <a:solidFill>
                   <a:srgbClr val="5F6F63"/>
                 </a:solidFill>
-                <a:latin typeface="Arial"/>
+                <a:latin typeface="Roboto"/>
               </a:rPr>
               <a:t>growth.pptx</a:t>
             </a:r>
@@ -10781,13 +11754,17 @@
           </a:bodyPr>
           <a:lstStyle/>
           <a:p>
-            <a:pPr algn="ctr"/>
+            <a:pPr algn="ctr">
+              <a:defRPr>
+                <a:latin typeface="Roboto"/>
+              </a:defRPr>
+            </a:pPr>
             <a:r>
               <a:rPr sz="900" b="0">
                 <a:solidFill>
                   <a:srgbClr val="5F6F63"/>
                 </a:solidFill>
-                <a:latin typeface="Arial"/>
+                <a:latin typeface="Roboto"/>
               </a:rPr>
               <a:t>Data retrieved 2pm, Tue 6 Oct 2026 · Sample data</a:t>
             </a:r>
@@ -10816,13 +11793,17 @@
           </a:bodyPr>
           <a:lstStyle/>
           <a:p>
-            <a:pPr algn="r"/>
+            <a:pPr algn="r">
+              <a:defRPr>
+                <a:latin typeface="Roboto"/>
+              </a:defRPr>
+            </a:pPr>
             <a:r>
               <a:rPr sz="900" b="0">
                 <a:solidFill>
                   <a:srgbClr val="5F6F63"/>
                 </a:solidFill>
-                <a:latin typeface="Arial"/>
+                <a:latin typeface="Roboto"/>
               </a:rPr>
               <a:t>Slide 20 of 27</a:t>
             </a:r>
@@ -10886,7 +11867,11 @@
           <a:bodyPr rtlCol="0" anchor="ctr"/>
           <a:lstStyle/>
           <a:p>
-            <a:pPr algn="ctr"/>
+            <a:pPr algn="ctr">
+              <a:defRPr>
+                <a:latin typeface="Roboto"/>
+              </a:defRPr>
+            </a:pPr>
           </a:p>
         </p:txBody>
       </p:sp>
@@ -10912,12 +11897,17 @@
           </a:bodyPr>
           <a:lstStyle/>
           <a:p>
+            <a:pPr>
+              <a:defRPr>
+                <a:latin typeface="Roboto"/>
+              </a:defRPr>
+            </a:pPr>
             <a:r>
               <a:rPr sz="1000" b="0">
                 <a:solidFill>
                   <a:srgbClr val="5F6F63"/>
                 </a:solidFill>
-                <a:latin typeface="Arial"/>
+                <a:latin typeface="Roboto"/>
               </a:rPr>
               <a:t>SME sample businesses · Which products and services are growing?</a:t>
             </a:r>
@@ -10946,12 +11936,17 @@
           </a:bodyPr>
           <a:lstStyle/>
           <a:p>
+            <a:pPr>
+              <a:defRPr>
+                <a:latin typeface="Roboto"/>
+              </a:defRPr>
+            </a:pPr>
             <a:r>
               <a:rPr sz="2400" b="1">
                 <a:solidFill>
                   <a:srgbClr val="25342A"/>
                 </a:solidFill>
-                <a:latin typeface="Arial"/>
+                <a:latin typeface="Roboto"/>
               </a:rPr>
               <a:t>Headline numbers · Services · Type of work: Retainers</a:t>
             </a:r>
@@ -10999,7 +11994,11 @@
           <a:bodyPr rtlCol="0" anchor="ctr"/>
           <a:lstStyle/>
           <a:p>
-            <a:pPr algn="ctr"/>
+            <a:pPr algn="ctr">
+              <a:defRPr>
+                <a:latin typeface="Roboto"/>
+              </a:defRPr>
+            </a:pPr>
           </a:p>
         </p:txBody>
       </p:sp>
@@ -11025,12 +12024,17 @@
           </a:bodyPr>
           <a:lstStyle/>
           <a:p>
+            <a:pPr>
+              <a:defRPr>
+                <a:latin typeface="Roboto"/>
+              </a:defRPr>
+            </a:pPr>
             <a:r>
               <a:rPr sz="1200" b="0">
                 <a:solidFill>
                   <a:srgbClr val="5F6F63"/>
                 </a:solidFill>
-                <a:latin typeface="Arial"/>
+                <a:latin typeface="Roboto"/>
               </a:rPr>
               <a:t>October against October last year</a:t>
             </a:r>
@@ -11059,12 +12063,17 @@
           </a:bodyPr>
           <a:lstStyle/>
           <a:p>
+            <a:pPr>
+              <a:defRPr>
+                <a:latin typeface="Roboto"/>
+              </a:defRPr>
+            </a:pPr>
             <a:r>
               <a:rPr sz="3000" b="1">
                 <a:solidFill>
                   <a:srgbClr val="2F7A5D"/>
                 </a:solidFill>
-                <a:latin typeface="Arial"/>
+                <a:latin typeface="Roboto"/>
               </a:rPr>
               <a:t>8.7%</a:t>
             </a:r>
@@ -11093,12 +12102,17 @@
           </a:bodyPr>
           <a:lstStyle/>
           <a:p>
+            <a:pPr>
+              <a:defRPr>
+                <a:latin typeface="Roboto"/>
+              </a:defRPr>
+            </a:pPr>
             <a:r>
               <a:rPr sz="1100" b="0">
                 <a:solidFill>
                   <a:srgbClr val="5F6F63"/>
                 </a:solidFill>
-                <a:latin typeface="Arial"/>
+                <a:latin typeface="Roboto"/>
               </a:rPr>
               <a:t>$16,300 against $15,000</a:t>
             </a:r>
@@ -11146,7 +12160,11 @@
           <a:bodyPr rtlCol="0" anchor="ctr"/>
           <a:lstStyle/>
           <a:p>
-            <a:pPr algn="ctr"/>
+            <a:pPr algn="ctr">
+              <a:defRPr>
+                <a:latin typeface="Roboto"/>
+              </a:defRPr>
+            </a:pPr>
           </a:p>
         </p:txBody>
       </p:sp>
@@ -11172,12 +12190,17 @@
           </a:bodyPr>
           <a:lstStyle/>
           <a:p>
+            <a:pPr>
+              <a:defRPr>
+                <a:latin typeface="Roboto"/>
+              </a:defRPr>
+            </a:pPr>
             <a:r>
               <a:rPr sz="1200" b="0">
                 <a:solidFill>
                   <a:srgbClr val="5F6F63"/>
                 </a:solidFill>
-                <a:latin typeface="Arial"/>
+                <a:latin typeface="Roboto"/>
               </a:rPr>
               <a:t>Year to date (Jul to Oct 2025)</a:t>
             </a:r>
@@ -11206,12 +12229,17 @@
           </a:bodyPr>
           <a:lstStyle/>
           <a:p>
+            <a:pPr>
+              <a:defRPr>
+                <a:latin typeface="Roboto"/>
+              </a:defRPr>
+            </a:pPr>
             <a:r>
               <a:rPr sz="3000" b="1">
                 <a:solidFill>
                   <a:srgbClr val="2F7A5D"/>
                 </a:solidFill>
-                <a:latin typeface="Arial"/>
+                <a:latin typeface="Roboto"/>
               </a:rPr>
               <a:t>$65,200</a:t>
             </a:r>
@@ -11240,12 +12268,17 @@
           </a:bodyPr>
           <a:lstStyle/>
           <a:p>
+            <a:pPr>
+              <a:defRPr>
+                <a:latin typeface="Roboto"/>
+              </a:defRPr>
+            </a:pPr>
             <a:r>
               <a:rPr sz="1100" b="0">
                 <a:solidFill>
                   <a:srgbClr val="5F6F63"/>
                 </a:solidFill>
-                <a:latin typeface="Arial"/>
+                <a:latin typeface="Roboto"/>
               </a:rPr>
               <a:t>same period last year: not in the data</a:t>
             </a:r>
@@ -11293,7 +12326,11 @@
           <a:bodyPr rtlCol="0" anchor="ctr"/>
           <a:lstStyle/>
           <a:p>
-            <a:pPr algn="ctr"/>
+            <a:pPr algn="ctr">
+              <a:defRPr>
+                <a:latin typeface="Roboto"/>
+              </a:defRPr>
+            </a:pPr>
           </a:p>
         </p:txBody>
       </p:sp>
@@ -11319,12 +12356,17 @@
           </a:bodyPr>
           <a:lstStyle/>
           <a:p>
+            <a:pPr>
+              <a:defRPr>
+                <a:latin typeface="Roboto"/>
+              </a:defRPr>
+            </a:pPr>
             <a:r>
               <a:rPr sz="1200" b="0">
                 <a:solidFill>
                   <a:srgbClr val="5F6F63"/>
                 </a:solidFill>
-                <a:latin typeface="Arial"/>
+                <a:latin typeface="Roboto"/>
               </a:rPr>
               <a:t>Gross margin, year to date</a:t>
             </a:r>
@@ -11353,12 +12395,17 @@
           </a:bodyPr>
           <a:lstStyle/>
           <a:p>
+            <a:pPr>
+              <a:defRPr>
+                <a:latin typeface="Roboto"/>
+              </a:defRPr>
+            </a:pPr>
             <a:r>
               <a:rPr sz="3000" b="1">
                 <a:solidFill>
                   <a:srgbClr val="2F7A5D"/>
                 </a:solidFill>
-                <a:latin typeface="Arial"/>
+                <a:latin typeface="Roboto"/>
               </a:rPr>
               <a:t>65.1%</a:t>
             </a:r>
@@ -11387,12 +12434,17 @@
           </a:bodyPr>
           <a:lstStyle/>
           <a:p>
+            <a:pPr>
+              <a:defRPr>
+                <a:latin typeface="Roboto"/>
+              </a:defRPr>
+            </a:pPr>
             <a:r>
               <a:rPr sz="1100" b="0">
                 <a:solidFill>
                   <a:srgbClr val="5F6F63"/>
                 </a:solidFill>
-                <a:latin typeface="Arial"/>
+                <a:latin typeface="Roboto"/>
               </a:rPr>
               <a:t>$42,460 before overheads</a:t>
             </a:r>
@@ -11421,12 +12473,17 @@
           </a:bodyPr>
           <a:lstStyle/>
           <a:p>
+            <a:pPr>
+              <a:defRPr>
+                <a:latin typeface="Roboto"/>
+              </a:defRPr>
+            </a:pPr>
             <a:r>
               <a:rPr sz="900" b="0">
                 <a:solidFill>
                   <a:srgbClr val="5F6F63"/>
                 </a:solidFill>
-                <a:latin typeface="Arial"/>
+                <a:latin typeface="Roboto"/>
               </a:rPr>
               <a:t>growth.pptx</a:t>
             </a:r>
@@ -11455,13 +12512,17 @@
           </a:bodyPr>
           <a:lstStyle/>
           <a:p>
-            <a:pPr algn="ctr"/>
+            <a:pPr algn="ctr">
+              <a:defRPr>
+                <a:latin typeface="Roboto"/>
+              </a:defRPr>
+            </a:pPr>
             <a:r>
               <a:rPr sz="900" b="0">
                 <a:solidFill>
                   <a:srgbClr val="5F6F63"/>
                 </a:solidFill>
-                <a:latin typeface="Arial"/>
+                <a:latin typeface="Roboto"/>
               </a:rPr>
               <a:t>Data retrieved 2pm, Tue 6 Oct 2026 · Sample data</a:t>
             </a:r>
@@ -11490,13 +12551,17 @@
           </a:bodyPr>
           <a:lstStyle/>
           <a:p>
-            <a:pPr algn="r"/>
+            <a:pPr algn="r">
+              <a:defRPr>
+                <a:latin typeface="Roboto"/>
+              </a:defRPr>
+            </a:pPr>
             <a:r>
               <a:rPr sz="900" b="0">
                 <a:solidFill>
                   <a:srgbClr val="5F6F63"/>
                 </a:solidFill>
-                <a:latin typeface="Arial"/>
+                <a:latin typeface="Roboto"/>
               </a:rPr>
               <a:t>Slide 21 of 27</a:t>
             </a:r>
@@ -11560,7 +12625,11 @@
           <a:bodyPr rtlCol="0" anchor="ctr"/>
           <a:lstStyle/>
           <a:p>
-            <a:pPr algn="ctr"/>
+            <a:pPr algn="ctr">
+              <a:defRPr>
+                <a:latin typeface="Roboto"/>
+              </a:defRPr>
+            </a:pPr>
           </a:p>
         </p:txBody>
       </p:sp>
@@ -11586,12 +12655,17 @@
           </a:bodyPr>
           <a:lstStyle/>
           <a:p>
+            <a:pPr>
+              <a:defRPr>
+                <a:latin typeface="Roboto"/>
+              </a:defRPr>
+            </a:pPr>
             <a:r>
               <a:rPr sz="1000" b="0">
                 <a:solidFill>
                   <a:srgbClr val="5F6F63"/>
                 </a:solidFill>
-                <a:latin typeface="Arial"/>
+                <a:latin typeface="Roboto"/>
               </a:rPr>
               <a:t>SME sample businesses · Which products and services are growing?</a:t>
             </a:r>
@@ -11620,12 +12694,17 @@
           </a:bodyPr>
           <a:lstStyle/>
           <a:p>
+            <a:pPr>
+              <a:defRPr>
+                <a:latin typeface="Roboto"/>
+              </a:defRPr>
+            </a:pPr>
             <a:r>
               <a:rPr sz="2400" b="1">
                 <a:solidFill>
                   <a:srgbClr val="25342A"/>
                 </a:solidFill>
-                <a:latin typeface="Arial"/>
+                <a:latin typeface="Roboto"/>
               </a:rPr>
               <a:t>What it shows · Services · Type of work: Retainers</a:t>
             </a:r>
@@ -11673,7 +12752,11 @@
           <a:bodyPr rtlCol="0" anchor="ctr"/>
           <a:lstStyle/>
           <a:p>
-            <a:pPr algn="ctr"/>
+            <a:pPr algn="ctr">
+              <a:defRPr>
+                <a:latin typeface="Roboto"/>
+              </a:defRPr>
+            </a:pPr>
           </a:p>
         </p:txBody>
       </p:sp>
@@ -11699,12 +12782,17 @@
           </a:bodyPr>
           <a:lstStyle/>
           <a:p>
+            <a:pPr>
+              <a:defRPr>
+                <a:latin typeface="Roboto"/>
+              </a:defRPr>
+            </a:pPr>
             <a:r>
               <a:rPr sz="1100" b="1">
                 <a:solidFill>
                   <a:srgbClr val="5F6F63"/>
                 </a:solidFill>
-                <a:latin typeface="Arial"/>
+                <a:latin typeface="Roboto"/>
               </a:rPr>
               <a:t>WHAT IT SHOWS</a:t>
             </a:r>
@@ -11733,12 +12821,17 @@
           </a:bodyPr>
           <a:lstStyle/>
           <a:p>
+            <a:pPr>
+              <a:defRPr>
+                <a:latin typeface="Roboto"/>
+              </a:defRPr>
+            </a:pPr>
             <a:r>
               <a:rPr sz="1600" b="0">
                 <a:solidFill>
                   <a:srgbClr val="25342A"/>
                 </a:solidFill>
-                <a:latin typeface="Arial"/>
+                <a:latin typeface="Roboto"/>
               </a:rPr>
               <a:t>Retainers brought in $65,200 this financial year to date, at a 65.1% gross margin (above the 64.1% overall).</a:t>
             </a:r>
@@ -11786,7 +12879,11 @@
           <a:bodyPr rtlCol="0" anchor="ctr"/>
           <a:lstStyle/>
           <a:p>
-            <a:pPr algn="ctr"/>
+            <a:pPr algn="ctr">
+              <a:defRPr>
+                <a:latin typeface="Roboto"/>
+              </a:defRPr>
+            </a:pPr>
           </a:p>
         </p:txBody>
       </p:sp>
@@ -11812,12 +12909,17 @@
           </a:bodyPr>
           <a:lstStyle/>
           <a:p>
+            <a:pPr>
+              <a:defRPr>
+                <a:latin typeface="Roboto"/>
+              </a:defRPr>
+            </a:pPr>
             <a:r>
               <a:rPr sz="1100" b="1">
                 <a:solidFill>
                   <a:srgbClr val="5F6F63"/>
                 </a:solidFill>
-                <a:latin typeface="Arial"/>
+                <a:latin typeface="Roboto"/>
               </a:rPr>
               <a:t>WHAT YOU'D DO ABOUT IT</a:t>
             </a:r>
@@ -11846,12 +12948,17 @@
           </a:bodyPr>
           <a:lstStyle/>
           <a:p>
+            <a:pPr>
+              <a:defRPr>
+                <a:latin typeface="Roboto"/>
+              </a:defRPr>
+            </a:pPr>
             <a:r>
               <a:rPr sz="1600" b="0">
                 <a:solidFill>
                   <a:srgbClr val="25342A"/>
                 </a:solidFill>
-                <a:latin typeface="Arial"/>
+                <a:latin typeface="Roboto"/>
               </a:rPr>
               <a:t>Retainers: 65.1% gross margin, below the 93.3% needed to cover overheads.</a:t>
             </a:r>
@@ -11880,12 +12987,17 @@
           </a:bodyPr>
           <a:lstStyle/>
           <a:p>
+            <a:pPr>
+              <a:defRPr>
+                <a:latin typeface="Roboto"/>
+              </a:defRPr>
+            </a:pPr>
             <a:r>
               <a:rPr sz="900" b="0">
                 <a:solidFill>
                   <a:srgbClr val="5F6F63"/>
                 </a:solidFill>
-                <a:latin typeface="Arial"/>
+                <a:latin typeface="Roboto"/>
               </a:rPr>
               <a:t>growth.pptx</a:t>
             </a:r>
@@ -11914,13 +13026,17 @@
           </a:bodyPr>
           <a:lstStyle/>
           <a:p>
-            <a:pPr algn="ctr"/>
+            <a:pPr algn="ctr">
+              <a:defRPr>
+                <a:latin typeface="Roboto"/>
+              </a:defRPr>
+            </a:pPr>
             <a:r>
               <a:rPr sz="900" b="0">
                 <a:solidFill>
                   <a:srgbClr val="5F6F63"/>
                 </a:solidFill>
-                <a:latin typeface="Arial"/>
+                <a:latin typeface="Roboto"/>
               </a:rPr>
               <a:t>Data retrieved 2pm, Tue 6 Oct 2026 · Sample data</a:t>
             </a:r>
@@ -11949,13 +13065,17 @@
           </a:bodyPr>
           <a:lstStyle/>
           <a:p>
-            <a:pPr algn="r"/>
+            <a:pPr algn="r">
+              <a:defRPr>
+                <a:latin typeface="Roboto"/>
+              </a:defRPr>
+            </a:pPr>
             <a:r>
               <a:rPr sz="900" b="0">
                 <a:solidFill>
                   <a:srgbClr val="5F6F63"/>
                 </a:solidFill>
-                <a:latin typeface="Arial"/>
+                <a:latin typeface="Roboto"/>
               </a:rPr>
               <a:t>Slide 22 of 27</a:t>
             </a:r>
@@ -12019,7 +13139,11 @@
           <a:bodyPr rtlCol="0" anchor="ctr"/>
           <a:lstStyle/>
           <a:p>
-            <a:pPr algn="ctr"/>
+            <a:pPr algn="ctr">
+              <a:defRPr>
+                <a:latin typeface="Roboto"/>
+              </a:defRPr>
+            </a:pPr>
           </a:p>
         </p:txBody>
       </p:sp>
@@ -12045,12 +13169,17 @@
           </a:bodyPr>
           <a:lstStyle/>
           <a:p>
+            <a:pPr>
+              <a:defRPr>
+                <a:latin typeface="Roboto"/>
+              </a:defRPr>
+            </a:pPr>
             <a:r>
               <a:rPr sz="1000" b="0">
                 <a:solidFill>
                   <a:srgbClr val="5F6F63"/>
                 </a:solidFill>
-                <a:latin typeface="Arial"/>
+                <a:latin typeface="Roboto"/>
               </a:rPr>
               <a:t>SME sample businesses · Which products and services are growing?</a:t>
             </a:r>
@@ -12079,12 +13208,17 @@
           </a:bodyPr>
           <a:lstStyle/>
           <a:p>
+            <a:pPr>
+              <a:defRPr>
+                <a:latin typeface="Roboto"/>
+              </a:defRPr>
+            </a:pPr>
             <a:r>
               <a:rPr sz="2400" b="1">
                 <a:solidFill>
                   <a:srgbClr val="25342A"/>
                 </a:solidFill>
-                <a:latin typeface="Arial"/>
+                <a:latin typeface="Roboto"/>
               </a:rPr>
               <a:t>Headline numbers · Services · Type of work: Training</a:t>
             </a:r>
@@ -12132,7 +13266,11 @@
           <a:bodyPr rtlCol="0" anchor="ctr"/>
           <a:lstStyle/>
           <a:p>
-            <a:pPr algn="ctr"/>
+            <a:pPr algn="ctr">
+              <a:defRPr>
+                <a:latin typeface="Roboto"/>
+              </a:defRPr>
+            </a:pPr>
           </a:p>
         </p:txBody>
       </p:sp>
@@ -12158,12 +13296,17 @@
           </a:bodyPr>
           <a:lstStyle/>
           <a:p>
+            <a:pPr>
+              <a:defRPr>
+                <a:latin typeface="Roboto"/>
+              </a:defRPr>
+            </a:pPr>
             <a:r>
               <a:rPr sz="1200" b="0">
                 <a:solidFill>
                   <a:srgbClr val="5F6F63"/>
                 </a:solidFill>
-                <a:latin typeface="Arial"/>
+                <a:latin typeface="Roboto"/>
               </a:rPr>
               <a:t>October against October last year</a:t>
             </a:r>
@@ -12192,12 +13335,17 @@
           </a:bodyPr>
           <a:lstStyle/>
           <a:p>
+            <a:pPr>
+              <a:defRPr>
+                <a:latin typeface="Roboto"/>
+              </a:defRPr>
+            </a:pPr>
             <a:r>
               <a:rPr sz="3000" b="1">
                 <a:solidFill>
                   <a:srgbClr val="2F7A5D"/>
                 </a:solidFill>
-                <a:latin typeface="Arial"/>
+                <a:latin typeface="Roboto"/>
               </a:rPr>
               <a:t>3.4%</a:t>
             </a:r>
@@ -12226,12 +13374,17 @@
           </a:bodyPr>
           <a:lstStyle/>
           <a:p>
+            <a:pPr>
+              <a:defRPr>
+                <a:latin typeface="Roboto"/>
+              </a:defRPr>
+            </a:pPr>
             <a:r>
               <a:rPr sz="1100" b="0">
                 <a:solidFill>
                   <a:srgbClr val="5F6F63"/>
                 </a:solidFill>
-                <a:latin typeface="Arial"/>
+                <a:latin typeface="Roboto"/>
               </a:rPr>
               <a:t>$9,100 against $8,800</a:t>
             </a:r>
@@ -12279,7 +13432,11 @@
           <a:bodyPr rtlCol="0" anchor="ctr"/>
           <a:lstStyle/>
           <a:p>
-            <a:pPr algn="ctr"/>
+            <a:pPr algn="ctr">
+              <a:defRPr>
+                <a:latin typeface="Roboto"/>
+              </a:defRPr>
+            </a:pPr>
           </a:p>
         </p:txBody>
       </p:sp>
@@ -12305,12 +13462,17 @@
           </a:bodyPr>
           <a:lstStyle/>
           <a:p>
+            <a:pPr>
+              <a:defRPr>
+                <a:latin typeface="Roboto"/>
+              </a:defRPr>
+            </a:pPr>
             <a:r>
               <a:rPr sz="1200" b="0">
                 <a:solidFill>
                   <a:srgbClr val="5F6F63"/>
                 </a:solidFill>
-                <a:latin typeface="Arial"/>
+                <a:latin typeface="Roboto"/>
               </a:rPr>
               <a:t>Year to date (Jul to Oct 2025)</a:t>
             </a:r>
@@ -12339,12 +13501,17 @@
           </a:bodyPr>
           <a:lstStyle/>
           <a:p>
+            <a:pPr>
+              <a:defRPr>
+                <a:latin typeface="Roboto"/>
+              </a:defRPr>
+            </a:pPr>
             <a:r>
               <a:rPr sz="3000" b="1">
                 <a:solidFill>
                   <a:srgbClr val="2F7A5D"/>
                 </a:solidFill>
-                <a:latin typeface="Arial"/>
+                <a:latin typeface="Roboto"/>
               </a:rPr>
               <a:t>$25,900</a:t>
             </a:r>
@@ -12373,12 +13540,17 @@
           </a:bodyPr>
           <a:lstStyle/>
           <a:p>
+            <a:pPr>
+              <a:defRPr>
+                <a:latin typeface="Roboto"/>
+              </a:defRPr>
+            </a:pPr>
             <a:r>
               <a:rPr sz="1100" b="0">
                 <a:solidFill>
                   <a:srgbClr val="5F6F63"/>
                 </a:solidFill>
-                <a:latin typeface="Arial"/>
+                <a:latin typeface="Roboto"/>
               </a:rPr>
               <a:t>same period last year: not in the data</a:t>
             </a:r>
@@ -12426,7 +13598,11 @@
           <a:bodyPr rtlCol="0" anchor="ctr"/>
           <a:lstStyle/>
           <a:p>
-            <a:pPr algn="ctr"/>
+            <a:pPr algn="ctr">
+              <a:defRPr>
+                <a:latin typeface="Roboto"/>
+              </a:defRPr>
+            </a:pPr>
           </a:p>
         </p:txBody>
       </p:sp>
@@ -12452,12 +13628,17 @@
           </a:bodyPr>
           <a:lstStyle/>
           <a:p>
+            <a:pPr>
+              <a:defRPr>
+                <a:latin typeface="Roboto"/>
+              </a:defRPr>
+            </a:pPr>
             <a:r>
               <a:rPr sz="1200" b="0">
                 <a:solidFill>
                   <a:srgbClr val="5F6F63"/>
                 </a:solidFill>
-                <a:latin typeface="Arial"/>
+                <a:latin typeface="Roboto"/>
               </a:rPr>
               <a:t>Gross margin, year to date</a:t>
             </a:r>
@@ -12486,12 +13667,17 @@
           </a:bodyPr>
           <a:lstStyle/>
           <a:p>
+            <a:pPr>
+              <a:defRPr>
+                <a:latin typeface="Roboto"/>
+              </a:defRPr>
+            </a:pPr>
             <a:r>
               <a:rPr sz="3000" b="1">
                 <a:solidFill>
                   <a:srgbClr val="2F7A5D"/>
                 </a:solidFill>
-                <a:latin typeface="Arial"/>
+                <a:latin typeface="Roboto"/>
               </a:rPr>
               <a:t>78.0%</a:t>
             </a:r>
@@ -12520,12 +13706,17 @@
           </a:bodyPr>
           <a:lstStyle/>
           <a:p>
+            <a:pPr>
+              <a:defRPr>
+                <a:latin typeface="Roboto"/>
+              </a:defRPr>
+            </a:pPr>
             <a:r>
               <a:rPr sz="1100" b="0">
                 <a:solidFill>
                   <a:srgbClr val="5F6F63"/>
                 </a:solidFill>
-                <a:latin typeface="Arial"/>
+                <a:latin typeface="Roboto"/>
               </a:rPr>
               <a:t>$20,200 before overheads</a:t>
             </a:r>
@@ -12554,12 +13745,17 @@
           </a:bodyPr>
           <a:lstStyle/>
           <a:p>
+            <a:pPr>
+              <a:defRPr>
+                <a:latin typeface="Roboto"/>
+              </a:defRPr>
+            </a:pPr>
             <a:r>
               <a:rPr sz="900" b="0">
                 <a:solidFill>
                   <a:srgbClr val="5F6F63"/>
                 </a:solidFill>
-                <a:latin typeface="Arial"/>
+                <a:latin typeface="Roboto"/>
               </a:rPr>
               <a:t>growth.pptx</a:t>
             </a:r>
@@ -12588,13 +13784,17 @@
           </a:bodyPr>
           <a:lstStyle/>
           <a:p>
-            <a:pPr algn="ctr"/>
+            <a:pPr algn="ctr">
+              <a:defRPr>
+                <a:latin typeface="Roboto"/>
+              </a:defRPr>
+            </a:pPr>
             <a:r>
               <a:rPr sz="900" b="0">
                 <a:solidFill>
                   <a:srgbClr val="5F6F63"/>
                 </a:solidFill>
-                <a:latin typeface="Arial"/>
+                <a:latin typeface="Roboto"/>
               </a:rPr>
               <a:t>Data retrieved 2pm, Tue 6 Oct 2026 · Sample data</a:t>
             </a:r>
@@ -12623,13 +13823,17 @@
           </a:bodyPr>
           <a:lstStyle/>
           <a:p>
-            <a:pPr algn="r"/>
+            <a:pPr algn="r">
+              <a:defRPr>
+                <a:latin typeface="Roboto"/>
+              </a:defRPr>
+            </a:pPr>
             <a:r>
               <a:rPr sz="900" b="0">
                 <a:solidFill>
                   <a:srgbClr val="5F6F63"/>
                 </a:solidFill>
-                <a:latin typeface="Arial"/>
+                <a:latin typeface="Roboto"/>
               </a:rPr>
               <a:t>Slide 23 of 27</a:t>
             </a:r>
@@ -12693,7 +13897,11 @@
           <a:bodyPr rtlCol="0" anchor="ctr"/>
           <a:lstStyle/>
           <a:p>
-            <a:pPr algn="ctr"/>
+            <a:pPr algn="ctr">
+              <a:defRPr>
+                <a:latin typeface="Roboto"/>
+              </a:defRPr>
+            </a:pPr>
           </a:p>
         </p:txBody>
       </p:sp>
@@ -12719,12 +13927,17 @@
           </a:bodyPr>
           <a:lstStyle/>
           <a:p>
+            <a:pPr>
+              <a:defRPr>
+                <a:latin typeface="Roboto"/>
+              </a:defRPr>
+            </a:pPr>
             <a:r>
               <a:rPr sz="1000" b="0">
                 <a:solidFill>
                   <a:srgbClr val="5F6F63"/>
                 </a:solidFill>
-                <a:latin typeface="Arial"/>
+                <a:latin typeface="Roboto"/>
               </a:rPr>
               <a:t>SME sample businesses · Which products and services are growing?</a:t>
             </a:r>
@@ -12753,12 +13966,17 @@
           </a:bodyPr>
           <a:lstStyle/>
           <a:p>
+            <a:pPr>
+              <a:defRPr>
+                <a:latin typeface="Roboto"/>
+              </a:defRPr>
+            </a:pPr>
             <a:r>
               <a:rPr sz="2400" b="1">
                 <a:solidFill>
                   <a:srgbClr val="25342A"/>
                 </a:solidFill>
-                <a:latin typeface="Arial"/>
+                <a:latin typeface="Roboto"/>
               </a:rPr>
               <a:t>What it shows · Services · Type of work: Training</a:t>
             </a:r>
@@ -12806,7 +14024,11 @@
           <a:bodyPr rtlCol="0" anchor="ctr"/>
           <a:lstStyle/>
           <a:p>
-            <a:pPr algn="ctr"/>
+            <a:pPr algn="ctr">
+              <a:defRPr>
+                <a:latin typeface="Roboto"/>
+              </a:defRPr>
+            </a:pPr>
           </a:p>
         </p:txBody>
       </p:sp>
@@ -12832,12 +14054,17 @@
           </a:bodyPr>
           <a:lstStyle/>
           <a:p>
+            <a:pPr>
+              <a:defRPr>
+                <a:latin typeface="Roboto"/>
+              </a:defRPr>
+            </a:pPr>
             <a:r>
               <a:rPr sz="1100" b="1">
                 <a:solidFill>
                   <a:srgbClr val="5F6F63"/>
                 </a:solidFill>
-                <a:latin typeface="Arial"/>
+                <a:latin typeface="Roboto"/>
               </a:rPr>
               <a:t>WHAT IT SHOWS</a:t>
             </a:r>
@@ -12866,12 +14093,17 @@
           </a:bodyPr>
           <a:lstStyle/>
           <a:p>
+            <a:pPr>
+              <a:defRPr>
+                <a:latin typeface="Roboto"/>
+              </a:defRPr>
+            </a:pPr>
             <a:r>
               <a:rPr sz="1600" b="0">
                 <a:solidFill>
                   <a:srgbClr val="25342A"/>
                 </a:solidFill>
-                <a:latin typeface="Arial"/>
+                <a:latin typeface="Roboto"/>
               </a:rPr>
               <a:t>Training brought in $25,900 this financial year to date, at a 78.0% gross margin (above the 64.1% overall).</a:t>
             </a:r>
@@ -12919,7 +14151,11 @@
           <a:bodyPr rtlCol="0" anchor="ctr"/>
           <a:lstStyle/>
           <a:p>
-            <a:pPr algn="ctr"/>
+            <a:pPr algn="ctr">
+              <a:defRPr>
+                <a:latin typeface="Roboto"/>
+              </a:defRPr>
+            </a:pPr>
           </a:p>
         </p:txBody>
       </p:sp>
@@ -12945,12 +14181,17 @@
           </a:bodyPr>
           <a:lstStyle/>
           <a:p>
+            <a:pPr>
+              <a:defRPr>
+                <a:latin typeface="Roboto"/>
+              </a:defRPr>
+            </a:pPr>
             <a:r>
               <a:rPr sz="1100" b="1">
                 <a:solidFill>
                   <a:srgbClr val="5F6F63"/>
                 </a:solidFill>
-                <a:latin typeface="Arial"/>
+                <a:latin typeface="Roboto"/>
               </a:rPr>
               <a:t>WHAT YOU'D DO ABOUT IT</a:t>
             </a:r>
@@ -12979,12 +14220,17 @@
           </a:bodyPr>
           <a:lstStyle/>
           <a:p>
+            <a:pPr>
+              <a:defRPr>
+                <a:latin typeface="Roboto"/>
+              </a:defRPr>
+            </a:pPr>
             <a:r>
               <a:rPr sz="1600" b="0">
                 <a:solidFill>
                   <a:srgbClr val="25342A"/>
                 </a:solidFill>
-                <a:latin typeface="Arial"/>
+                <a:latin typeface="Roboto"/>
               </a:rPr>
               <a:t>Training: 78.0% gross margin, below the 93.3% needed to cover overheads.</a:t>
             </a:r>
@@ -13013,12 +14259,17 @@
           </a:bodyPr>
           <a:lstStyle/>
           <a:p>
+            <a:pPr>
+              <a:defRPr>
+                <a:latin typeface="Roboto"/>
+              </a:defRPr>
+            </a:pPr>
             <a:r>
               <a:rPr sz="900" b="0">
                 <a:solidFill>
                   <a:srgbClr val="5F6F63"/>
                 </a:solidFill>
-                <a:latin typeface="Arial"/>
+                <a:latin typeface="Roboto"/>
               </a:rPr>
               <a:t>growth.pptx</a:t>
             </a:r>
@@ -13047,13 +14298,17 @@
           </a:bodyPr>
           <a:lstStyle/>
           <a:p>
-            <a:pPr algn="ctr"/>
+            <a:pPr algn="ctr">
+              <a:defRPr>
+                <a:latin typeface="Roboto"/>
+              </a:defRPr>
+            </a:pPr>
             <a:r>
               <a:rPr sz="900" b="0">
                 <a:solidFill>
                   <a:srgbClr val="5F6F63"/>
                 </a:solidFill>
-                <a:latin typeface="Arial"/>
+                <a:latin typeface="Roboto"/>
               </a:rPr>
               <a:t>Data retrieved 2pm, Tue 6 Oct 2026 · Sample data</a:t>
             </a:r>
@@ -13082,13 +14337,17 @@
           </a:bodyPr>
           <a:lstStyle/>
           <a:p>
-            <a:pPr algn="r"/>
+            <a:pPr algn="r">
+              <a:defRPr>
+                <a:latin typeface="Roboto"/>
+              </a:defRPr>
+            </a:pPr>
             <a:r>
               <a:rPr sz="900" b="0">
                 <a:solidFill>
                   <a:srgbClr val="5F6F63"/>
                 </a:solidFill>
-                <a:latin typeface="Arial"/>
+                <a:latin typeface="Roboto"/>
               </a:rPr>
               <a:t>Slide 24 of 27</a:t>
             </a:r>
@@ -13152,7 +14411,11 @@
           <a:bodyPr rtlCol="0" anchor="ctr"/>
           <a:lstStyle/>
           <a:p>
-            <a:pPr algn="ctr"/>
+            <a:pPr algn="ctr">
+              <a:defRPr>
+                <a:latin typeface="Roboto"/>
+              </a:defRPr>
+            </a:pPr>
           </a:p>
         </p:txBody>
       </p:sp>
@@ -13178,12 +14441,17 @@
           </a:bodyPr>
           <a:lstStyle/>
           <a:p>
+            <a:pPr>
+              <a:defRPr>
+                <a:latin typeface="Roboto"/>
+              </a:defRPr>
+            </a:pPr>
             <a:r>
               <a:rPr sz="1000" b="0">
                 <a:solidFill>
                   <a:srgbClr val="5F6F63"/>
                 </a:solidFill>
-                <a:latin typeface="Arial"/>
+                <a:latin typeface="Roboto"/>
               </a:rPr>
               <a:t>SME sample businesses · Which products and services are growing?</a:t>
             </a:r>
@@ -13212,12 +14480,17 @@
           </a:bodyPr>
           <a:lstStyle/>
           <a:p>
+            <a:pPr>
+              <a:defRPr>
+                <a:latin typeface="Roboto"/>
+              </a:defRPr>
+            </a:pPr>
             <a:r>
               <a:rPr sz="2400" b="1">
                 <a:solidFill>
                   <a:srgbClr val="25342A"/>
                 </a:solidFill>
-                <a:latin typeface="Arial"/>
+                <a:latin typeface="Roboto"/>
               </a:rPr>
               <a:t>Revenue, gross margin and growth by type of work, by month · Revenue $ · Services · Every type of work at once</a:t>
             </a:r>
@@ -13246,12 +14519,17 @@
           </a:bodyPr>
           <a:lstStyle/>
           <a:p>
+            <a:pPr>
+              <a:defRPr>
+                <a:latin typeface="Roboto"/>
+              </a:defRPr>
+            </a:pPr>
             <a:r>
               <a:rPr sz="1200" b="0">
                 <a:solidFill>
                   <a:srgbClr val="5F6F63"/>
                 </a:solidFill>
-                <a:latin typeface="Arial"/>
+                <a:latin typeface="Roboto"/>
               </a:rPr>
               <a:t>Gross margin = revenue less direct cost (materials, subcontractors and time at cost for trades; contractors and consultant time for services), before overheads. Growth is year on year: each month against the same month a year earlier.</a:t>
             </a:r>
@@ -13298,12 +14576,17 @@
           </a:bodyPr>
           <a:lstStyle/>
           <a:p>
+            <a:pPr>
+              <a:defRPr>
+                <a:latin typeface="Roboto"/>
+              </a:defRPr>
+            </a:pPr>
             <a:r>
               <a:rPr sz="900" b="0">
                 <a:solidFill>
                   <a:srgbClr val="5F6F63"/>
                 </a:solidFill>
-                <a:latin typeface="Arial"/>
+                <a:latin typeface="Roboto"/>
               </a:rPr>
               <a:t>growth.pptx</a:t>
             </a:r>
@@ -13332,13 +14615,17 @@
           </a:bodyPr>
           <a:lstStyle/>
           <a:p>
-            <a:pPr algn="ctr"/>
+            <a:pPr algn="ctr">
+              <a:defRPr>
+                <a:latin typeface="Roboto"/>
+              </a:defRPr>
+            </a:pPr>
             <a:r>
               <a:rPr sz="900" b="0">
                 <a:solidFill>
                   <a:srgbClr val="5F6F63"/>
                 </a:solidFill>
-                <a:latin typeface="Arial"/>
+                <a:latin typeface="Roboto"/>
               </a:rPr>
               <a:t>Data retrieved 2pm, Tue 6 Oct 2026 · Sample data</a:t>
             </a:r>
@@ -13367,13 +14654,17 @@
           </a:bodyPr>
           <a:lstStyle/>
           <a:p>
-            <a:pPr algn="r"/>
+            <a:pPr algn="r">
+              <a:defRPr>
+                <a:latin typeface="Roboto"/>
+              </a:defRPr>
+            </a:pPr>
             <a:r>
               <a:rPr sz="900" b="0">
                 <a:solidFill>
                   <a:srgbClr val="5F6F63"/>
                 </a:solidFill>
-                <a:latin typeface="Arial"/>
+                <a:latin typeface="Roboto"/>
               </a:rPr>
               <a:t>Slide 25 of 27</a:t>
             </a:r>
@@ -13437,7 +14728,11 @@
           <a:bodyPr rtlCol="0" anchor="ctr"/>
           <a:lstStyle/>
           <a:p>
-            <a:pPr algn="ctr"/>
+            <a:pPr algn="ctr">
+              <a:defRPr>
+                <a:latin typeface="Roboto"/>
+              </a:defRPr>
+            </a:pPr>
           </a:p>
         </p:txBody>
       </p:sp>
@@ -13463,12 +14758,17 @@
           </a:bodyPr>
           <a:lstStyle/>
           <a:p>
+            <a:pPr>
+              <a:defRPr>
+                <a:latin typeface="Roboto"/>
+              </a:defRPr>
+            </a:pPr>
             <a:r>
               <a:rPr sz="1000" b="0">
                 <a:solidFill>
                   <a:srgbClr val="5F6F63"/>
                 </a:solidFill>
-                <a:latin typeface="Arial"/>
+                <a:latin typeface="Roboto"/>
               </a:rPr>
               <a:t>SME sample businesses · Which products and services are growing?</a:t>
             </a:r>
@@ -13497,12 +14797,17 @@
           </a:bodyPr>
           <a:lstStyle/>
           <a:p>
+            <a:pPr>
+              <a:defRPr>
+                <a:latin typeface="Roboto"/>
+              </a:defRPr>
+            </a:pPr>
             <a:r>
               <a:rPr sz="2400" b="1">
                 <a:solidFill>
                   <a:srgbClr val="25342A"/>
                 </a:solidFill>
-                <a:latin typeface="Arial"/>
+                <a:latin typeface="Roboto"/>
               </a:rPr>
               <a:t>Revenue, gross margin and growth by type of work, by month · Gross margin % · Services · Every type of work at once</a:t>
             </a:r>
@@ -13531,12 +14836,17 @@
           </a:bodyPr>
           <a:lstStyle/>
           <a:p>
+            <a:pPr>
+              <a:defRPr>
+                <a:latin typeface="Roboto"/>
+              </a:defRPr>
+            </a:pPr>
             <a:r>
               <a:rPr sz="1200" b="0">
                 <a:solidFill>
                   <a:srgbClr val="5F6F63"/>
                 </a:solidFill>
-                <a:latin typeface="Arial"/>
+                <a:latin typeface="Roboto"/>
               </a:rPr>
               <a:t>Gross margin = revenue less direct cost (materials, subcontractors and time at cost for trades; contractors and consultant time for services), before overheads. Growth is year on year: each month against the same month a year earlier.</a:t>
             </a:r>
@@ -13583,12 +14893,17 @@
           </a:bodyPr>
           <a:lstStyle/>
           <a:p>
+            <a:pPr>
+              <a:defRPr>
+                <a:latin typeface="Roboto"/>
+              </a:defRPr>
+            </a:pPr>
             <a:r>
               <a:rPr sz="900" b="0">
                 <a:solidFill>
                   <a:srgbClr val="5F6F63"/>
                 </a:solidFill>
-                <a:latin typeface="Arial"/>
+                <a:latin typeface="Roboto"/>
               </a:rPr>
               <a:t>growth.pptx</a:t>
             </a:r>
@@ -13617,13 +14932,17 @@
           </a:bodyPr>
           <a:lstStyle/>
           <a:p>
-            <a:pPr algn="ctr"/>
+            <a:pPr algn="ctr">
+              <a:defRPr>
+                <a:latin typeface="Roboto"/>
+              </a:defRPr>
+            </a:pPr>
             <a:r>
               <a:rPr sz="900" b="0">
                 <a:solidFill>
                   <a:srgbClr val="5F6F63"/>
                 </a:solidFill>
-                <a:latin typeface="Arial"/>
+                <a:latin typeface="Roboto"/>
               </a:rPr>
               <a:t>Data retrieved 2pm, Tue 6 Oct 2026 · Sample data</a:t>
             </a:r>
@@ -13652,13 +14971,17 @@
           </a:bodyPr>
           <a:lstStyle/>
           <a:p>
-            <a:pPr algn="r"/>
+            <a:pPr algn="r">
+              <a:defRPr>
+                <a:latin typeface="Roboto"/>
+              </a:defRPr>
+            </a:pPr>
             <a:r>
               <a:rPr sz="900" b="0">
                 <a:solidFill>
                   <a:srgbClr val="5F6F63"/>
                 </a:solidFill>
-                <a:latin typeface="Arial"/>
+                <a:latin typeface="Roboto"/>
               </a:rPr>
               <a:t>Slide 26 of 27</a:t>
             </a:r>
@@ -13722,7 +15045,11 @@
           <a:bodyPr rtlCol="0" anchor="ctr"/>
           <a:lstStyle/>
           <a:p>
-            <a:pPr algn="ctr"/>
+            <a:pPr algn="ctr">
+              <a:defRPr>
+                <a:latin typeface="Roboto"/>
+              </a:defRPr>
+            </a:pPr>
           </a:p>
         </p:txBody>
       </p:sp>
@@ -13748,12 +15075,17 @@
           </a:bodyPr>
           <a:lstStyle/>
           <a:p>
+            <a:pPr>
+              <a:defRPr>
+                <a:latin typeface="Roboto"/>
+              </a:defRPr>
+            </a:pPr>
             <a:r>
               <a:rPr sz="1000" b="0">
                 <a:solidFill>
                   <a:srgbClr val="5F6F63"/>
                 </a:solidFill>
-                <a:latin typeface="Arial"/>
+                <a:latin typeface="Roboto"/>
               </a:rPr>
               <a:t>SME sample businesses · Which products and services are growing?</a:t>
             </a:r>
@@ -13782,12 +15114,17 @@
           </a:bodyPr>
           <a:lstStyle/>
           <a:p>
+            <a:pPr>
+              <a:defRPr>
+                <a:latin typeface="Roboto"/>
+              </a:defRPr>
+            </a:pPr>
             <a:r>
               <a:rPr sz="2400" b="1">
                 <a:solidFill>
                   <a:srgbClr val="25342A"/>
                 </a:solidFill>
-                <a:latin typeface="Arial"/>
+                <a:latin typeface="Roboto"/>
               </a:rPr>
               <a:t>By type of work: financial year to date (Jul to Oct 2025) against the same period last year · Services · Every type of work at once</a:t>
             </a:r>
@@ -13825,7 +15162,13 @@
                   <a:txBody>
                     <a:bodyPr/>
                     <a:lstStyle/>
-                    <a:p/>
+                    <a:p>
+                      <a:pPr>
+                        <a:defRPr>
+                          <a:latin typeface="Roboto"/>
+                        </a:defRPr>
+                      </a:pPr>
+                    </a:p>
                   </a:txBody>
                   <a:tcPr>
                     <a:solidFill>
@@ -13838,12 +15181,17 @@
                     <a:bodyPr/>
                     <a:lstStyle/>
                     <a:p>
-                      <a:pPr algn="r"/>
+                      <a:pPr algn="r">
+                        <a:defRPr>
+                          <a:latin typeface="Roboto"/>
+                        </a:defRPr>
+                      </a:pPr>
                       <a:r>
                         <a:rPr sz="1100" b="1">
                           <a:solidFill>
                             <a:srgbClr val="FFFFFF"/>
                           </a:solidFill>
+                          <a:latin typeface="Roboto"/>
                         </a:rPr>
                         <a:t>Year to date</a:t>
                       </a:r>
@@ -13860,12 +15208,17 @@
                     <a:bodyPr/>
                     <a:lstStyle/>
                     <a:p>
-                      <a:pPr algn="r"/>
+                      <a:pPr algn="r">
+                        <a:defRPr>
+                          <a:latin typeface="Roboto"/>
+                        </a:defRPr>
+                      </a:pPr>
                       <a:r>
                         <a:rPr sz="1100" b="1">
                           <a:solidFill>
                             <a:srgbClr val="FFFFFF"/>
                           </a:solidFill>
+                          <a:latin typeface="Roboto"/>
                         </a:rPr>
                         <a:t>Same period last year</a:t>
                       </a:r>
@@ -13882,12 +15235,17 @@
                     <a:bodyPr/>
                     <a:lstStyle/>
                     <a:p>
-                      <a:pPr algn="r"/>
+                      <a:pPr algn="r">
+                        <a:defRPr>
+                          <a:latin typeface="Roboto"/>
+                        </a:defRPr>
+                      </a:pPr>
                       <a:r>
                         <a:rPr sz="1100" b="1">
                           <a:solidFill>
                             <a:srgbClr val="FFFFFF"/>
                           </a:solidFill>
+                          <a:latin typeface="Roboto"/>
                         </a:rPr>
                         <a:t>Growth</a:t>
                       </a:r>
@@ -13904,12 +15262,17 @@
                     <a:bodyPr/>
                     <a:lstStyle/>
                     <a:p>
-                      <a:pPr algn="r"/>
+                      <a:pPr algn="r">
+                        <a:defRPr>
+                          <a:latin typeface="Roboto"/>
+                        </a:defRPr>
+                      </a:pPr>
                       <a:r>
                         <a:rPr sz="1100" b="1">
                           <a:solidFill>
                             <a:srgbClr val="FFFFFF"/>
                           </a:solidFill>
+                          <a:latin typeface="Roboto"/>
                         </a:rPr>
                         <a:t>Gross margin $</a:t>
                       </a:r>
@@ -13926,12 +15289,17 @@
                     <a:bodyPr/>
                     <a:lstStyle/>
                     <a:p>
-                      <a:pPr algn="r"/>
+                      <a:pPr algn="r">
+                        <a:defRPr>
+                          <a:latin typeface="Roboto"/>
+                        </a:defRPr>
+                      </a:pPr>
                       <a:r>
                         <a:rPr sz="1100" b="1">
                           <a:solidFill>
                             <a:srgbClr val="FFFFFF"/>
                           </a:solidFill>
+                          <a:latin typeface="Roboto"/>
                         </a:rPr>
                         <a:t>Gross margin %</a:t>
                       </a:r>
@@ -13950,11 +15318,17 @@
                     <a:bodyPr/>
                     <a:lstStyle/>
                     <a:p>
+                      <a:pPr>
+                        <a:defRPr>
+                          <a:latin typeface="Roboto"/>
+                        </a:defRPr>
+                      </a:pPr>
                       <a:r>
                         <a:rPr sz="1050">
                           <a:solidFill>
                             <a:srgbClr val="25342A"/>
                           </a:solidFill>
+                          <a:latin typeface="Roboto"/>
                         </a:rPr>
                         <a:t>Projects</a:t>
                       </a:r>
@@ -13971,12 +15345,17 @@
                     <a:bodyPr/>
                     <a:lstStyle/>
                     <a:p>
-                      <a:pPr algn="r"/>
+                      <a:pPr algn="r">
+                        <a:defRPr>
+                          <a:latin typeface="Roboto"/>
+                        </a:defRPr>
+                      </a:pPr>
                       <a:r>
                         <a:rPr sz="1050">
                           <a:solidFill>
                             <a:srgbClr val="25342A"/>
                           </a:solidFill>
+                          <a:latin typeface="Roboto"/>
                         </a:rPr>
                         <a:t>$187,490</a:t>
                       </a:r>
@@ -13993,12 +15372,17 @@
                     <a:bodyPr/>
                     <a:lstStyle/>
                     <a:p>
-                      <a:pPr algn="r"/>
+                      <a:pPr algn="r">
+                        <a:defRPr>
+                          <a:latin typeface="Roboto"/>
+                        </a:defRPr>
+                      </a:pPr>
                       <a:r>
                         <a:rPr sz="1050">
                           <a:solidFill>
                             <a:srgbClr val="25342A"/>
                           </a:solidFill>
+                          <a:latin typeface="Roboto"/>
                         </a:rPr>
                         <a:t>–</a:t>
                       </a:r>
@@ -14015,12 +15399,17 @@
                     <a:bodyPr/>
                     <a:lstStyle/>
                     <a:p>
-                      <a:pPr algn="r"/>
+                      <a:pPr algn="r">
+                        <a:defRPr>
+                          <a:latin typeface="Roboto"/>
+                        </a:defRPr>
+                      </a:pPr>
                       <a:r>
                         <a:rPr sz="1050">
                           <a:solidFill>
                             <a:srgbClr val="25342A"/>
                           </a:solidFill>
+                          <a:latin typeface="Roboto"/>
                         </a:rPr>
                         <a:t>–</a:t>
                       </a:r>
@@ -14037,12 +15426,17 @@
                     <a:bodyPr/>
                     <a:lstStyle/>
                     <a:p>
-                      <a:pPr algn="r"/>
+                      <a:pPr algn="r">
+                        <a:defRPr>
+                          <a:latin typeface="Roboto"/>
+                        </a:defRPr>
+                      </a:pPr>
                       <a:r>
                         <a:rPr sz="1050">
                           <a:solidFill>
                             <a:srgbClr val="25342A"/>
                           </a:solidFill>
+                          <a:latin typeface="Roboto"/>
                         </a:rPr>
                         <a:t>$115,930</a:t>
                       </a:r>
@@ -14059,12 +15453,17 @@
                     <a:bodyPr/>
                     <a:lstStyle/>
                     <a:p>
-                      <a:pPr algn="r"/>
+                      <a:pPr algn="r">
+                        <a:defRPr>
+                          <a:latin typeface="Roboto"/>
+                        </a:defRPr>
+                      </a:pPr>
                       <a:r>
                         <a:rPr sz="1050">
                           <a:solidFill>
                             <a:srgbClr val="25342A"/>
                           </a:solidFill>
+                          <a:latin typeface="Roboto"/>
                         </a:rPr>
                         <a:t>61.8%</a:t>
                       </a:r>
@@ -14083,11 +15482,17 @@
                     <a:bodyPr/>
                     <a:lstStyle/>
                     <a:p>
+                      <a:pPr>
+                        <a:defRPr>
+                          <a:latin typeface="Roboto"/>
+                        </a:defRPr>
+                      </a:pPr>
                       <a:r>
                         <a:rPr sz="1050">
                           <a:solidFill>
                             <a:srgbClr val="25342A"/>
                           </a:solidFill>
+                          <a:latin typeface="Roboto"/>
                         </a:rPr>
                         <a:t>Retainers</a:t>
                       </a:r>
@@ -14104,12 +15509,17 @@
                     <a:bodyPr/>
                     <a:lstStyle/>
                     <a:p>
-                      <a:pPr algn="r"/>
+                      <a:pPr algn="r">
+                        <a:defRPr>
+                          <a:latin typeface="Roboto"/>
+                        </a:defRPr>
+                      </a:pPr>
                       <a:r>
                         <a:rPr sz="1050">
                           <a:solidFill>
                             <a:srgbClr val="25342A"/>
                           </a:solidFill>
+                          <a:latin typeface="Roboto"/>
                         </a:rPr>
                         <a:t>$65,200</a:t>
                       </a:r>
@@ -14126,12 +15536,17 @@
                     <a:bodyPr/>
                     <a:lstStyle/>
                     <a:p>
-                      <a:pPr algn="r"/>
+                      <a:pPr algn="r">
+                        <a:defRPr>
+                          <a:latin typeface="Roboto"/>
+                        </a:defRPr>
+                      </a:pPr>
                       <a:r>
                         <a:rPr sz="1050">
                           <a:solidFill>
                             <a:srgbClr val="25342A"/>
                           </a:solidFill>
+                          <a:latin typeface="Roboto"/>
                         </a:rPr>
                         <a:t>–</a:t>
                       </a:r>
@@ -14148,12 +15563,17 @@
                     <a:bodyPr/>
                     <a:lstStyle/>
                     <a:p>
-                      <a:pPr algn="r"/>
+                      <a:pPr algn="r">
+                        <a:defRPr>
+                          <a:latin typeface="Roboto"/>
+                        </a:defRPr>
+                      </a:pPr>
                       <a:r>
                         <a:rPr sz="1050">
                           <a:solidFill>
                             <a:srgbClr val="25342A"/>
                           </a:solidFill>
+                          <a:latin typeface="Roboto"/>
                         </a:rPr>
                         <a:t>–</a:t>
                       </a:r>
@@ -14170,12 +15590,17 @@
                     <a:bodyPr/>
                     <a:lstStyle/>
                     <a:p>
-                      <a:pPr algn="r"/>
+                      <a:pPr algn="r">
+                        <a:defRPr>
+                          <a:latin typeface="Roboto"/>
+                        </a:defRPr>
+                      </a:pPr>
                       <a:r>
                         <a:rPr sz="1050">
                           <a:solidFill>
                             <a:srgbClr val="25342A"/>
                           </a:solidFill>
+                          <a:latin typeface="Roboto"/>
                         </a:rPr>
                         <a:t>$42,460</a:t>
                       </a:r>
@@ -14192,12 +15617,17 @@
                     <a:bodyPr/>
                     <a:lstStyle/>
                     <a:p>
-                      <a:pPr algn="r"/>
+                      <a:pPr algn="r">
+                        <a:defRPr>
+                          <a:latin typeface="Roboto"/>
+                        </a:defRPr>
+                      </a:pPr>
                       <a:r>
                         <a:rPr sz="1050">
                           <a:solidFill>
                             <a:srgbClr val="25342A"/>
                           </a:solidFill>
+                          <a:latin typeface="Roboto"/>
                         </a:rPr>
                         <a:t>65.1%</a:t>
                       </a:r>
@@ -14216,11 +15646,17 @@
                     <a:bodyPr/>
                     <a:lstStyle/>
                     <a:p>
+                      <a:pPr>
+                        <a:defRPr>
+                          <a:latin typeface="Roboto"/>
+                        </a:defRPr>
+                      </a:pPr>
                       <a:r>
                         <a:rPr sz="1050">
                           <a:solidFill>
                             <a:srgbClr val="25342A"/>
                           </a:solidFill>
+                          <a:latin typeface="Roboto"/>
                         </a:rPr>
                         <a:t>Training</a:t>
                       </a:r>
@@ -14237,12 +15673,17 @@
                     <a:bodyPr/>
                     <a:lstStyle/>
                     <a:p>
-                      <a:pPr algn="r"/>
+                      <a:pPr algn="r">
+                        <a:defRPr>
+                          <a:latin typeface="Roboto"/>
+                        </a:defRPr>
+                      </a:pPr>
                       <a:r>
                         <a:rPr sz="1050">
                           <a:solidFill>
                             <a:srgbClr val="25342A"/>
                           </a:solidFill>
+                          <a:latin typeface="Roboto"/>
                         </a:rPr>
                         <a:t>$25,900</a:t>
                       </a:r>
@@ -14259,12 +15700,17 @@
                     <a:bodyPr/>
                     <a:lstStyle/>
                     <a:p>
-                      <a:pPr algn="r"/>
+                      <a:pPr algn="r">
+                        <a:defRPr>
+                          <a:latin typeface="Roboto"/>
+                        </a:defRPr>
+                      </a:pPr>
                       <a:r>
                         <a:rPr sz="1050">
                           <a:solidFill>
                             <a:srgbClr val="25342A"/>
                           </a:solidFill>
+                          <a:latin typeface="Roboto"/>
                         </a:rPr>
                         <a:t>–</a:t>
                       </a:r>
@@ -14281,12 +15727,17 @@
                     <a:bodyPr/>
                     <a:lstStyle/>
                     <a:p>
-                      <a:pPr algn="r"/>
+                      <a:pPr algn="r">
+                        <a:defRPr>
+                          <a:latin typeface="Roboto"/>
+                        </a:defRPr>
+                      </a:pPr>
                       <a:r>
                         <a:rPr sz="1050">
                           <a:solidFill>
                             <a:srgbClr val="25342A"/>
                           </a:solidFill>
+                          <a:latin typeface="Roboto"/>
                         </a:rPr>
                         <a:t>–</a:t>
                       </a:r>
@@ -14303,12 +15754,17 @@
                     <a:bodyPr/>
                     <a:lstStyle/>
                     <a:p>
-                      <a:pPr algn="r"/>
+                      <a:pPr algn="r">
+                        <a:defRPr>
+                          <a:latin typeface="Roboto"/>
+                        </a:defRPr>
+                      </a:pPr>
                       <a:r>
                         <a:rPr sz="1050">
                           <a:solidFill>
                             <a:srgbClr val="25342A"/>
                           </a:solidFill>
+                          <a:latin typeface="Roboto"/>
                         </a:rPr>
                         <a:t>$20,200</a:t>
                       </a:r>
@@ -14325,12 +15781,17 @@
                     <a:bodyPr/>
                     <a:lstStyle/>
                     <a:p>
-                      <a:pPr algn="r"/>
+                      <a:pPr algn="r">
+                        <a:defRPr>
+                          <a:latin typeface="Roboto"/>
+                        </a:defRPr>
+                      </a:pPr>
                       <a:r>
                         <a:rPr sz="1050">
                           <a:solidFill>
                             <a:srgbClr val="25342A"/>
                           </a:solidFill>
+                          <a:latin typeface="Roboto"/>
                         </a:rPr>
                         <a:t>78.0%</a:t>
                       </a:r>
@@ -14349,11 +15810,17 @@
                     <a:bodyPr/>
                     <a:lstStyle/>
                     <a:p>
+                      <a:pPr>
+                        <a:defRPr>
+                          <a:latin typeface="Roboto"/>
+                        </a:defRPr>
+                      </a:pPr>
                       <a:r>
                         <a:rPr sz="1050" b="1">
                           <a:solidFill>
                             <a:srgbClr val="25342A"/>
                           </a:solidFill>
+                          <a:latin typeface="Roboto"/>
                         </a:rPr>
                         <a:t>Total</a:t>
                       </a:r>
@@ -14370,12 +15837,17 @@
                     <a:bodyPr/>
                     <a:lstStyle/>
                     <a:p>
-                      <a:pPr algn="r"/>
+                      <a:pPr algn="r">
+                        <a:defRPr>
+                          <a:latin typeface="Roboto"/>
+                        </a:defRPr>
+                      </a:pPr>
                       <a:r>
                         <a:rPr sz="1050" b="1">
                           <a:solidFill>
                             <a:srgbClr val="25342A"/>
                           </a:solidFill>
+                          <a:latin typeface="Roboto"/>
                         </a:rPr>
                         <a:t>$278,590</a:t>
                       </a:r>
@@ -14392,12 +15864,17 @@
                     <a:bodyPr/>
                     <a:lstStyle/>
                     <a:p>
-                      <a:pPr algn="r"/>
+                      <a:pPr algn="r">
+                        <a:defRPr>
+                          <a:latin typeface="Roboto"/>
+                        </a:defRPr>
+                      </a:pPr>
                       <a:r>
                         <a:rPr sz="1050" b="1">
                           <a:solidFill>
                             <a:srgbClr val="25342A"/>
                           </a:solidFill>
+                          <a:latin typeface="Roboto"/>
                         </a:rPr>
                         <a:t>–</a:t>
                       </a:r>
@@ -14414,12 +15891,17 @@
                     <a:bodyPr/>
                     <a:lstStyle/>
                     <a:p>
-                      <a:pPr algn="r"/>
+                      <a:pPr algn="r">
+                        <a:defRPr>
+                          <a:latin typeface="Roboto"/>
+                        </a:defRPr>
+                      </a:pPr>
                       <a:r>
                         <a:rPr sz="1050" b="1">
                           <a:solidFill>
                             <a:srgbClr val="25342A"/>
                           </a:solidFill>
+                          <a:latin typeface="Roboto"/>
                         </a:rPr>
                         <a:t>–</a:t>
                       </a:r>
@@ -14436,12 +15918,17 @@
                     <a:bodyPr/>
                     <a:lstStyle/>
                     <a:p>
-                      <a:pPr algn="r"/>
+                      <a:pPr algn="r">
+                        <a:defRPr>
+                          <a:latin typeface="Roboto"/>
+                        </a:defRPr>
+                      </a:pPr>
                       <a:r>
                         <a:rPr sz="1050" b="1">
                           <a:solidFill>
                             <a:srgbClr val="25342A"/>
                           </a:solidFill>
+                          <a:latin typeface="Roboto"/>
                         </a:rPr>
                         <a:t>$178,590</a:t>
                       </a:r>
@@ -14458,12 +15945,17 @@
                     <a:bodyPr/>
                     <a:lstStyle/>
                     <a:p>
-                      <a:pPr algn="r"/>
+                      <a:pPr algn="r">
+                        <a:defRPr>
+                          <a:latin typeface="Roboto"/>
+                        </a:defRPr>
+                      </a:pPr>
                       <a:r>
                         <a:rPr sz="1050" b="1">
                           <a:solidFill>
                             <a:srgbClr val="25342A"/>
                           </a:solidFill>
+                          <a:latin typeface="Roboto"/>
                         </a:rPr>
                         <a:t>64.1%</a:t>
                       </a:r>
@@ -14502,12 +15994,17 @@
           </a:bodyPr>
           <a:lstStyle/>
           <a:p>
+            <a:pPr>
+              <a:defRPr>
+                <a:latin typeface="Roboto"/>
+              </a:defRPr>
+            </a:pPr>
             <a:r>
               <a:rPr sz="900" b="0">
                 <a:solidFill>
                   <a:srgbClr val="5F6F63"/>
                 </a:solidFill>
-                <a:latin typeface="Arial"/>
+                <a:latin typeface="Roboto"/>
               </a:rPr>
               <a:t>growth.pptx</a:t>
             </a:r>
@@ -14536,13 +16033,17 @@
           </a:bodyPr>
           <a:lstStyle/>
           <a:p>
-            <a:pPr algn="ctr"/>
+            <a:pPr algn="ctr">
+              <a:defRPr>
+                <a:latin typeface="Roboto"/>
+              </a:defRPr>
+            </a:pPr>
             <a:r>
               <a:rPr sz="900" b="0">
                 <a:solidFill>
                   <a:srgbClr val="5F6F63"/>
                 </a:solidFill>
-                <a:latin typeface="Arial"/>
+                <a:latin typeface="Roboto"/>
               </a:rPr>
               <a:t>Data retrieved 2pm, Tue 6 Oct 2026 · Sample data</a:t>
             </a:r>
@@ -14571,13 +16072,17 @@
           </a:bodyPr>
           <a:lstStyle/>
           <a:p>
-            <a:pPr algn="r"/>
+            <a:pPr algn="r">
+              <a:defRPr>
+                <a:latin typeface="Roboto"/>
+              </a:defRPr>
+            </a:pPr>
             <a:r>
               <a:rPr sz="900" b="0">
                 <a:solidFill>
                   <a:srgbClr val="5F6F63"/>
                 </a:solidFill>
-                <a:latin typeface="Arial"/>
+                <a:latin typeface="Roboto"/>
               </a:rPr>
               <a:t>Slide 27 of 27</a:t>
             </a:r>
@@ -14641,7 +16146,11 @@
           <a:bodyPr rtlCol="0" anchor="ctr"/>
           <a:lstStyle/>
           <a:p>
-            <a:pPr algn="ctr"/>
+            <a:pPr algn="ctr">
+              <a:defRPr>
+                <a:latin typeface="Roboto"/>
+              </a:defRPr>
+            </a:pPr>
           </a:p>
         </p:txBody>
       </p:sp>
@@ -14667,12 +16176,17 @@
           </a:bodyPr>
           <a:lstStyle/>
           <a:p>
+            <a:pPr>
+              <a:defRPr>
+                <a:latin typeface="Roboto"/>
+              </a:defRPr>
+            </a:pPr>
             <a:r>
               <a:rPr sz="1000" b="0">
                 <a:solidFill>
                   <a:srgbClr val="5F6F63"/>
                 </a:solidFill>
-                <a:latin typeface="Arial"/>
+                <a:latin typeface="Roboto"/>
               </a:rPr>
               <a:t>SME sample businesses · Which products and services are growing?</a:t>
             </a:r>
@@ -14701,12 +16215,17 @@
           </a:bodyPr>
           <a:lstStyle/>
           <a:p>
+            <a:pPr>
+              <a:defRPr>
+                <a:latin typeface="Roboto"/>
+              </a:defRPr>
+            </a:pPr>
             <a:r>
               <a:rPr sz="2400" b="1">
                 <a:solidFill>
                   <a:srgbClr val="25342A"/>
                 </a:solidFill>
-                <a:latin typeface="Arial"/>
+                <a:latin typeface="Roboto"/>
               </a:rPr>
               <a:t>From gross margin to profit · Trades</a:t>
             </a:r>
@@ -14735,12 +16254,17 @@
           </a:bodyPr>
           <a:lstStyle/>
           <a:p>
+            <a:pPr>
+              <a:defRPr>
+                <a:latin typeface="Roboto"/>
+              </a:defRPr>
+            </a:pPr>
             <a:r>
               <a:rPr sz="1200" b="0">
                 <a:solidFill>
                   <a:srgbClr val="5F6F63"/>
                 </a:solidFill>
-                <a:latin typeface="Arial"/>
+                <a:latin typeface="Roboto"/>
               </a:rPr>
               <a:t>October's jobs made $49,446 gross margin (38.4%). Technician time not charged to jobs took $9,638 and overheads $57,980, leaving ($18,172) profit before tax ((14.1%) of revenue). To cover overheads, jobs need a 52.5% gross margin on average.</a:t>
             </a:r>
@@ -14774,7 +16298,13 @@
                   <a:txBody>
                     <a:bodyPr/>
                     <a:lstStyle/>
-                    <a:p/>
+                    <a:p>
+                      <a:pPr>
+                        <a:defRPr>
+                          <a:latin typeface="Roboto"/>
+                        </a:defRPr>
+                      </a:pPr>
+                    </a:p>
                   </a:txBody>
                   <a:tcPr>
                     <a:solidFill>
@@ -14787,12 +16317,17 @@
                     <a:bodyPr/>
                     <a:lstStyle/>
                     <a:p>
-                      <a:pPr algn="r"/>
+                      <a:pPr algn="r">
+                        <a:defRPr>
+                          <a:latin typeface="Roboto"/>
+                        </a:defRPr>
+                      </a:pPr>
                       <a:r>
                         <a:rPr sz="1100" b="1">
                           <a:solidFill>
                             <a:srgbClr val="FFFFFF"/>
                           </a:solidFill>
+                          <a:latin typeface="Roboto"/>
                         </a:rPr>
                         <a:t>October 2025</a:t>
                       </a:r>
@@ -14811,11 +16346,17 @@
                     <a:bodyPr/>
                     <a:lstStyle/>
                     <a:p>
+                      <a:pPr>
+                        <a:defRPr>
+                          <a:latin typeface="Roboto"/>
+                        </a:defRPr>
+                      </a:pPr>
                       <a:r>
                         <a:rPr sz="1050">
                           <a:solidFill>
                             <a:srgbClr val="25342A"/>
                           </a:solidFill>
+                          <a:latin typeface="Roboto"/>
                         </a:rPr>
                         <a:t>Gross margin on jobs</a:t>
                       </a:r>
@@ -14832,12 +16373,17 @@
                     <a:bodyPr/>
                     <a:lstStyle/>
                     <a:p>
-                      <a:pPr algn="r"/>
+                      <a:pPr algn="r">
+                        <a:defRPr>
+                          <a:latin typeface="Roboto"/>
+                        </a:defRPr>
+                      </a:pPr>
                       <a:r>
                         <a:rPr sz="1050">
                           <a:solidFill>
                             <a:srgbClr val="25342A"/>
                           </a:solidFill>
+                          <a:latin typeface="Roboto"/>
                         </a:rPr>
                         <a:t>$49,446</a:t>
                       </a:r>
@@ -14856,11 +16402,17 @@
                     <a:bodyPr/>
                     <a:lstStyle/>
                     <a:p>
+                      <a:pPr>
+                        <a:defRPr>
+                          <a:latin typeface="Roboto"/>
+                        </a:defRPr>
+                      </a:pPr>
                       <a:r>
                         <a:rPr sz="1050">
                           <a:solidFill>
                             <a:srgbClr val="25342A"/>
                           </a:solidFill>
+                          <a:latin typeface="Roboto"/>
                         </a:rPr>
                         <a:t>Technician wages and on-costs</a:t>
                       </a:r>
@@ -14877,12 +16429,17 @@
                     <a:bodyPr/>
                     <a:lstStyle/>
                     <a:p>
-                      <a:pPr algn="r"/>
+                      <a:pPr algn="r">
+                        <a:defRPr>
+                          <a:latin typeface="Roboto"/>
+                        </a:defRPr>
+                      </a:pPr>
                       <a:r>
                         <a:rPr sz="1050">
                           <a:solidFill>
                             <a:srgbClr val="25342A"/>
                           </a:solidFill>
+                          <a:latin typeface="Roboto"/>
                         </a:rPr>
                         <a:t>$46,800</a:t>
                       </a:r>
@@ -14901,11 +16458,17 @@
                     <a:bodyPr/>
                     <a:lstStyle/>
                     <a:p>
+                      <a:pPr>
+                        <a:defRPr>
+                          <a:latin typeface="Roboto"/>
+                        </a:defRPr>
+                      </a:pPr>
                       <a:r>
                         <a:rPr sz="1050">
                           <a:solidFill>
                             <a:srgbClr val="25342A"/>
                           </a:solidFill>
+                          <a:latin typeface="Roboto"/>
                         </a:rPr>
                         <a:t>Technician time charged to jobs (at cost)</a:t>
                       </a:r>
@@ -14922,12 +16485,17 @@
                     <a:bodyPr/>
                     <a:lstStyle/>
                     <a:p>
-                      <a:pPr algn="r"/>
+                      <a:pPr algn="r">
+                        <a:defRPr>
+                          <a:latin typeface="Roboto"/>
+                        </a:defRPr>
+                      </a:pPr>
                       <a:r>
                         <a:rPr sz="1050">
                           <a:solidFill>
                             <a:srgbClr val="25342A"/>
                           </a:solidFill>
+                          <a:latin typeface="Roboto"/>
                         </a:rPr>
                         <a:t>$37,162</a:t>
                       </a:r>
@@ -14946,11 +16514,17 @@
                     <a:bodyPr/>
                     <a:lstStyle/>
                     <a:p>
+                      <a:pPr>
+                        <a:defRPr>
+                          <a:latin typeface="Roboto"/>
+                        </a:defRPr>
+                      </a:pPr>
                       <a:r>
                         <a:rPr sz="1050">
                           <a:solidFill>
                             <a:srgbClr val="25342A"/>
                           </a:solidFill>
+                          <a:latin typeface="Roboto"/>
                         </a:rPr>
                         <a:t>Technician time not charged to jobs</a:t>
                       </a:r>
@@ -14967,12 +16541,17 @@
                     <a:bodyPr/>
                     <a:lstStyle/>
                     <a:p>
-                      <a:pPr algn="r"/>
+                      <a:pPr algn="r">
+                        <a:defRPr>
+                          <a:latin typeface="Roboto"/>
+                        </a:defRPr>
+                      </a:pPr>
                       <a:r>
                         <a:rPr sz="1050">
                           <a:solidFill>
                             <a:srgbClr val="25342A"/>
                           </a:solidFill>
+                          <a:latin typeface="Roboto"/>
                         </a:rPr>
                         <a:t>$9,638</a:t>
                       </a:r>
@@ -14991,11 +16570,17 @@
                     <a:bodyPr/>
                     <a:lstStyle/>
                     <a:p>
+                      <a:pPr>
+                        <a:defRPr>
+                          <a:latin typeface="Roboto"/>
+                        </a:defRPr>
+                      </a:pPr>
                       <a:r>
                         <a:rPr sz="1050">
                           <a:solidFill>
                             <a:srgbClr val="25342A"/>
                           </a:solidFill>
+                          <a:latin typeface="Roboto"/>
                         </a:rPr>
                         <a:t>Gross profit (the P&amp;L)</a:t>
                       </a:r>
@@ -15012,12 +16597,17 @@
                     <a:bodyPr/>
                     <a:lstStyle/>
                     <a:p>
-                      <a:pPr algn="r"/>
+                      <a:pPr algn="r">
+                        <a:defRPr>
+                          <a:latin typeface="Roboto"/>
+                        </a:defRPr>
+                      </a:pPr>
                       <a:r>
                         <a:rPr sz="1050">
                           <a:solidFill>
                             <a:srgbClr val="25342A"/>
                           </a:solidFill>
+                          <a:latin typeface="Roboto"/>
                         </a:rPr>
                         <a:t>$39,808</a:t>
                       </a:r>
@@ -15036,11 +16626,17 @@
                     <a:bodyPr/>
                     <a:lstStyle/>
                     <a:p>
+                      <a:pPr>
+                        <a:defRPr>
+                          <a:latin typeface="Roboto"/>
+                        </a:defRPr>
+                      </a:pPr>
                       <a:r>
                         <a:rPr sz="1050">
                           <a:solidFill>
                             <a:srgbClr val="25342A"/>
                           </a:solidFill>
+                          <a:latin typeface="Roboto"/>
                         </a:rPr>
                         <a:t>Overheads (operating expenses, depreciation, interest)</a:t>
                       </a:r>
@@ -15057,12 +16653,17 @@
                     <a:bodyPr/>
                     <a:lstStyle/>
                     <a:p>
-                      <a:pPr algn="r"/>
+                      <a:pPr algn="r">
+                        <a:defRPr>
+                          <a:latin typeface="Roboto"/>
+                        </a:defRPr>
+                      </a:pPr>
                       <a:r>
                         <a:rPr sz="1050">
                           <a:solidFill>
                             <a:srgbClr val="25342A"/>
                           </a:solidFill>
+                          <a:latin typeface="Roboto"/>
                         </a:rPr>
                         <a:t>$57,980</a:t>
                       </a:r>
@@ -15081,11 +16682,17 @@
                     <a:bodyPr/>
                     <a:lstStyle/>
                     <a:p>
+                      <a:pPr>
+                        <a:defRPr>
+                          <a:latin typeface="Roboto"/>
+                        </a:defRPr>
+                      </a:pPr>
                       <a:r>
                         <a:rPr sz="1050">
                           <a:solidFill>
                             <a:srgbClr val="25342A"/>
                           </a:solidFill>
+                          <a:latin typeface="Roboto"/>
                         </a:rPr>
                         <a:t>Profit before tax (the P&amp;L)</a:t>
                       </a:r>
@@ -15102,12 +16709,17 @@
                     <a:bodyPr/>
                     <a:lstStyle/>
                     <a:p>
-                      <a:pPr algn="r"/>
+                      <a:pPr algn="r">
+                        <a:defRPr>
+                          <a:latin typeface="Roboto"/>
+                        </a:defRPr>
+                      </a:pPr>
                       <a:r>
                         <a:rPr sz="1050">
                           <a:solidFill>
                             <a:srgbClr val="B42318"/>
                           </a:solidFill>
+                          <a:latin typeface="Roboto"/>
                         </a:rPr>
                         <a:t>($18,172)</a:t>
                       </a:r>
@@ -15126,11 +16738,17 @@
                     <a:bodyPr/>
                     <a:lstStyle/>
                     <a:p>
+                      <a:pPr>
+                        <a:defRPr>
+                          <a:latin typeface="Roboto"/>
+                        </a:defRPr>
+                      </a:pPr>
                       <a:r>
                         <a:rPr sz="1050">
                           <a:solidFill>
                             <a:srgbClr val="25342A"/>
                           </a:solidFill>
+                          <a:latin typeface="Roboto"/>
                         </a:rPr>
                         <a:t>Revenue</a:t>
                       </a:r>
@@ -15147,12 +16765,17 @@
                     <a:bodyPr/>
                     <a:lstStyle/>
                     <a:p>
-                      <a:pPr algn="r"/>
+                      <a:pPr algn="r">
+                        <a:defRPr>
+                          <a:latin typeface="Roboto"/>
+                        </a:defRPr>
+                      </a:pPr>
                       <a:r>
                         <a:rPr sz="1050">
                           <a:solidFill>
                             <a:srgbClr val="25342A"/>
                           </a:solidFill>
+                          <a:latin typeface="Roboto"/>
                         </a:rPr>
                         <a:t>$128,898</a:t>
                       </a:r>
@@ -15171,11 +16794,17 @@
                     <a:bodyPr/>
                     <a:lstStyle/>
                     <a:p>
+                      <a:pPr>
+                        <a:defRPr>
+                          <a:latin typeface="Roboto"/>
+                        </a:defRPr>
+                      </a:pPr>
                       <a:r>
                         <a:rPr sz="1050">
                           <a:solidFill>
                             <a:srgbClr val="25342A"/>
                           </a:solidFill>
+                          <a:latin typeface="Roboto"/>
                         </a:rPr>
                         <a:t>Gross margin on jobs, %</a:t>
                       </a:r>
@@ -15192,12 +16821,17 @@
                     <a:bodyPr/>
                     <a:lstStyle/>
                     <a:p>
-                      <a:pPr algn="r"/>
+                      <a:pPr algn="r">
+                        <a:defRPr>
+                          <a:latin typeface="Roboto"/>
+                        </a:defRPr>
+                      </a:pPr>
                       <a:r>
                         <a:rPr sz="1050">
                           <a:solidFill>
                             <a:srgbClr val="25342A"/>
                           </a:solidFill>
+                          <a:latin typeface="Roboto"/>
                         </a:rPr>
                         <a:t>38.4%</a:t>
                       </a:r>
@@ -15216,11 +16850,17 @@
                     <a:bodyPr/>
                     <a:lstStyle/>
                     <a:p>
+                      <a:pPr>
+                        <a:defRPr>
+                          <a:latin typeface="Roboto"/>
+                        </a:defRPr>
+                      </a:pPr>
                       <a:r>
                         <a:rPr sz="1050">
                           <a:solidFill>
                             <a:srgbClr val="25342A"/>
                           </a:solidFill>
+                          <a:latin typeface="Roboto"/>
                         </a:rPr>
                         <a:t>Profit before tax, % of revenue</a:t>
                       </a:r>
@@ -15237,12 +16877,17 @@
                     <a:bodyPr/>
                     <a:lstStyle/>
                     <a:p>
-                      <a:pPr algn="r"/>
+                      <a:pPr algn="r">
+                        <a:defRPr>
+                          <a:latin typeface="Roboto"/>
+                        </a:defRPr>
+                      </a:pPr>
                       <a:r>
                         <a:rPr sz="1050">
                           <a:solidFill>
                             <a:srgbClr val="B42318"/>
                           </a:solidFill>
+                          <a:latin typeface="Roboto"/>
                         </a:rPr>
                         <a:t>(14.1%)</a:t>
                       </a:r>
@@ -15261,11 +16906,17 @@
                     <a:bodyPr/>
                     <a:lstStyle/>
                     <a:p>
+                      <a:pPr>
+                        <a:defRPr>
+                          <a:latin typeface="Roboto"/>
+                        </a:defRPr>
+                      </a:pPr>
                       <a:r>
                         <a:rPr sz="1050">
                           <a:solidFill>
                             <a:srgbClr val="25342A"/>
                           </a:solidFill>
+                          <a:latin typeface="Roboto"/>
                         </a:rPr>
                         <a:t>Gross margin jobs need just to cover overheads and time not charged</a:t>
                       </a:r>
@@ -15282,12 +16933,17 @@
                     <a:bodyPr/>
                     <a:lstStyle/>
                     <a:p>
-                      <a:pPr algn="r"/>
+                      <a:pPr algn="r">
+                        <a:defRPr>
+                          <a:latin typeface="Roboto"/>
+                        </a:defRPr>
+                      </a:pPr>
                       <a:r>
                         <a:rPr sz="1050">
                           <a:solidFill>
                             <a:srgbClr val="25342A"/>
                           </a:solidFill>
+                          <a:latin typeface="Roboto"/>
                         </a:rPr>
                         <a:t>52.5%</a:t>
                       </a:r>
@@ -15326,12 +16982,17 @@
           </a:bodyPr>
           <a:lstStyle/>
           <a:p>
+            <a:pPr>
+              <a:defRPr>
+                <a:latin typeface="Roboto"/>
+              </a:defRPr>
+            </a:pPr>
             <a:r>
               <a:rPr sz="900" b="0">
                 <a:solidFill>
                   <a:srgbClr val="5F6F63"/>
                 </a:solidFill>
-                <a:latin typeface="Arial"/>
+                <a:latin typeface="Roboto"/>
               </a:rPr>
               <a:t>growth.pptx</a:t>
             </a:r>
@@ -15360,13 +17021,17 @@
           </a:bodyPr>
           <a:lstStyle/>
           <a:p>
-            <a:pPr algn="ctr"/>
+            <a:pPr algn="ctr">
+              <a:defRPr>
+                <a:latin typeface="Roboto"/>
+              </a:defRPr>
+            </a:pPr>
             <a:r>
               <a:rPr sz="900" b="0">
                 <a:solidFill>
                   <a:srgbClr val="5F6F63"/>
                 </a:solidFill>
-                <a:latin typeface="Arial"/>
+                <a:latin typeface="Roboto"/>
               </a:rPr>
               <a:t>Data retrieved 2pm, Tue 6 Oct 2026 · Sample data</a:t>
             </a:r>
@@ -15395,13 +17060,17 @@
           </a:bodyPr>
           <a:lstStyle/>
           <a:p>
-            <a:pPr algn="r"/>
+            <a:pPr algn="r">
+              <a:defRPr>
+                <a:latin typeface="Roboto"/>
+              </a:defRPr>
+            </a:pPr>
             <a:r>
               <a:rPr sz="900" b="0">
                 <a:solidFill>
                   <a:srgbClr val="5F6F63"/>
                 </a:solidFill>
-                <a:latin typeface="Arial"/>
+                <a:latin typeface="Roboto"/>
               </a:rPr>
               <a:t>Slide 3 of 27</a:t>
             </a:r>
@@ -15465,7 +17134,11 @@
           <a:bodyPr rtlCol="0" anchor="ctr"/>
           <a:lstStyle/>
           <a:p>
-            <a:pPr algn="ctr"/>
+            <a:pPr algn="ctr">
+              <a:defRPr>
+                <a:latin typeface="Roboto"/>
+              </a:defRPr>
+            </a:pPr>
           </a:p>
         </p:txBody>
       </p:sp>
@@ -15491,12 +17164,17 @@
           </a:bodyPr>
           <a:lstStyle/>
           <a:p>
+            <a:pPr>
+              <a:defRPr>
+                <a:latin typeface="Roboto"/>
+              </a:defRPr>
+            </a:pPr>
             <a:r>
               <a:rPr sz="1000" b="0">
                 <a:solidFill>
                   <a:srgbClr val="5F6F63"/>
                 </a:solidFill>
-                <a:latin typeface="Arial"/>
+                <a:latin typeface="Roboto"/>
               </a:rPr>
               <a:t>SME sample businesses · Which products and services are growing?</a:t>
             </a:r>
@@ -15525,12 +17203,17 @@
           </a:bodyPr>
           <a:lstStyle/>
           <a:p>
+            <a:pPr>
+              <a:defRPr>
+                <a:latin typeface="Roboto"/>
+              </a:defRPr>
+            </a:pPr>
             <a:r>
               <a:rPr sz="2400" b="1">
                 <a:solidFill>
                   <a:srgbClr val="25342A"/>
                 </a:solidFill>
-                <a:latin typeface="Arial"/>
+                <a:latin typeface="Roboto"/>
               </a:rPr>
               <a:t>Headline numbers · Trades · Line: All</a:t>
             </a:r>
@@ -15578,7 +17261,11 @@
           <a:bodyPr rtlCol="0" anchor="ctr"/>
           <a:lstStyle/>
           <a:p>
-            <a:pPr algn="ctr"/>
+            <a:pPr algn="ctr">
+              <a:defRPr>
+                <a:latin typeface="Roboto"/>
+              </a:defRPr>
+            </a:pPr>
           </a:p>
         </p:txBody>
       </p:sp>
@@ -15604,12 +17291,17 @@
           </a:bodyPr>
           <a:lstStyle/>
           <a:p>
+            <a:pPr>
+              <a:defRPr>
+                <a:latin typeface="Roboto"/>
+              </a:defRPr>
+            </a:pPr>
             <a:r>
               <a:rPr sz="1200" b="0">
                 <a:solidFill>
                   <a:srgbClr val="5F6F63"/>
                 </a:solidFill>
-                <a:latin typeface="Arial"/>
+                <a:latin typeface="Roboto"/>
               </a:rPr>
               <a:t>October against October last year</a:t>
             </a:r>
@@ -15638,12 +17330,17 @@
           </a:bodyPr>
           <a:lstStyle/>
           <a:p>
+            <a:pPr>
+              <a:defRPr>
+                <a:latin typeface="Roboto"/>
+              </a:defRPr>
+            </a:pPr>
             <a:r>
               <a:rPr sz="3000" b="1">
                 <a:solidFill>
                   <a:srgbClr val="B42318"/>
                 </a:solidFill>
-                <a:latin typeface="Arial"/>
+                <a:latin typeface="Roboto"/>
               </a:rPr>
               <a:t>(24.6%)</a:t>
             </a:r>
@@ -15672,12 +17369,17 @@
           </a:bodyPr>
           <a:lstStyle/>
           <a:p>
+            <a:pPr>
+              <a:defRPr>
+                <a:latin typeface="Roboto"/>
+              </a:defRPr>
+            </a:pPr>
             <a:r>
               <a:rPr sz="1100" b="0">
                 <a:solidFill>
                   <a:srgbClr val="5F6F63"/>
                 </a:solidFill>
-                <a:latin typeface="Arial"/>
+                <a:latin typeface="Roboto"/>
               </a:rPr>
               <a:t>$128,898 against $171,009</a:t>
             </a:r>
@@ -15725,7 +17427,11 @@
           <a:bodyPr rtlCol="0" anchor="ctr"/>
           <a:lstStyle/>
           <a:p>
-            <a:pPr algn="ctr"/>
+            <a:pPr algn="ctr">
+              <a:defRPr>
+                <a:latin typeface="Roboto"/>
+              </a:defRPr>
+            </a:pPr>
           </a:p>
         </p:txBody>
       </p:sp>
@@ -15751,12 +17457,17 @@
           </a:bodyPr>
           <a:lstStyle/>
           <a:p>
+            <a:pPr>
+              <a:defRPr>
+                <a:latin typeface="Roboto"/>
+              </a:defRPr>
+            </a:pPr>
             <a:r>
               <a:rPr sz="1200" b="0">
                 <a:solidFill>
                   <a:srgbClr val="5F6F63"/>
                 </a:solidFill>
-                <a:latin typeface="Arial"/>
+                <a:latin typeface="Roboto"/>
               </a:rPr>
               <a:t>Year to date (Jul to Oct 2025)</a:t>
             </a:r>
@@ -15785,12 +17496,17 @@
           </a:bodyPr>
           <a:lstStyle/>
           <a:p>
+            <a:pPr>
+              <a:defRPr>
+                <a:latin typeface="Roboto"/>
+              </a:defRPr>
+            </a:pPr>
             <a:r>
               <a:rPr sz="3000" b="1">
                 <a:solidFill>
                   <a:srgbClr val="2F7A5D"/>
                 </a:solidFill>
-                <a:latin typeface="Arial"/>
+                <a:latin typeface="Roboto"/>
               </a:rPr>
               <a:t>$583,077</a:t>
             </a:r>
@@ -15819,12 +17535,17 @@
           </a:bodyPr>
           <a:lstStyle/>
           <a:p>
+            <a:pPr>
+              <a:defRPr>
+                <a:latin typeface="Roboto"/>
+              </a:defRPr>
+            </a:pPr>
             <a:r>
               <a:rPr sz="1100" b="0">
                 <a:solidFill>
                   <a:srgbClr val="5F6F63"/>
                 </a:solidFill>
-                <a:latin typeface="Arial"/>
+                <a:latin typeface="Roboto"/>
               </a:rPr>
               <a:t>same period last year: not in the data</a:t>
             </a:r>
@@ -15872,7 +17593,11 @@
           <a:bodyPr rtlCol="0" anchor="ctr"/>
           <a:lstStyle/>
           <a:p>
-            <a:pPr algn="ctr"/>
+            <a:pPr algn="ctr">
+              <a:defRPr>
+                <a:latin typeface="Roboto"/>
+              </a:defRPr>
+            </a:pPr>
           </a:p>
         </p:txBody>
       </p:sp>
@@ -15898,12 +17623,17 @@
           </a:bodyPr>
           <a:lstStyle/>
           <a:p>
+            <a:pPr>
+              <a:defRPr>
+                <a:latin typeface="Roboto"/>
+              </a:defRPr>
+            </a:pPr>
             <a:r>
               <a:rPr sz="1200" b="0">
                 <a:solidFill>
                   <a:srgbClr val="5F6F63"/>
                 </a:solidFill>
-                <a:latin typeface="Arial"/>
+                <a:latin typeface="Roboto"/>
               </a:rPr>
               <a:t>Gross margin, year to date</a:t>
             </a:r>
@@ -15932,12 +17662,17 @@
           </a:bodyPr>
           <a:lstStyle/>
           <a:p>
+            <a:pPr>
+              <a:defRPr>
+                <a:latin typeface="Roboto"/>
+              </a:defRPr>
+            </a:pPr>
             <a:r>
               <a:rPr sz="3000" b="1">
                 <a:solidFill>
                   <a:srgbClr val="2F7A5D"/>
                 </a:solidFill>
-                <a:latin typeface="Arial"/>
+                <a:latin typeface="Roboto"/>
               </a:rPr>
               <a:t>38.6%</a:t>
             </a:r>
@@ -15966,12 +17701,17 @@
           </a:bodyPr>
           <a:lstStyle/>
           <a:p>
+            <a:pPr>
+              <a:defRPr>
+                <a:latin typeface="Roboto"/>
+              </a:defRPr>
+            </a:pPr>
             <a:r>
               <a:rPr sz="1100" b="0">
                 <a:solidFill>
                   <a:srgbClr val="5F6F63"/>
                 </a:solidFill>
-                <a:latin typeface="Arial"/>
+                <a:latin typeface="Roboto"/>
               </a:rPr>
               <a:t>$224,987 before overheads</a:t>
             </a:r>
@@ -16000,12 +17740,17 @@
           </a:bodyPr>
           <a:lstStyle/>
           <a:p>
+            <a:pPr>
+              <a:defRPr>
+                <a:latin typeface="Roboto"/>
+              </a:defRPr>
+            </a:pPr>
             <a:r>
               <a:rPr sz="900" b="0">
                 <a:solidFill>
                   <a:srgbClr val="5F6F63"/>
                 </a:solidFill>
-                <a:latin typeface="Arial"/>
+                <a:latin typeface="Roboto"/>
               </a:rPr>
               <a:t>growth.pptx</a:t>
             </a:r>
@@ -16034,13 +17779,17 @@
           </a:bodyPr>
           <a:lstStyle/>
           <a:p>
-            <a:pPr algn="ctr"/>
+            <a:pPr algn="ctr">
+              <a:defRPr>
+                <a:latin typeface="Roboto"/>
+              </a:defRPr>
+            </a:pPr>
             <a:r>
               <a:rPr sz="900" b="0">
                 <a:solidFill>
                   <a:srgbClr val="5F6F63"/>
                 </a:solidFill>
-                <a:latin typeface="Arial"/>
+                <a:latin typeface="Roboto"/>
               </a:rPr>
               <a:t>Data retrieved 2pm, Tue 6 Oct 2026 · Sample data</a:t>
             </a:r>
@@ -16069,13 +17818,17 @@
           </a:bodyPr>
           <a:lstStyle/>
           <a:p>
-            <a:pPr algn="r"/>
+            <a:pPr algn="r">
+              <a:defRPr>
+                <a:latin typeface="Roboto"/>
+              </a:defRPr>
+            </a:pPr>
             <a:r>
               <a:rPr sz="900" b="0">
                 <a:solidFill>
                   <a:srgbClr val="5F6F63"/>
                 </a:solidFill>
-                <a:latin typeface="Arial"/>
+                <a:latin typeface="Roboto"/>
               </a:rPr>
               <a:t>Slide 4 of 27</a:t>
             </a:r>
@@ -16139,7 +17892,11 @@
           <a:bodyPr rtlCol="0" anchor="ctr"/>
           <a:lstStyle/>
           <a:p>
-            <a:pPr algn="ctr"/>
+            <a:pPr algn="ctr">
+              <a:defRPr>
+                <a:latin typeface="Roboto"/>
+              </a:defRPr>
+            </a:pPr>
           </a:p>
         </p:txBody>
       </p:sp>
@@ -16165,12 +17922,17 @@
           </a:bodyPr>
           <a:lstStyle/>
           <a:p>
+            <a:pPr>
+              <a:defRPr>
+                <a:latin typeface="Roboto"/>
+              </a:defRPr>
+            </a:pPr>
             <a:r>
               <a:rPr sz="1000" b="0">
                 <a:solidFill>
                   <a:srgbClr val="5F6F63"/>
                 </a:solidFill>
-                <a:latin typeface="Arial"/>
+                <a:latin typeface="Roboto"/>
               </a:rPr>
               <a:t>SME sample businesses · Which products and services are growing?</a:t>
             </a:r>
@@ -16199,12 +17961,17 @@
           </a:bodyPr>
           <a:lstStyle/>
           <a:p>
+            <a:pPr>
+              <a:defRPr>
+                <a:latin typeface="Roboto"/>
+              </a:defRPr>
+            </a:pPr>
             <a:r>
               <a:rPr sz="2400" b="1">
                 <a:solidFill>
                   <a:srgbClr val="25342A"/>
                 </a:solidFill>
-                <a:latin typeface="Arial"/>
+                <a:latin typeface="Roboto"/>
               </a:rPr>
               <a:t>What it shows · Trades · Line: All</a:t>
             </a:r>
@@ -16252,7 +18019,11 @@
           <a:bodyPr rtlCol="0" anchor="ctr"/>
           <a:lstStyle/>
           <a:p>
-            <a:pPr algn="ctr"/>
+            <a:pPr algn="ctr">
+              <a:defRPr>
+                <a:latin typeface="Roboto"/>
+              </a:defRPr>
+            </a:pPr>
           </a:p>
         </p:txBody>
       </p:sp>
@@ -16278,12 +18049,17 @@
           </a:bodyPr>
           <a:lstStyle/>
           <a:p>
+            <a:pPr>
+              <a:defRPr>
+                <a:latin typeface="Roboto"/>
+              </a:defRPr>
+            </a:pPr>
             <a:r>
               <a:rPr sz="1100" b="1">
                 <a:solidFill>
                   <a:srgbClr val="5F6F63"/>
                 </a:solidFill>
-                <a:latin typeface="Arial"/>
+                <a:latin typeface="Roboto"/>
               </a:rPr>
               <a:t>WHAT IT SHOWS</a:t>
             </a:r>
@@ -16312,12 +18088,17 @@
           </a:bodyPr>
           <a:lstStyle/>
           <a:p>
+            <a:pPr>
+              <a:defRPr>
+                <a:latin typeface="Roboto"/>
+              </a:defRPr>
+            </a:pPr>
             <a:r>
               <a:rPr sz="1600" b="0">
                 <a:solidFill>
                   <a:srgbClr val="25342A"/>
                 </a:solidFill>
-                <a:latin typeface="Arial"/>
+                <a:latin typeface="Roboto"/>
               </a:rPr>
               <a:t>Revenue is $583,077 this financial year to date (Jul to Oct 2025). Maintenance contracts make the highest gross margin (59.5%); Installations the lowest (29.8%). The business needs 52.5% gross margin just to cover overheads.</a:t>
             </a:r>
@@ -16365,7 +18146,11 @@
           <a:bodyPr rtlCol="0" anchor="ctr"/>
           <a:lstStyle/>
           <a:p>
-            <a:pPr algn="ctr"/>
+            <a:pPr algn="ctr">
+              <a:defRPr>
+                <a:latin typeface="Roboto"/>
+              </a:defRPr>
+            </a:pPr>
           </a:p>
         </p:txBody>
       </p:sp>
@@ -16391,12 +18176,17 @@
           </a:bodyPr>
           <a:lstStyle/>
           <a:p>
+            <a:pPr>
+              <a:defRPr>
+                <a:latin typeface="Roboto"/>
+              </a:defRPr>
+            </a:pPr>
             <a:r>
               <a:rPr sz="1100" b="1">
                 <a:solidFill>
                   <a:srgbClr val="5F6F63"/>
                 </a:solidFill>
-                <a:latin typeface="Arial"/>
+                <a:latin typeface="Roboto"/>
               </a:rPr>
               <a:t>WHAT YOU'D DO ABOUT IT</a:t>
             </a:r>
@@ -16425,12 +18215,17 @@
           </a:bodyPr>
           <a:lstStyle/>
           <a:p>
+            <a:pPr>
+              <a:defRPr>
+                <a:latin typeface="Roboto"/>
+              </a:defRPr>
+            </a:pPr>
             <a:r>
               <a:rPr sz="1600" b="0">
                 <a:solidFill>
                   <a:srgbClr val="25342A"/>
                 </a:solidFill>
-                <a:latin typeface="Arial"/>
+                <a:latin typeface="Roboto"/>
               </a:rPr>
               <a:t>Maintenance contracts: 59.5% gross margin, the most profitable work you do. Installations: 29.8% gross margin, below the 52.5% needed to cover overheads.</a:t>
             </a:r>
@@ -16459,12 +18254,17 @@
           </a:bodyPr>
           <a:lstStyle/>
           <a:p>
+            <a:pPr>
+              <a:defRPr>
+                <a:latin typeface="Roboto"/>
+              </a:defRPr>
+            </a:pPr>
             <a:r>
               <a:rPr sz="900" b="0">
                 <a:solidFill>
                   <a:srgbClr val="5F6F63"/>
                 </a:solidFill>
-                <a:latin typeface="Arial"/>
+                <a:latin typeface="Roboto"/>
               </a:rPr>
               <a:t>growth.pptx</a:t>
             </a:r>
@@ -16493,13 +18293,17 @@
           </a:bodyPr>
           <a:lstStyle/>
           <a:p>
-            <a:pPr algn="ctr"/>
+            <a:pPr algn="ctr">
+              <a:defRPr>
+                <a:latin typeface="Roboto"/>
+              </a:defRPr>
+            </a:pPr>
             <a:r>
               <a:rPr sz="900" b="0">
                 <a:solidFill>
                   <a:srgbClr val="5F6F63"/>
                 </a:solidFill>
-                <a:latin typeface="Arial"/>
+                <a:latin typeface="Roboto"/>
               </a:rPr>
               <a:t>Data retrieved 2pm, Tue 6 Oct 2026 · Sample data</a:t>
             </a:r>
@@ -16528,13 +18332,17 @@
           </a:bodyPr>
           <a:lstStyle/>
           <a:p>
-            <a:pPr algn="r"/>
+            <a:pPr algn="r">
+              <a:defRPr>
+                <a:latin typeface="Roboto"/>
+              </a:defRPr>
+            </a:pPr>
             <a:r>
               <a:rPr sz="900" b="0">
                 <a:solidFill>
                   <a:srgbClr val="5F6F63"/>
                 </a:solidFill>
-                <a:latin typeface="Arial"/>
+                <a:latin typeface="Roboto"/>
               </a:rPr>
               <a:t>Slide 5 of 27</a:t>
             </a:r>
@@ -16598,7 +18406,11 @@
           <a:bodyPr rtlCol="0" anchor="ctr"/>
           <a:lstStyle/>
           <a:p>
-            <a:pPr algn="ctr"/>
+            <a:pPr algn="ctr">
+              <a:defRPr>
+                <a:latin typeface="Roboto"/>
+              </a:defRPr>
+            </a:pPr>
           </a:p>
         </p:txBody>
       </p:sp>
@@ -16624,12 +18436,17 @@
           </a:bodyPr>
           <a:lstStyle/>
           <a:p>
+            <a:pPr>
+              <a:defRPr>
+                <a:latin typeface="Roboto"/>
+              </a:defRPr>
+            </a:pPr>
             <a:r>
               <a:rPr sz="1000" b="0">
                 <a:solidFill>
                   <a:srgbClr val="5F6F63"/>
                 </a:solidFill>
-                <a:latin typeface="Arial"/>
+                <a:latin typeface="Roboto"/>
               </a:rPr>
               <a:t>SME sample businesses · Which products and services are growing?</a:t>
             </a:r>
@@ -16658,12 +18475,17 @@
           </a:bodyPr>
           <a:lstStyle/>
           <a:p>
+            <a:pPr>
+              <a:defRPr>
+                <a:latin typeface="Roboto"/>
+              </a:defRPr>
+            </a:pPr>
             <a:r>
               <a:rPr sz="2400" b="1">
                 <a:solidFill>
                   <a:srgbClr val="25342A"/>
                 </a:solidFill>
-                <a:latin typeface="Arial"/>
+                <a:latin typeface="Roboto"/>
               </a:rPr>
               <a:t>Headline numbers · Trades · Line: Maintenance contracts</a:t>
             </a:r>
@@ -16711,7 +18533,11 @@
           <a:bodyPr rtlCol="0" anchor="ctr"/>
           <a:lstStyle/>
           <a:p>
-            <a:pPr algn="ctr"/>
+            <a:pPr algn="ctr">
+              <a:defRPr>
+                <a:latin typeface="Roboto"/>
+              </a:defRPr>
+            </a:pPr>
           </a:p>
         </p:txBody>
       </p:sp>
@@ -16737,12 +18563,17 @@
           </a:bodyPr>
           <a:lstStyle/>
           <a:p>
+            <a:pPr>
+              <a:defRPr>
+                <a:latin typeface="Roboto"/>
+              </a:defRPr>
+            </a:pPr>
             <a:r>
               <a:rPr sz="1200" b="0">
                 <a:solidFill>
                   <a:srgbClr val="5F6F63"/>
                 </a:solidFill>
-                <a:latin typeface="Arial"/>
+                <a:latin typeface="Roboto"/>
               </a:rPr>
               <a:t>October against October last year</a:t>
             </a:r>
@@ -16771,12 +18602,17 @@
           </a:bodyPr>
           <a:lstStyle/>
           <a:p>
+            <a:pPr>
+              <a:defRPr>
+                <a:latin typeface="Roboto"/>
+              </a:defRPr>
+            </a:pPr>
             <a:r>
               <a:rPr sz="3000" b="1">
                 <a:solidFill>
                   <a:srgbClr val="2F7A5D"/>
                 </a:solidFill>
-                <a:latin typeface="Arial"/>
+                <a:latin typeface="Roboto"/>
               </a:rPr>
               <a:t>45.1%</a:t>
             </a:r>
@@ -16805,12 +18641,17 @@
           </a:bodyPr>
           <a:lstStyle/>
           <a:p>
+            <a:pPr>
+              <a:defRPr>
+                <a:latin typeface="Roboto"/>
+              </a:defRPr>
+            </a:pPr>
             <a:r>
               <a:rPr sz="1100" b="0">
                 <a:solidFill>
                   <a:srgbClr val="5F6F63"/>
                 </a:solidFill>
-                <a:latin typeface="Arial"/>
+                <a:latin typeface="Roboto"/>
               </a:rPr>
               <a:t>$35,800 against $24,670</a:t>
             </a:r>
@@ -16858,7 +18699,11 @@
           <a:bodyPr rtlCol="0" anchor="ctr"/>
           <a:lstStyle/>
           <a:p>
-            <a:pPr algn="ctr"/>
+            <a:pPr algn="ctr">
+              <a:defRPr>
+                <a:latin typeface="Roboto"/>
+              </a:defRPr>
+            </a:pPr>
           </a:p>
         </p:txBody>
       </p:sp>
@@ -16884,12 +18729,17 @@
           </a:bodyPr>
           <a:lstStyle/>
           <a:p>
+            <a:pPr>
+              <a:defRPr>
+                <a:latin typeface="Roboto"/>
+              </a:defRPr>
+            </a:pPr>
             <a:r>
               <a:rPr sz="1200" b="0">
                 <a:solidFill>
                   <a:srgbClr val="5F6F63"/>
                 </a:solidFill>
-                <a:latin typeface="Arial"/>
+                <a:latin typeface="Roboto"/>
               </a:rPr>
               <a:t>Year to date (Jul to Oct 2025)</a:t>
             </a:r>
@@ -16918,12 +18768,17 @@
           </a:bodyPr>
           <a:lstStyle/>
           <a:p>
+            <a:pPr>
+              <a:defRPr>
+                <a:latin typeface="Roboto"/>
+              </a:defRPr>
+            </a:pPr>
             <a:r>
               <a:rPr sz="3000" b="1">
                 <a:solidFill>
                   <a:srgbClr val="2F7A5D"/>
                 </a:solidFill>
-                <a:latin typeface="Arial"/>
+                <a:latin typeface="Roboto"/>
               </a:rPr>
               <a:t>$135,400</a:t>
             </a:r>
@@ -16952,12 +18807,17 @@
           </a:bodyPr>
           <a:lstStyle/>
           <a:p>
+            <a:pPr>
+              <a:defRPr>
+                <a:latin typeface="Roboto"/>
+              </a:defRPr>
+            </a:pPr>
             <a:r>
               <a:rPr sz="1100" b="0">
                 <a:solidFill>
                   <a:srgbClr val="5F6F63"/>
                 </a:solidFill>
-                <a:latin typeface="Arial"/>
+                <a:latin typeface="Roboto"/>
               </a:rPr>
               <a:t>same period last year: not in the data</a:t>
             </a:r>
@@ -17005,7 +18865,11 @@
           <a:bodyPr rtlCol="0" anchor="ctr"/>
           <a:lstStyle/>
           <a:p>
-            <a:pPr algn="ctr"/>
+            <a:pPr algn="ctr">
+              <a:defRPr>
+                <a:latin typeface="Roboto"/>
+              </a:defRPr>
+            </a:pPr>
           </a:p>
         </p:txBody>
       </p:sp>
@@ -17031,12 +18895,17 @@
           </a:bodyPr>
           <a:lstStyle/>
           <a:p>
+            <a:pPr>
+              <a:defRPr>
+                <a:latin typeface="Roboto"/>
+              </a:defRPr>
+            </a:pPr>
             <a:r>
               <a:rPr sz="1200" b="0">
                 <a:solidFill>
                   <a:srgbClr val="5F6F63"/>
                 </a:solidFill>
-                <a:latin typeface="Arial"/>
+                <a:latin typeface="Roboto"/>
               </a:rPr>
               <a:t>Gross margin, year to date</a:t>
             </a:r>
@@ -17065,12 +18934,17 @@
           </a:bodyPr>
           <a:lstStyle/>
           <a:p>
+            <a:pPr>
+              <a:defRPr>
+                <a:latin typeface="Roboto"/>
+              </a:defRPr>
+            </a:pPr>
             <a:r>
               <a:rPr sz="3000" b="1">
                 <a:solidFill>
                   <a:srgbClr val="2F7A5D"/>
                 </a:solidFill>
-                <a:latin typeface="Arial"/>
+                <a:latin typeface="Roboto"/>
               </a:rPr>
               <a:t>59.5%</a:t>
             </a:r>
@@ -17099,12 +18973,17 @@
           </a:bodyPr>
           <a:lstStyle/>
           <a:p>
+            <a:pPr>
+              <a:defRPr>
+                <a:latin typeface="Roboto"/>
+              </a:defRPr>
+            </a:pPr>
             <a:r>
               <a:rPr sz="1100" b="0">
                 <a:solidFill>
                   <a:srgbClr val="5F6F63"/>
                 </a:solidFill>
-                <a:latin typeface="Arial"/>
+                <a:latin typeface="Roboto"/>
               </a:rPr>
               <a:t>$80,546 before overheads</a:t>
             </a:r>
@@ -17133,12 +19012,17 @@
           </a:bodyPr>
           <a:lstStyle/>
           <a:p>
+            <a:pPr>
+              <a:defRPr>
+                <a:latin typeface="Roboto"/>
+              </a:defRPr>
+            </a:pPr>
             <a:r>
               <a:rPr sz="900" b="0">
                 <a:solidFill>
                   <a:srgbClr val="5F6F63"/>
                 </a:solidFill>
-                <a:latin typeface="Arial"/>
+                <a:latin typeface="Roboto"/>
               </a:rPr>
               <a:t>growth.pptx</a:t>
             </a:r>
@@ -17167,13 +19051,17 @@
           </a:bodyPr>
           <a:lstStyle/>
           <a:p>
-            <a:pPr algn="ctr"/>
+            <a:pPr algn="ctr">
+              <a:defRPr>
+                <a:latin typeface="Roboto"/>
+              </a:defRPr>
+            </a:pPr>
             <a:r>
               <a:rPr sz="900" b="0">
                 <a:solidFill>
                   <a:srgbClr val="5F6F63"/>
                 </a:solidFill>
-                <a:latin typeface="Arial"/>
+                <a:latin typeface="Roboto"/>
               </a:rPr>
               <a:t>Data retrieved 2pm, Tue 6 Oct 2026 · Sample data</a:t>
             </a:r>
@@ -17202,13 +19090,17 @@
           </a:bodyPr>
           <a:lstStyle/>
           <a:p>
-            <a:pPr algn="r"/>
+            <a:pPr algn="r">
+              <a:defRPr>
+                <a:latin typeface="Roboto"/>
+              </a:defRPr>
+            </a:pPr>
             <a:r>
               <a:rPr sz="900" b="0">
                 <a:solidFill>
                   <a:srgbClr val="5F6F63"/>
                 </a:solidFill>
-                <a:latin typeface="Arial"/>
+                <a:latin typeface="Roboto"/>
               </a:rPr>
               <a:t>Slide 6 of 27</a:t>
             </a:r>
@@ -17272,7 +19164,11 @@
           <a:bodyPr rtlCol="0" anchor="ctr"/>
           <a:lstStyle/>
           <a:p>
-            <a:pPr algn="ctr"/>
+            <a:pPr algn="ctr">
+              <a:defRPr>
+                <a:latin typeface="Roboto"/>
+              </a:defRPr>
+            </a:pPr>
           </a:p>
         </p:txBody>
       </p:sp>
@@ -17298,12 +19194,17 @@
           </a:bodyPr>
           <a:lstStyle/>
           <a:p>
+            <a:pPr>
+              <a:defRPr>
+                <a:latin typeface="Roboto"/>
+              </a:defRPr>
+            </a:pPr>
             <a:r>
               <a:rPr sz="1000" b="0">
                 <a:solidFill>
                   <a:srgbClr val="5F6F63"/>
                 </a:solidFill>
-                <a:latin typeface="Arial"/>
+                <a:latin typeface="Roboto"/>
               </a:rPr>
               <a:t>SME sample businesses · Which products and services are growing?</a:t>
             </a:r>
@@ -17332,12 +19233,17 @@
           </a:bodyPr>
           <a:lstStyle/>
           <a:p>
+            <a:pPr>
+              <a:defRPr>
+                <a:latin typeface="Roboto"/>
+              </a:defRPr>
+            </a:pPr>
             <a:r>
               <a:rPr sz="2400" b="1">
                 <a:solidFill>
                   <a:srgbClr val="25342A"/>
                 </a:solidFill>
-                <a:latin typeface="Arial"/>
+                <a:latin typeface="Roboto"/>
               </a:rPr>
               <a:t>What it shows · Trades · Line: Maintenance contracts</a:t>
             </a:r>
@@ -17385,7 +19291,11 @@
           <a:bodyPr rtlCol="0" anchor="ctr"/>
           <a:lstStyle/>
           <a:p>
-            <a:pPr algn="ctr"/>
+            <a:pPr algn="ctr">
+              <a:defRPr>
+                <a:latin typeface="Roboto"/>
+              </a:defRPr>
+            </a:pPr>
           </a:p>
         </p:txBody>
       </p:sp>
@@ -17411,12 +19321,17 @@
           </a:bodyPr>
           <a:lstStyle/>
           <a:p>
+            <a:pPr>
+              <a:defRPr>
+                <a:latin typeface="Roboto"/>
+              </a:defRPr>
+            </a:pPr>
             <a:r>
               <a:rPr sz="1100" b="1">
                 <a:solidFill>
                   <a:srgbClr val="5F6F63"/>
                 </a:solidFill>
-                <a:latin typeface="Arial"/>
+                <a:latin typeface="Roboto"/>
               </a:rPr>
               <a:t>WHAT IT SHOWS</a:t>
             </a:r>
@@ -17445,12 +19360,17 @@
           </a:bodyPr>
           <a:lstStyle/>
           <a:p>
+            <a:pPr>
+              <a:defRPr>
+                <a:latin typeface="Roboto"/>
+              </a:defRPr>
+            </a:pPr>
             <a:r>
               <a:rPr sz="1600" b="0">
                 <a:solidFill>
                   <a:srgbClr val="25342A"/>
                 </a:solidFill>
-                <a:latin typeface="Arial"/>
+                <a:latin typeface="Roboto"/>
               </a:rPr>
               <a:t>Maintenance contracts brought in $135,400 this financial year to date, at a 59.5% gross margin (above the 38.6% overall).</a:t>
             </a:r>
@@ -17498,7 +19418,11 @@
           <a:bodyPr rtlCol="0" anchor="ctr"/>
           <a:lstStyle/>
           <a:p>
-            <a:pPr algn="ctr"/>
+            <a:pPr algn="ctr">
+              <a:defRPr>
+                <a:latin typeface="Roboto"/>
+              </a:defRPr>
+            </a:pPr>
           </a:p>
         </p:txBody>
       </p:sp>
@@ -17524,12 +19448,17 @@
           </a:bodyPr>
           <a:lstStyle/>
           <a:p>
+            <a:pPr>
+              <a:defRPr>
+                <a:latin typeface="Roboto"/>
+              </a:defRPr>
+            </a:pPr>
             <a:r>
               <a:rPr sz="1100" b="1">
                 <a:solidFill>
                   <a:srgbClr val="5F6F63"/>
                 </a:solidFill>
-                <a:latin typeface="Arial"/>
+                <a:latin typeface="Roboto"/>
               </a:rPr>
               <a:t>WHAT YOU'D DO ABOUT IT</a:t>
             </a:r>
@@ -17558,12 +19487,17 @@
           </a:bodyPr>
           <a:lstStyle/>
           <a:p>
+            <a:pPr>
+              <a:defRPr>
+                <a:latin typeface="Roboto"/>
+              </a:defRPr>
+            </a:pPr>
             <a:r>
               <a:rPr sz="1600" b="0">
                 <a:solidFill>
                   <a:srgbClr val="25342A"/>
                 </a:solidFill>
-                <a:latin typeface="Arial"/>
+                <a:latin typeface="Roboto"/>
               </a:rPr>
               <a:t>Maintenance contracts: 59.5% gross margin, 7.0 points clear of the 52.5% overheads need.</a:t>
             </a:r>
@@ -17592,12 +19526,17 @@
           </a:bodyPr>
           <a:lstStyle/>
           <a:p>
+            <a:pPr>
+              <a:defRPr>
+                <a:latin typeface="Roboto"/>
+              </a:defRPr>
+            </a:pPr>
             <a:r>
               <a:rPr sz="900" b="0">
                 <a:solidFill>
                   <a:srgbClr val="5F6F63"/>
                 </a:solidFill>
-                <a:latin typeface="Arial"/>
+                <a:latin typeface="Roboto"/>
               </a:rPr>
               <a:t>growth.pptx</a:t>
             </a:r>
@@ -17626,13 +19565,17 @@
           </a:bodyPr>
           <a:lstStyle/>
           <a:p>
-            <a:pPr algn="ctr"/>
+            <a:pPr algn="ctr">
+              <a:defRPr>
+                <a:latin typeface="Roboto"/>
+              </a:defRPr>
+            </a:pPr>
             <a:r>
               <a:rPr sz="900" b="0">
                 <a:solidFill>
                   <a:srgbClr val="5F6F63"/>
                 </a:solidFill>
-                <a:latin typeface="Arial"/>
+                <a:latin typeface="Roboto"/>
               </a:rPr>
               <a:t>Data retrieved 2pm, Tue 6 Oct 2026 · Sample data</a:t>
             </a:r>
@@ -17661,13 +19604,17 @@
           </a:bodyPr>
           <a:lstStyle/>
           <a:p>
-            <a:pPr algn="r"/>
+            <a:pPr algn="r">
+              <a:defRPr>
+                <a:latin typeface="Roboto"/>
+              </a:defRPr>
+            </a:pPr>
             <a:r>
               <a:rPr sz="900" b="0">
                 <a:solidFill>
                   <a:srgbClr val="5F6F63"/>
                 </a:solidFill>
-                <a:latin typeface="Arial"/>
+                <a:latin typeface="Roboto"/>
               </a:rPr>
               <a:t>Slide 7 of 27</a:t>
             </a:r>
@@ -17731,7 +19678,11 @@
           <a:bodyPr rtlCol="0" anchor="ctr"/>
           <a:lstStyle/>
           <a:p>
-            <a:pPr algn="ctr"/>
+            <a:pPr algn="ctr">
+              <a:defRPr>
+                <a:latin typeface="Roboto"/>
+              </a:defRPr>
+            </a:pPr>
           </a:p>
         </p:txBody>
       </p:sp>
@@ -17757,12 +19708,17 @@
           </a:bodyPr>
           <a:lstStyle/>
           <a:p>
+            <a:pPr>
+              <a:defRPr>
+                <a:latin typeface="Roboto"/>
+              </a:defRPr>
+            </a:pPr>
             <a:r>
               <a:rPr sz="1000" b="0">
                 <a:solidFill>
                   <a:srgbClr val="5F6F63"/>
                 </a:solidFill>
-                <a:latin typeface="Arial"/>
+                <a:latin typeface="Roboto"/>
               </a:rPr>
               <a:t>SME sample businesses · Which products and services are growing?</a:t>
             </a:r>
@@ -17791,12 +19747,17 @@
           </a:bodyPr>
           <a:lstStyle/>
           <a:p>
+            <a:pPr>
+              <a:defRPr>
+                <a:latin typeface="Roboto"/>
+              </a:defRPr>
+            </a:pPr>
             <a:r>
               <a:rPr sz="2400" b="1">
                 <a:solidFill>
                   <a:srgbClr val="25342A"/>
                 </a:solidFill>
-                <a:latin typeface="Arial"/>
+                <a:latin typeface="Roboto"/>
               </a:rPr>
               <a:t>Headline numbers · Trades · Line: Installations</a:t>
             </a:r>
@@ -17844,7 +19805,11 @@
           <a:bodyPr rtlCol="0" anchor="ctr"/>
           <a:lstStyle/>
           <a:p>
-            <a:pPr algn="ctr"/>
+            <a:pPr algn="ctr">
+              <a:defRPr>
+                <a:latin typeface="Roboto"/>
+              </a:defRPr>
+            </a:pPr>
           </a:p>
         </p:txBody>
       </p:sp>
@@ -17870,12 +19835,17 @@
           </a:bodyPr>
           <a:lstStyle/>
           <a:p>
+            <a:pPr>
+              <a:defRPr>
+                <a:latin typeface="Roboto"/>
+              </a:defRPr>
+            </a:pPr>
             <a:r>
               <a:rPr sz="1200" b="0">
                 <a:solidFill>
                   <a:srgbClr val="5F6F63"/>
                 </a:solidFill>
-                <a:latin typeface="Arial"/>
+                <a:latin typeface="Roboto"/>
               </a:rPr>
               <a:t>October against October last year</a:t>
             </a:r>
@@ -17904,12 +19874,17 @@
           </a:bodyPr>
           <a:lstStyle/>
           <a:p>
+            <a:pPr>
+              <a:defRPr>
+                <a:latin typeface="Roboto"/>
+              </a:defRPr>
+            </a:pPr>
             <a:r>
               <a:rPr sz="3000" b="1">
                 <a:solidFill>
                   <a:srgbClr val="B42318"/>
                 </a:solidFill>
-                <a:latin typeface="Arial"/>
+                <a:latin typeface="Roboto"/>
               </a:rPr>
               <a:t>(43.9%)</a:t>
             </a:r>
@@ -17938,12 +19913,17 @@
           </a:bodyPr>
           <a:lstStyle/>
           <a:p>
+            <a:pPr>
+              <a:defRPr>
+                <a:latin typeface="Roboto"/>
+              </a:defRPr>
+            </a:pPr>
             <a:r>
               <a:rPr sz="1100" b="0">
                 <a:solidFill>
                   <a:srgbClr val="5F6F63"/>
                 </a:solidFill>
-                <a:latin typeface="Arial"/>
+                <a:latin typeface="Roboto"/>
               </a:rPr>
               <a:t>$70,800 against $126,300</a:t>
             </a:r>
@@ -17991,7 +19971,11 @@
           <a:bodyPr rtlCol="0" anchor="ctr"/>
           <a:lstStyle/>
           <a:p>
-            <a:pPr algn="ctr"/>
+            <a:pPr algn="ctr">
+              <a:defRPr>
+                <a:latin typeface="Roboto"/>
+              </a:defRPr>
+            </a:pPr>
           </a:p>
         </p:txBody>
       </p:sp>
@@ -18017,12 +20001,17 @@
           </a:bodyPr>
           <a:lstStyle/>
           <a:p>
+            <a:pPr>
+              <a:defRPr>
+                <a:latin typeface="Roboto"/>
+              </a:defRPr>
+            </a:pPr>
             <a:r>
               <a:rPr sz="1200" b="0">
                 <a:solidFill>
                   <a:srgbClr val="5F6F63"/>
                 </a:solidFill>
-                <a:latin typeface="Arial"/>
+                <a:latin typeface="Roboto"/>
               </a:rPr>
               <a:t>Year to date (Jul to Oct 2025)</a:t>
             </a:r>
@@ -18051,12 +20040,17 @@
           </a:bodyPr>
           <a:lstStyle/>
           <a:p>
+            <a:pPr>
+              <a:defRPr>
+                <a:latin typeface="Roboto"/>
+              </a:defRPr>
+            </a:pPr>
             <a:r>
               <a:rPr sz="3000" b="1">
                 <a:solidFill>
                   <a:srgbClr val="2F7A5D"/>
                 </a:solidFill>
-                <a:latin typeface="Arial"/>
+                <a:latin typeface="Roboto"/>
               </a:rPr>
               <a:t>$367,900</a:t>
             </a:r>
@@ -18085,12 +20079,17 @@
           </a:bodyPr>
           <a:lstStyle/>
           <a:p>
+            <a:pPr>
+              <a:defRPr>
+                <a:latin typeface="Roboto"/>
+              </a:defRPr>
+            </a:pPr>
             <a:r>
               <a:rPr sz="1100" b="0">
                 <a:solidFill>
                   <a:srgbClr val="5F6F63"/>
                 </a:solidFill>
-                <a:latin typeface="Arial"/>
+                <a:latin typeface="Roboto"/>
               </a:rPr>
               <a:t>same period last year: not in the data</a:t>
             </a:r>
@@ -18138,7 +20137,11 @@
           <a:bodyPr rtlCol="0" anchor="ctr"/>
           <a:lstStyle/>
           <a:p>
-            <a:pPr algn="ctr"/>
+            <a:pPr algn="ctr">
+              <a:defRPr>
+                <a:latin typeface="Roboto"/>
+              </a:defRPr>
+            </a:pPr>
           </a:p>
         </p:txBody>
       </p:sp>
@@ -18164,12 +20167,17 @@
           </a:bodyPr>
           <a:lstStyle/>
           <a:p>
+            <a:pPr>
+              <a:defRPr>
+                <a:latin typeface="Roboto"/>
+              </a:defRPr>
+            </a:pPr>
             <a:r>
               <a:rPr sz="1200" b="0">
                 <a:solidFill>
                   <a:srgbClr val="5F6F63"/>
                 </a:solidFill>
-                <a:latin typeface="Arial"/>
+                <a:latin typeface="Roboto"/>
               </a:rPr>
               <a:t>Gross margin, year to date</a:t>
             </a:r>
@@ -18198,12 +20206,17 @@
           </a:bodyPr>
           <a:lstStyle/>
           <a:p>
+            <a:pPr>
+              <a:defRPr>
+                <a:latin typeface="Roboto"/>
+              </a:defRPr>
+            </a:pPr>
             <a:r>
               <a:rPr sz="3000" b="1">
                 <a:solidFill>
                   <a:srgbClr val="2F7A5D"/>
                 </a:solidFill>
-                <a:latin typeface="Arial"/>
+                <a:latin typeface="Roboto"/>
               </a:rPr>
               <a:t>29.8%</a:t>
             </a:r>
@@ -18232,12 +20245,17 @@
           </a:bodyPr>
           <a:lstStyle/>
           <a:p>
+            <a:pPr>
+              <a:defRPr>
+                <a:latin typeface="Roboto"/>
+              </a:defRPr>
+            </a:pPr>
             <a:r>
               <a:rPr sz="1100" b="0">
                 <a:solidFill>
                   <a:srgbClr val="5F6F63"/>
                 </a:solidFill>
-                <a:latin typeface="Arial"/>
+                <a:latin typeface="Roboto"/>
               </a:rPr>
               <a:t>$109,662 before overheads</a:t>
             </a:r>
@@ -18266,12 +20284,17 @@
           </a:bodyPr>
           <a:lstStyle/>
           <a:p>
+            <a:pPr>
+              <a:defRPr>
+                <a:latin typeface="Roboto"/>
+              </a:defRPr>
+            </a:pPr>
             <a:r>
               <a:rPr sz="900" b="0">
                 <a:solidFill>
                   <a:srgbClr val="5F6F63"/>
                 </a:solidFill>
-                <a:latin typeface="Arial"/>
+                <a:latin typeface="Roboto"/>
               </a:rPr>
               <a:t>growth.pptx</a:t>
             </a:r>
@@ -18300,13 +20323,17 @@
           </a:bodyPr>
           <a:lstStyle/>
           <a:p>
-            <a:pPr algn="ctr"/>
+            <a:pPr algn="ctr">
+              <a:defRPr>
+                <a:latin typeface="Roboto"/>
+              </a:defRPr>
+            </a:pPr>
             <a:r>
               <a:rPr sz="900" b="0">
                 <a:solidFill>
                   <a:srgbClr val="5F6F63"/>
                 </a:solidFill>
-                <a:latin typeface="Arial"/>
+                <a:latin typeface="Roboto"/>
               </a:rPr>
               <a:t>Data retrieved 2pm, Tue 6 Oct 2026 · Sample data</a:t>
             </a:r>
@@ -18335,13 +20362,17 @@
           </a:bodyPr>
           <a:lstStyle/>
           <a:p>
-            <a:pPr algn="r"/>
+            <a:pPr algn="r">
+              <a:defRPr>
+                <a:latin typeface="Roboto"/>
+              </a:defRPr>
+            </a:pPr>
             <a:r>
               <a:rPr sz="900" b="0">
                 <a:solidFill>
                   <a:srgbClr val="5F6F63"/>
                 </a:solidFill>
-                <a:latin typeface="Arial"/>
+                <a:latin typeface="Roboto"/>
               </a:rPr>
               <a:t>Slide 8 of 27</a:t>
             </a:r>
@@ -18405,7 +20436,11 @@
           <a:bodyPr rtlCol="0" anchor="ctr"/>
           <a:lstStyle/>
           <a:p>
-            <a:pPr algn="ctr"/>
+            <a:pPr algn="ctr">
+              <a:defRPr>
+                <a:latin typeface="Roboto"/>
+              </a:defRPr>
+            </a:pPr>
           </a:p>
         </p:txBody>
       </p:sp>
@@ -18431,12 +20466,17 @@
           </a:bodyPr>
           <a:lstStyle/>
           <a:p>
+            <a:pPr>
+              <a:defRPr>
+                <a:latin typeface="Roboto"/>
+              </a:defRPr>
+            </a:pPr>
             <a:r>
               <a:rPr sz="1000" b="0">
                 <a:solidFill>
                   <a:srgbClr val="5F6F63"/>
                 </a:solidFill>
-                <a:latin typeface="Arial"/>
+                <a:latin typeface="Roboto"/>
               </a:rPr>
               <a:t>SME sample businesses · Which products and services are growing?</a:t>
             </a:r>
@@ -18465,12 +20505,17 @@
           </a:bodyPr>
           <a:lstStyle/>
           <a:p>
+            <a:pPr>
+              <a:defRPr>
+                <a:latin typeface="Roboto"/>
+              </a:defRPr>
+            </a:pPr>
             <a:r>
               <a:rPr sz="2400" b="1">
                 <a:solidFill>
                   <a:srgbClr val="25342A"/>
                 </a:solidFill>
-                <a:latin typeface="Arial"/>
+                <a:latin typeface="Roboto"/>
               </a:rPr>
               <a:t>What it shows · Trades · Line: Installations</a:t>
             </a:r>
@@ -18518,7 +20563,11 @@
           <a:bodyPr rtlCol="0" anchor="ctr"/>
           <a:lstStyle/>
           <a:p>
-            <a:pPr algn="ctr"/>
+            <a:pPr algn="ctr">
+              <a:defRPr>
+                <a:latin typeface="Roboto"/>
+              </a:defRPr>
+            </a:pPr>
           </a:p>
         </p:txBody>
       </p:sp>
@@ -18544,12 +20593,17 @@
           </a:bodyPr>
           <a:lstStyle/>
           <a:p>
+            <a:pPr>
+              <a:defRPr>
+                <a:latin typeface="Roboto"/>
+              </a:defRPr>
+            </a:pPr>
             <a:r>
               <a:rPr sz="1100" b="1">
                 <a:solidFill>
                   <a:srgbClr val="5F6F63"/>
                 </a:solidFill>
-                <a:latin typeface="Arial"/>
+                <a:latin typeface="Roboto"/>
               </a:rPr>
               <a:t>WHAT IT SHOWS</a:t>
             </a:r>
@@ -18578,12 +20632,17 @@
           </a:bodyPr>
           <a:lstStyle/>
           <a:p>
+            <a:pPr>
+              <a:defRPr>
+                <a:latin typeface="Roboto"/>
+              </a:defRPr>
+            </a:pPr>
             <a:r>
               <a:rPr sz="1600" b="0">
                 <a:solidFill>
                   <a:srgbClr val="25342A"/>
                 </a:solidFill>
-                <a:latin typeface="Arial"/>
+                <a:latin typeface="Roboto"/>
               </a:rPr>
               <a:t>Installations brought in $367,900 this financial year to date, at a 29.8% gross margin (below the 38.6% overall).</a:t>
             </a:r>
@@ -18631,7 +20690,11 @@
           <a:bodyPr rtlCol="0" anchor="ctr"/>
           <a:lstStyle/>
           <a:p>
-            <a:pPr algn="ctr"/>
+            <a:pPr algn="ctr">
+              <a:defRPr>
+                <a:latin typeface="Roboto"/>
+              </a:defRPr>
+            </a:pPr>
           </a:p>
         </p:txBody>
       </p:sp>
@@ -18657,12 +20720,17 @@
           </a:bodyPr>
           <a:lstStyle/>
           <a:p>
+            <a:pPr>
+              <a:defRPr>
+                <a:latin typeface="Roboto"/>
+              </a:defRPr>
+            </a:pPr>
             <a:r>
               <a:rPr sz="1100" b="1">
                 <a:solidFill>
                   <a:srgbClr val="5F6F63"/>
                 </a:solidFill>
-                <a:latin typeface="Arial"/>
+                <a:latin typeface="Roboto"/>
               </a:rPr>
               <a:t>WHAT YOU'D DO ABOUT IT</a:t>
             </a:r>
@@ -18691,12 +20759,17 @@
           </a:bodyPr>
           <a:lstStyle/>
           <a:p>
+            <a:pPr>
+              <a:defRPr>
+                <a:latin typeface="Roboto"/>
+              </a:defRPr>
+            </a:pPr>
             <a:r>
               <a:rPr sz="1600" b="0">
                 <a:solidFill>
                   <a:srgbClr val="25342A"/>
                 </a:solidFill>
-                <a:latin typeface="Arial"/>
+                <a:latin typeface="Roboto"/>
               </a:rPr>
               <a:t>Installations: 29.8% gross margin, below the 52.5% needed to cover overheads.</a:t>
             </a:r>
@@ -18725,12 +20798,17 @@
           </a:bodyPr>
           <a:lstStyle/>
           <a:p>
+            <a:pPr>
+              <a:defRPr>
+                <a:latin typeface="Roboto"/>
+              </a:defRPr>
+            </a:pPr>
             <a:r>
               <a:rPr sz="900" b="0">
                 <a:solidFill>
                   <a:srgbClr val="5F6F63"/>
                 </a:solidFill>
-                <a:latin typeface="Arial"/>
+                <a:latin typeface="Roboto"/>
               </a:rPr>
               <a:t>growth.pptx</a:t>
             </a:r>
@@ -18759,13 +20837,17 @@
           </a:bodyPr>
           <a:lstStyle/>
           <a:p>
-            <a:pPr algn="ctr"/>
+            <a:pPr algn="ctr">
+              <a:defRPr>
+                <a:latin typeface="Roboto"/>
+              </a:defRPr>
+            </a:pPr>
             <a:r>
               <a:rPr sz="900" b="0">
                 <a:solidFill>
                   <a:srgbClr val="5F6F63"/>
                 </a:solidFill>
-                <a:latin typeface="Arial"/>
+                <a:latin typeface="Roboto"/>
               </a:rPr>
               <a:t>Data retrieved 2pm, Tue 6 Oct 2026 · Sample data</a:t>
             </a:r>
@@ -18794,13 +20876,17 @@
           </a:bodyPr>
           <a:lstStyle/>
           <a:p>
-            <a:pPr algn="r"/>
+            <a:pPr algn="r">
+              <a:defRPr>
+                <a:latin typeface="Roboto"/>
+              </a:defRPr>
+            </a:pPr>
             <a:r>
               <a:rPr sz="900" b="0">
                 <a:solidFill>
                   <a:srgbClr val="5F6F63"/>
                 </a:solidFill>
-                <a:latin typeface="Arial"/>
+                <a:latin typeface="Roboto"/>
               </a:rPr>
               <a:t>Slide 9 of 27</a:t>
             </a:r>

--- a/media/exports/reports/2025-10/growth.pptx
+++ b/media/exports/reports/2025-10/growth.pptx
@@ -5647,7 +5647,7 @@
                 </a:solidFill>
                 <a:latin typeface="Roboto"/>
               </a:rPr>
-              <a:t>Call-outs and repairs: 43.6% gross margin, below the 52.5% needed to cover overheads.</a:t>
+              <a:t>Call-outs and repairs: 43.6% gross margin, 8.6 points over the 35.0% target ($6,857 ahead on $79,777 this financial year to date).</a:t>
             </a:r>
           </a:p>
         </p:txBody>
@@ -5946,7 +5946,7 @@
                 </a:solidFill>
                 <a:latin typeface="Roboto"/>
               </a:rPr>
-              <a:t>Gross margin = revenue less direct cost (materials, subcontractors and time at cost for trades; contractors and consultant time for services), before overheads. Growth is year on year: each month against the same month a year earlier.</a:t>
+              <a:t>Growth is year on year: each month against the same month a year earlier.</a:t>
             </a:r>
           </a:p>
         </p:txBody>
@@ -6263,7 +6263,7 @@
                 </a:solidFill>
                 <a:latin typeface="Roboto"/>
               </a:rPr>
-              <a:t>Gross margin = revenue less direct cost (materials, subcontractors and time at cost for trades; contractors and consultant time for services), before overheads. Growth is year on year: each month against the same month a year earlier.</a:t>
+              <a:t>Growth is year on year: each month against the same month a year earlier.</a:t>
             </a:r>
           </a:p>
         </p:txBody>
@@ -10029,7 +10029,7 @@
                 </a:solidFill>
                 <a:latin typeface="Roboto"/>
               </a:rPr>
-              <a:t>Training: 78.0% gross margin, the most profitable work you do. Projects: 61.8% gross margin, below the 93.3% needed to cover overheads.</a:t>
+              <a:t>Projects: 61.8% gross margin, 21.8 points over the 40.0% target ($40,934 ahead on $187,490 this financial year to date). Training: 78.0% gross margin, 38.0 points over the 40.0% target ($9,840 ahead on $25,900 this financial year to date).</a:t>
             </a:r>
           </a:p>
         </p:txBody>
@@ -11688,7 +11688,7 @@
                 </a:solidFill>
                 <a:latin typeface="Roboto"/>
               </a:rPr>
-              <a:t>Projects: 61.8% gross margin, below the 93.3% needed to cover overheads.</a:t>
+              <a:t>Projects: 61.8% gross margin, 21.8 points over the 40.0% target ($40,934 ahead on $187,490 this financial year to date).</a:t>
             </a:r>
           </a:p>
         </p:txBody>
@@ -12960,7 +12960,7 @@
                 </a:solidFill>
                 <a:latin typeface="Roboto"/>
               </a:rPr>
-              <a:t>Retainers: 65.1% gross margin, below the 93.3% needed to cover overheads.</a:t>
+              <a:t>Retainers: 65.1% gross margin, 25.1 points over the 40.0% target ($16,380 ahead on $65,200 this financial year to date).</a:t>
             </a:r>
           </a:p>
         </p:txBody>
@@ -14232,7 +14232,7 @@
                 </a:solidFill>
                 <a:latin typeface="Roboto"/>
               </a:rPr>
-              <a:t>Training: 78.0% gross margin, below the 93.3% needed to cover overheads.</a:t>
+              <a:t>Training: 78.0% gross margin, 38.0 points over the 40.0% target ($9,840 ahead on $25,900 this financial year to date).</a:t>
             </a:r>
           </a:p>
         </p:txBody>
@@ -14531,7 +14531,7 @@
                 </a:solidFill>
                 <a:latin typeface="Roboto"/>
               </a:rPr>
-              <a:t>Gross margin = revenue less direct cost (materials, subcontractors and time at cost for trades; contractors and consultant time for services), before overheads. Growth is year on year: each month against the same month a year earlier.</a:t>
+              <a:t>Growth is year on year: each month against the same month a year earlier.</a:t>
             </a:r>
           </a:p>
         </p:txBody>
@@ -14848,7 +14848,7 @@
                 </a:solidFill>
                 <a:latin typeface="Roboto"/>
               </a:rPr>
-              <a:t>Gross margin = revenue less direct cost (materials, subcontractors and time at cost for trades; contractors and consultant time for services), before overheads. Growth is year on year: each month against the same month a year earlier.</a:t>
+              <a:t>Growth is year on year: each month against the same month a year earlier.</a:t>
             </a:r>
           </a:p>
         </p:txBody>
@@ -18227,7 +18227,7 @@
                 </a:solidFill>
                 <a:latin typeface="Roboto"/>
               </a:rPr>
-              <a:t>Maintenance contracts: 59.5% gross margin, the most profitable work you do. Installations: 29.8% gross margin, below the 52.5% needed to cover overheads.</a:t>
+              <a:t>Installations: 29.8% gross margin, 5.2 points under the 35.0% target: about $19,103 on $367,900 of revenue this financial year to date. It's below the 52.5% needed to cover overheads, too. Maintenance contracts: 59.5% gross margin, 24.5 points over the 35.0% target ($33,156 ahead on $135,400 this financial year to date).</a:t>
             </a:r>
           </a:p>
         </p:txBody>
@@ -19499,7 +19499,7 @@
                 </a:solidFill>
                 <a:latin typeface="Roboto"/>
               </a:rPr>
-              <a:t>Maintenance contracts: 59.5% gross margin, 7.0 points clear of the 52.5% overheads need.</a:t>
+              <a:t>Maintenance contracts: 59.5% gross margin, 24.5 points over the 35.0% target ($33,156 ahead on $135,400 this financial year to date).</a:t>
             </a:r>
           </a:p>
         </p:txBody>
@@ -20771,7 +20771,7 @@
                 </a:solidFill>
                 <a:latin typeface="Roboto"/>
               </a:rPr>
-              <a:t>Installations: 29.8% gross margin, below the 52.5% needed to cover overheads.</a:t>
+              <a:t>Installations: 29.8% gross margin, 5.2 points under the 35.0% target: about $19,103 on $367,900 of revenue this financial year to date. It's below the 52.5% needed to cover overheads, too.</a:t>
             </a:r>
           </a:p>
         </p:txBody>
